--- a/update_relation_new_blocks.pptx
+++ b/update_relation_new_blocks.pptx
@@ -259,7 +259,7 @@
           <a:p>
             <a:fld id="{490C79C5-3CC8-4373-907F-2E1F47B9C95B}" type="datetimeFigureOut">
               <a:rPr lang="fr-FR" smtClean="0"/>
-              <a:t>29/05/2026</a:t>
+              <a:t>29/06/2026</a:t>
             </a:fld>
             <a:endParaRPr lang="fr-FR"/>
           </a:p>
@@ -457,7 +457,7 @@
           <a:p>
             <a:fld id="{490C79C5-3CC8-4373-907F-2E1F47B9C95B}" type="datetimeFigureOut">
               <a:rPr lang="fr-FR" smtClean="0"/>
-              <a:t>29/05/2026</a:t>
+              <a:t>29/06/2026</a:t>
             </a:fld>
             <a:endParaRPr lang="fr-FR"/>
           </a:p>
@@ -665,7 +665,7 @@
           <a:p>
             <a:fld id="{490C79C5-3CC8-4373-907F-2E1F47B9C95B}" type="datetimeFigureOut">
               <a:rPr lang="fr-FR" smtClean="0"/>
-              <a:t>29/05/2026</a:t>
+              <a:t>29/06/2026</a:t>
             </a:fld>
             <a:endParaRPr lang="fr-FR"/>
           </a:p>
@@ -863,7 +863,7 @@
           <a:p>
             <a:fld id="{490C79C5-3CC8-4373-907F-2E1F47B9C95B}" type="datetimeFigureOut">
               <a:rPr lang="fr-FR" smtClean="0"/>
-              <a:t>29/05/2026</a:t>
+              <a:t>29/06/2026</a:t>
             </a:fld>
             <a:endParaRPr lang="fr-FR"/>
           </a:p>
@@ -1138,7 +1138,7 @@
           <a:p>
             <a:fld id="{490C79C5-3CC8-4373-907F-2E1F47B9C95B}" type="datetimeFigureOut">
               <a:rPr lang="fr-FR" smtClean="0"/>
-              <a:t>29/05/2026</a:t>
+              <a:t>29/06/2026</a:t>
             </a:fld>
             <a:endParaRPr lang="fr-FR"/>
           </a:p>
@@ -1403,7 +1403,7 @@
           <a:p>
             <a:fld id="{490C79C5-3CC8-4373-907F-2E1F47B9C95B}" type="datetimeFigureOut">
               <a:rPr lang="fr-FR" smtClean="0"/>
-              <a:t>29/05/2026</a:t>
+              <a:t>29/06/2026</a:t>
             </a:fld>
             <a:endParaRPr lang="fr-FR"/>
           </a:p>
@@ -1815,7 +1815,7 @@
           <a:p>
             <a:fld id="{490C79C5-3CC8-4373-907F-2E1F47B9C95B}" type="datetimeFigureOut">
               <a:rPr lang="fr-FR" smtClean="0"/>
-              <a:t>29/05/2026</a:t>
+              <a:t>29/06/2026</a:t>
             </a:fld>
             <a:endParaRPr lang="fr-FR"/>
           </a:p>
@@ -1956,7 +1956,7 @@
           <a:p>
             <a:fld id="{490C79C5-3CC8-4373-907F-2E1F47B9C95B}" type="datetimeFigureOut">
               <a:rPr lang="fr-FR" smtClean="0"/>
-              <a:t>29/05/2026</a:t>
+              <a:t>29/06/2026</a:t>
             </a:fld>
             <a:endParaRPr lang="fr-FR"/>
           </a:p>
@@ -2069,7 +2069,7 @@
           <a:p>
             <a:fld id="{490C79C5-3CC8-4373-907F-2E1F47B9C95B}" type="datetimeFigureOut">
               <a:rPr lang="fr-FR" smtClean="0"/>
-              <a:t>29/05/2026</a:t>
+              <a:t>29/06/2026</a:t>
             </a:fld>
             <a:endParaRPr lang="fr-FR"/>
           </a:p>
@@ -2380,7 +2380,7 @@
           <a:p>
             <a:fld id="{490C79C5-3CC8-4373-907F-2E1F47B9C95B}" type="datetimeFigureOut">
               <a:rPr lang="fr-FR" smtClean="0"/>
-              <a:t>29/05/2026</a:t>
+              <a:t>29/06/2026</a:t>
             </a:fld>
             <a:endParaRPr lang="fr-FR"/>
           </a:p>
@@ -2668,7 +2668,7 @@
           <a:p>
             <a:fld id="{490C79C5-3CC8-4373-907F-2E1F47B9C95B}" type="datetimeFigureOut">
               <a:rPr lang="fr-FR" smtClean="0"/>
-              <a:t>29/05/2026</a:t>
+              <a:t>29/06/2026</a:t>
             </a:fld>
             <a:endParaRPr lang="fr-FR"/>
           </a:p>
@@ -2909,7 +2909,7 @@
           <a:p>
             <a:fld id="{490C79C5-3CC8-4373-907F-2E1F47B9C95B}" type="datetimeFigureOut">
               <a:rPr lang="fr-FR" smtClean="0"/>
-              <a:t>29/05/2026</a:t>
+              <a:t>29/06/2026</a:t>
             </a:fld>
             <a:endParaRPr lang="fr-FR"/>
           </a:p>
@@ -3561,7 +3561,21 @@
                   <a:latin typeface="Arial" panose="020B0604020202020204" pitchFamily="34" charset="0"/>
                   <a:cs typeface="Arial" panose="020B0604020202020204" pitchFamily="34" charset="0"/>
                 </a:rPr>
-                <a:t> max 22 variables</a:t>
+                <a:t> </a:t>
+              </a:r>
+              <a:r>
+                <a:rPr lang="fr-FR" sz="900">
+                  <a:latin typeface="Arial" panose="020B0604020202020204" pitchFamily="34" charset="0"/>
+                  <a:cs typeface="Arial" panose="020B0604020202020204" pitchFamily="34" charset="0"/>
+                </a:rPr>
+                <a:t>max 3 </a:t>
+              </a:r>
+              <a:r>
+                <a:rPr lang="fr-FR" sz="900" dirty="0">
+                  <a:latin typeface="Arial" panose="020B0604020202020204" pitchFamily="34" charset="0"/>
+                  <a:cs typeface="Arial" panose="020B0604020202020204" pitchFamily="34" charset="0"/>
+                </a:rPr>
+                <a:t>variables</a:t>
               </a:r>
             </a:p>
           </p:txBody>
@@ -3802,7 +3816,7 @@
                   <a:latin typeface="Arial" panose="020B0604020202020204" pitchFamily="34" charset="0"/>
                   <a:cs typeface="Arial" panose="020B0604020202020204" pitchFamily="34" charset="0"/>
                 </a:rPr>
-                <a:t> max 28 variables</a:t>
+                <a:t> max 4 variables</a:t>
               </a:r>
             </a:p>
           </p:txBody>
@@ -4043,7 +4057,7 @@
                   <a:latin typeface="Arial" panose="020B0604020202020204" pitchFamily="34" charset="0"/>
                   <a:cs typeface="Arial" panose="020B0604020202020204" pitchFamily="34" charset="0"/>
                 </a:rPr>
-                <a:t> max 11 variables</a:t>
+                <a:t> max 2 variables</a:t>
               </a:r>
             </a:p>
           </p:txBody>
@@ -4284,7 +4298,7 @@
                   <a:latin typeface="Arial" panose="020B0604020202020204" pitchFamily="34" charset="0"/>
                   <a:cs typeface="Arial" panose="020B0604020202020204" pitchFamily="34" charset="0"/>
                 </a:rPr>
-                <a:t> max 22 variables</a:t>
+                <a:t> max 3 variables</a:t>
               </a:r>
             </a:p>
           </p:txBody>

--- a/update_relation_new_blocks.pptx
+++ b/update_relation_new_blocks.pptx
@@ -6,6 +6,7 @@
   </p:sldMasterIdLst>
   <p:sldIdLst>
     <p:sldId id="256" r:id="rId2"/>
+    <p:sldId id="257" r:id="rId3"/>
   </p:sldIdLst>
   <p:sldSz cx="12192000" cy="6858000"/>
   <p:notesSz cx="6858000" cy="9144000"/>
@@ -259,7 +260,7 @@
           <a:p>
             <a:fld id="{490C79C5-3CC8-4373-907F-2E1F47B9C95B}" type="datetimeFigureOut">
               <a:rPr lang="fr-FR" smtClean="0"/>
-              <a:t>29/06/2026</a:t>
+              <a:t>04/08/2026</a:t>
             </a:fld>
             <a:endParaRPr lang="fr-FR"/>
           </a:p>
@@ -457,7 +458,7 @@
           <a:p>
             <a:fld id="{490C79C5-3CC8-4373-907F-2E1F47B9C95B}" type="datetimeFigureOut">
               <a:rPr lang="fr-FR" smtClean="0"/>
-              <a:t>29/06/2026</a:t>
+              <a:t>04/08/2026</a:t>
             </a:fld>
             <a:endParaRPr lang="fr-FR"/>
           </a:p>
@@ -665,7 +666,7 @@
           <a:p>
             <a:fld id="{490C79C5-3CC8-4373-907F-2E1F47B9C95B}" type="datetimeFigureOut">
               <a:rPr lang="fr-FR" smtClean="0"/>
-              <a:t>29/06/2026</a:t>
+              <a:t>04/08/2026</a:t>
             </a:fld>
             <a:endParaRPr lang="fr-FR"/>
           </a:p>
@@ -863,7 +864,7 @@
           <a:p>
             <a:fld id="{490C79C5-3CC8-4373-907F-2E1F47B9C95B}" type="datetimeFigureOut">
               <a:rPr lang="fr-FR" smtClean="0"/>
-              <a:t>29/06/2026</a:t>
+              <a:t>04/08/2026</a:t>
             </a:fld>
             <a:endParaRPr lang="fr-FR"/>
           </a:p>
@@ -1138,7 +1139,7 @@
           <a:p>
             <a:fld id="{490C79C5-3CC8-4373-907F-2E1F47B9C95B}" type="datetimeFigureOut">
               <a:rPr lang="fr-FR" smtClean="0"/>
-              <a:t>29/06/2026</a:t>
+              <a:t>04/08/2026</a:t>
             </a:fld>
             <a:endParaRPr lang="fr-FR"/>
           </a:p>
@@ -1403,7 +1404,7 @@
           <a:p>
             <a:fld id="{490C79C5-3CC8-4373-907F-2E1F47B9C95B}" type="datetimeFigureOut">
               <a:rPr lang="fr-FR" smtClean="0"/>
-              <a:t>29/06/2026</a:t>
+              <a:t>04/08/2026</a:t>
             </a:fld>
             <a:endParaRPr lang="fr-FR"/>
           </a:p>
@@ -1815,7 +1816,7 @@
           <a:p>
             <a:fld id="{490C79C5-3CC8-4373-907F-2E1F47B9C95B}" type="datetimeFigureOut">
               <a:rPr lang="fr-FR" smtClean="0"/>
-              <a:t>29/06/2026</a:t>
+              <a:t>04/08/2026</a:t>
             </a:fld>
             <a:endParaRPr lang="fr-FR"/>
           </a:p>
@@ -1956,7 +1957,7 @@
           <a:p>
             <a:fld id="{490C79C5-3CC8-4373-907F-2E1F47B9C95B}" type="datetimeFigureOut">
               <a:rPr lang="fr-FR" smtClean="0"/>
-              <a:t>29/06/2026</a:t>
+              <a:t>04/08/2026</a:t>
             </a:fld>
             <a:endParaRPr lang="fr-FR"/>
           </a:p>
@@ -2069,7 +2070,7 @@
           <a:p>
             <a:fld id="{490C79C5-3CC8-4373-907F-2E1F47B9C95B}" type="datetimeFigureOut">
               <a:rPr lang="fr-FR" smtClean="0"/>
-              <a:t>29/06/2026</a:t>
+              <a:t>04/08/2026</a:t>
             </a:fld>
             <a:endParaRPr lang="fr-FR"/>
           </a:p>
@@ -2380,7 +2381,7 @@
           <a:p>
             <a:fld id="{490C79C5-3CC8-4373-907F-2E1F47B9C95B}" type="datetimeFigureOut">
               <a:rPr lang="fr-FR" smtClean="0"/>
-              <a:t>29/06/2026</a:t>
+              <a:t>04/08/2026</a:t>
             </a:fld>
             <a:endParaRPr lang="fr-FR"/>
           </a:p>
@@ -2668,7 +2669,7 @@
           <a:p>
             <a:fld id="{490C79C5-3CC8-4373-907F-2E1F47B9C95B}" type="datetimeFigureOut">
               <a:rPr lang="fr-FR" smtClean="0"/>
-              <a:t>29/06/2026</a:t>
+              <a:t>04/08/2026</a:t>
             </a:fld>
             <a:endParaRPr lang="fr-FR"/>
           </a:p>
@@ -2909,7 +2910,7 @@
           <a:p>
             <a:fld id="{490C79C5-3CC8-4373-907F-2E1F47B9C95B}" type="datetimeFigureOut">
               <a:rPr lang="fr-FR" smtClean="0"/>
-              <a:t>29/06/2026</a:t>
+              <a:t>04/08/2026</a:t>
             </a:fld>
             <a:endParaRPr lang="fr-FR"/>
           </a:p>
@@ -3328,10 +3329,10 @@
       </p:grpSpPr>
       <p:grpSp>
         <p:nvGrpSpPr>
-          <p:cNvPr id="13" name="Groupe 12">
+          <p:cNvPr id="3" name="Groupe 2">
             <a:extLst>
               <a:ext uri="{FF2B5EF4-FFF2-40B4-BE49-F238E27FC236}">
-                <a16:creationId xmlns:a16="http://schemas.microsoft.com/office/drawing/2014/main" id="{8FA7A248-7FC3-4B2D-92F7-169FBE8F2955}"/>
+                <a16:creationId xmlns:a16="http://schemas.microsoft.com/office/drawing/2014/main" id="{F5C23EA5-E784-4021-A82D-AE7317BAA0EA}"/>
               </a:ext>
             </a:extLst>
           </p:cNvPr>
@@ -3340,158 +3341,4804 @@
         </p:nvGrpSpPr>
         <p:grpSpPr>
           <a:xfrm>
-            <a:off x="7224182" y="4353639"/>
-            <a:ext cx="2582333" cy="1257529"/>
-            <a:chOff x="270934" y="368071"/>
-            <a:chExt cx="2582333" cy="1257529"/>
+            <a:off x="105834" y="398389"/>
+            <a:ext cx="10797114" cy="5537630"/>
+            <a:chOff x="105834" y="398389"/>
+            <a:chExt cx="10797114" cy="5537630"/>
           </a:xfrm>
         </p:grpSpPr>
-        <p:sp>
-          <p:nvSpPr>
-            <p:cNvPr id="4" name="Rectangle 3">
+        <p:grpSp>
+          <p:nvGrpSpPr>
+            <p:cNvPr id="39" name="Groupe 38">
               <a:extLst>
                 <a:ext uri="{FF2B5EF4-FFF2-40B4-BE49-F238E27FC236}">
-                  <a16:creationId xmlns:a16="http://schemas.microsoft.com/office/drawing/2014/main" id="{A992EBD8-A7E1-44AD-8244-ED10E8F0F5D1}"/>
+                  <a16:creationId xmlns:a16="http://schemas.microsoft.com/office/drawing/2014/main" id="{5FF32897-D699-4EF8-97BB-81B42CDC2DD0}"/>
                 </a:ext>
               </a:extLst>
             </p:cNvPr>
-            <p:cNvSpPr/>
+            <p:cNvGrpSpPr/>
             <p:nvPr/>
-          </p:nvSpPr>
-          <p:spPr>
+          </p:nvGrpSpPr>
+          <p:grpSpPr>
             <a:xfrm>
-              <a:off x="1193800" y="745067"/>
-              <a:ext cx="1659467" cy="880533"/>
+              <a:off x="105834" y="2586124"/>
+              <a:ext cx="2582333" cy="1258416"/>
+              <a:chOff x="270934" y="368071"/>
+              <a:chExt cx="2582333" cy="1258416"/>
             </a:xfrm>
-            <a:prstGeom prst="rect">
-              <a:avLst/>
-            </a:prstGeom>
-            <a:solidFill>
-              <a:schemeClr val="accent1">
-                <a:lumMod val="40000"/>
-                <a:lumOff val="60000"/>
-              </a:schemeClr>
-            </a:solidFill>
-            <a:ln>
+          </p:grpSpPr>
+          <p:sp>
+            <p:nvSpPr>
+              <p:cNvPr id="40" name="Rectangle 39">
+                <a:extLst>
+                  <a:ext uri="{FF2B5EF4-FFF2-40B4-BE49-F238E27FC236}">
+                    <a16:creationId xmlns:a16="http://schemas.microsoft.com/office/drawing/2014/main" id="{248E56DC-04D6-4514-8581-639195D6C8E4}"/>
+                  </a:ext>
+                </a:extLst>
+              </p:cNvPr>
+              <p:cNvSpPr/>
+              <p:nvPr/>
+            </p:nvSpPr>
+            <p:spPr>
+              <a:xfrm>
+                <a:off x="1193800" y="745954"/>
+                <a:ext cx="1659467" cy="880533"/>
+              </a:xfrm>
+              <a:prstGeom prst="rect">
+                <a:avLst/>
+              </a:prstGeom>
               <a:solidFill>
                 <a:schemeClr val="accent1">
-                  <a:lumMod val="75000"/>
+                  <a:lumMod val="40000"/>
+                  <a:lumOff val="60000"/>
                 </a:schemeClr>
               </a:solidFill>
-            </a:ln>
-          </p:spPr>
-          <p:style>
-            <a:lnRef idx="2">
-              <a:schemeClr val="accent5">
-                <a:shade val="50000"/>
-              </a:schemeClr>
-            </a:lnRef>
-            <a:fillRef idx="1">
-              <a:schemeClr val="accent5"/>
-            </a:fillRef>
-            <a:effectRef idx="0">
-              <a:schemeClr val="accent5"/>
-            </a:effectRef>
-            <a:fontRef idx="minor">
-              <a:schemeClr val="lt1"/>
-            </a:fontRef>
-          </p:style>
-          <p:txBody>
-            <a:bodyPr rtlCol="0" anchor="ctr"/>
-            <a:lstStyle/>
-            <a:p>
-              <a:pPr algn="ctr"/>
-              <a:r>
-                <a:rPr lang="fr-FR" dirty="0"/>
-                <a:t>AMC</a:t>
-              </a:r>
-            </a:p>
-          </p:txBody>
-        </p:sp>
-        <p:cxnSp>
-          <p:nvCxnSpPr>
-            <p:cNvPr id="6" name="Connecteur droit avec flèche 5">
+              <a:ln>
+                <a:solidFill>
+                  <a:schemeClr val="accent1">
+                    <a:lumMod val="75000"/>
+                  </a:schemeClr>
+                </a:solidFill>
+              </a:ln>
+            </p:spPr>
+            <p:style>
+              <a:lnRef idx="2">
+                <a:schemeClr val="accent5">
+                  <a:shade val="50000"/>
+                </a:schemeClr>
+              </a:lnRef>
+              <a:fillRef idx="1">
+                <a:schemeClr val="accent5"/>
+              </a:fillRef>
+              <a:effectRef idx="0">
+                <a:schemeClr val="accent5"/>
+              </a:effectRef>
+              <a:fontRef idx="minor">
+                <a:schemeClr val="lt1"/>
+              </a:fontRef>
+            </p:style>
+            <p:txBody>
+              <a:bodyPr rtlCol="0" anchor="ctr"/>
+              <a:lstStyle/>
+              <a:p>
+                <a:pPr algn="ctr"/>
+                <a:r>
+                  <a:rPr lang="fr-FR" dirty="0"/>
+                  <a:t>Humain</a:t>
+                </a:r>
+              </a:p>
+            </p:txBody>
+          </p:sp>
+          <p:cxnSp>
+            <p:nvCxnSpPr>
+              <p:cNvPr id="41" name="Connecteur droit avec flèche 40">
+                <a:extLst>
+                  <a:ext uri="{FF2B5EF4-FFF2-40B4-BE49-F238E27FC236}">
+                    <a16:creationId xmlns:a16="http://schemas.microsoft.com/office/drawing/2014/main" id="{084830E6-54A0-4390-B044-961F5B950BC5}"/>
+                  </a:ext>
+                </a:extLst>
+              </p:cNvPr>
+              <p:cNvCxnSpPr/>
+              <p:nvPr/>
+            </p:nvCxnSpPr>
+            <p:spPr>
+              <a:xfrm>
+                <a:off x="1016000" y="745067"/>
+                <a:ext cx="0" cy="821266"/>
+              </a:xfrm>
+              <a:prstGeom prst="straightConnector1">
+                <a:avLst/>
+              </a:prstGeom>
+              <a:ln>
+                <a:headEnd type="triangle"/>
+                <a:tailEnd type="triangle"/>
+              </a:ln>
+            </p:spPr>
+            <p:style>
+              <a:lnRef idx="1">
+                <a:schemeClr val="accent1"/>
+              </a:lnRef>
+              <a:fillRef idx="0">
+                <a:schemeClr val="accent1"/>
+              </a:fillRef>
+              <a:effectRef idx="0">
+                <a:schemeClr val="accent1"/>
+              </a:effectRef>
+              <a:fontRef idx="minor">
+                <a:schemeClr val="tx1"/>
+              </a:fontRef>
+            </p:style>
+          </p:cxnSp>
+          <p:sp>
+            <p:nvSpPr>
+              <p:cNvPr id="42" name="ZoneTexte 41">
+                <a:extLst>
+                  <a:ext uri="{FF2B5EF4-FFF2-40B4-BE49-F238E27FC236}">
+                    <a16:creationId xmlns:a16="http://schemas.microsoft.com/office/drawing/2014/main" id="{E2D3ACDF-5E51-48DE-8050-87366971D5AA}"/>
+                  </a:ext>
+                </a:extLst>
+              </p:cNvPr>
+              <p:cNvSpPr txBox="1"/>
+              <p:nvPr/>
+            </p:nvSpPr>
+            <p:spPr>
+              <a:xfrm>
+                <a:off x="270934" y="1069917"/>
+                <a:ext cx="745066" cy="230832"/>
+              </a:xfrm>
+              <a:prstGeom prst="rect">
+                <a:avLst/>
+              </a:prstGeom>
+              <a:noFill/>
+            </p:spPr>
+            <p:txBody>
+              <a:bodyPr wrap="square" rtlCol="0">
+                <a:spAutoFit/>
+              </a:bodyPr>
+              <a:lstStyle/>
+              <a:p>
+                <a:r>
+                  <a:rPr lang="fr-FR" sz="900" dirty="0">
+                    <a:latin typeface="Arial" panose="020B0604020202020204" pitchFamily="34" charset="0"/>
+                    <a:cs typeface="Arial" panose="020B0604020202020204" pitchFamily="34" charset="0"/>
+                  </a:rPr>
+                  <a:t>12 régions</a:t>
+                </a:r>
+              </a:p>
+            </p:txBody>
+          </p:sp>
+          <p:cxnSp>
+            <p:nvCxnSpPr>
+              <p:cNvPr id="43" name="Connecteur droit avec flèche 42">
+                <a:extLst>
+                  <a:ext uri="{FF2B5EF4-FFF2-40B4-BE49-F238E27FC236}">
+                    <a16:creationId xmlns:a16="http://schemas.microsoft.com/office/drawing/2014/main" id="{46455CAF-F801-4643-BB0E-28BC07737614}"/>
+                  </a:ext>
+                </a:extLst>
+              </p:cNvPr>
+              <p:cNvCxnSpPr>
+                <a:cxnSpLocks/>
+              </p:cNvCxnSpPr>
+              <p:nvPr/>
+            </p:nvCxnSpPr>
+            <p:spPr>
+              <a:xfrm>
+                <a:off x="1193800" y="592667"/>
+                <a:ext cx="1659467" cy="0"/>
+              </a:xfrm>
+              <a:prstGeom prst="straightConnector1">
+                <a:avLst/>
+              </a:prstGeom>
+              <a:ln>
+                <a:headEnd type="triangle"/>
+                <a:tailEnd type="triangle"/>
+              </a:ln>
+            </p:spPr>
+            <p:style>
+              <a:lnRef idx="1">
+                <a:schemeClr val="accent1"/>
+              </a:lnRef>
+              <a:fillRef idx="0">
+                <a:schemeClr val="accent1"/>
+              </a:fillRef>
+              <a:effectRef idx="0">
+                <a:schemeClr val="accent1"/>
+              </a:effectRef>
+              <a:fontRef idx="minor">
+                <a:schemeClr val="tx1"/>
+              </a:fontRef>
+            </p:style>
+          </p:cxnSp>
+          <p:sp>
+            <p:nvSpPr>
+              <p:cNvPr id="44" name="ZoneTexte 43">
+                <a:extLst>
+                  <a:ext uri="{FF2B5EF4-FFF2-40B4-BE49-F238E27FC236}">
+                    <a16:creationId xmlns:a16="http://schemas.microsoft.com/office/drawing/2014/main" id="{7669819F-8761-4D86-96A1-CF36AFE272B8}"/>
+                  </a:ext>
+                </a:extLst>
+              </p:cNvPr>
+              <p:cNvSpPr txBox="1"/>
+              <p:nvPr/>
+            </p:nvSpPr>
+            <p:spPr>
+              <a:xfrm>
+                <a:off x="1515533" y="368071"/>
+                <a:ext cx="1143000" cy="230832"/>
+              </a:xfrm>
+              <a:prstGeom prst="rect">
+                <a:avLst/>
+              </a:prstGeom>
+              <a:noFill/>
+            </p:spPr>
+            <p:txBody>
+              <a:bodyPr wrap="square" rtlCol="0">
+                <a:spAutoFit/>
+              </a:bodyPr>
+              <a:lstStyle/>
+              <a:p>
+                <a:r>
+                  <a:rPr lang="fr-FR" sz="900" dirty="0">
+                    <a:latin typeface="Arial" panose="020B0604020202020204" pitchFamily="34" charset="0"/>
+                    <a:cs typeface="Arial" panose="020B0604020202020204" pitchFamily="34" charset="0"/>
+                  </a:rPr>
+                  <a:t> max 3 variables</a:t>
+                </a:r>
+              </a:p>
+            </p:txBody>
+          </p:sp>
+        </p:grpSp>
+        <p:grpSp>
+          <p:nvGrpSpPr>
+            <p:cNvPr id="2" name="Groupe 1">
               <a:extLst>
                 <a:ext uri="{FF2B5EF4-FFF2-40B4-BE49-F238E27FC236}">
-                  <a16:creationId xmlns:a16="http://schemas.microsoft.com/office/drawing/2014/main" id="{1CCE6BEB-83CF-4A23-892E-0D37934134D9}"/>
+                  <a16:creationId xmlns:a16="http://schemas.microsoft.com/office/drawing/2014/main" id="{E15AC3C4-F2BD-4AAE-8051-3253D6A9CC25}"/>
                 </a:ext>
               </a:extLst>
             </p:cNvPr>
-            <p:cNvCxnSpPr/>
+            <p:cNvGrpSpPr/>
+            <p:nvPr/>
+          </p:nvGrpSpPr>
+          <p:grpSpPr>
+            <a:xfrm>
+              <a:off x="2688167" y="398389"/>
+              <a:ext cx="8214781" cy="5537630"/>
+              <a:chOff x="2688167" y="398389"/>
+              <a:chExt cx="8214781" cy="5537630"/>
+            </a:xfrm>
+          </p:grpSpPr>
+          <p:grpSp>
+            <p:nvGrpSpPr>
+              <p:cNvPr id="13" name="Groupe 12">
+                <a:extLst>
+                  <a:ext uri="{FF2B5EF4-FFF2-40B4-BE49-F238E27FC236}">
+                    <a16:creationId xmlns:a16="http://schemas.microsoft.com/office/drawing/2014/main" id="{8FA7A248-7FC3-4B2D-92F7-169FBE8F2955}"/>
+                  </a:ext>
+                </a:extLst>
+              </p:cNvPr>
+              <p:cNvGrpSpPr/>
+              <p:nvPr/>
+            </p:nvGrpSpPr>
+            <p:grpSpPr>
+              <a:xfrm>
+                <a:off x="7224182" y="4353639"/>
+                <a:ext cx="2582333" cy="1257529"/>
+                <a:chOff x="270934" y="368071"/>
+                <a:chExt cx="2582333" cy="1257529"/>
+              </a:xfrm>
+            </p:grpSpPr>
+            <p:sp>
+              <p:nvSpPr>
+                <p:cNvPr id="4" name="Rectangle 3">
+                  <a:extLst>
+                    <a:ext uri="{FF2B5EF4-FFF2-40B4-BE49-F238E27FC236}">
+                      <a16:creationId xmlns:a16="http://schemas.microsoft.com/office/drawing/2014/main" id="{A992EBD8-A7E1-44AD-8244-ED10E8F0F5D1}"/>
+                    </a:ext>
+                  </a:extLst>
+                </p:cNvPr>
+                <p:cNvSpPr/>
+                <p:nvPr/>
+              </p:nvSpPr>
+              <p:spPr>
+                <a:xfrm>
+                  <a:off x="1193800" y="745067"/>
+                  <a:ext cx="1659467" cy="880533"/>
+                </a:xfrm>
+                <a:prstGeom prst="rect">
+                  <a:avLst/>
+                </a:prstGeom>
+                <a:solidFill>
+                  <a:schemeClr val="accent1">
+                    <a:lumMod val="40000"/>
+                    <a:lumOff val="60000"/>
+                  </a:schemeClr>
+                </a:solidFill>
+                <a:ln>
+                  <a:solidFill>
+                    <a:schemeClr val="accent1">
+                      <a:lumMod val="75000"/>
+                    </a:schemeClr>
+                  </a:solidFill>
+                </a:ln>
+              </p:spPr>
+              <p:style>
+                <a:lnRef idx="2">
+                  <a:schemeClr val="accent5">
+                    <a:shade val="50000"/>
+                  </a:schemeClr>
+                </a:lnRef>
+                <a:fillRef idx="1">
+                  <a:schemeClr val="accent5"/>
+                </a:fillRef>
+                <a:effectRef idx="0">
+                  <a:schemeClr val="accent5"/>
+                </a:effectRef>
+                <a:fontRef idx="minor">
+                  <a:schemeClr val="lt1"/>
+                </a:fontRef>
+              </p:style>
+              <p:txBody>
+                <a:bodyPr rtlCol="0" anchor="ctr"/>
+                <a:lstStyle/>
+                <a:p>
+                  <a:pPr algn="ctr"/>
+                  <a:r>
+                    <a:rPr lang="fr-FR" dirty="0"/>
+                    <a:t>AMC</a:t>
+                  </a:r>
+                </a:p>
+              </p:txBody>
+            </p:sp>
+            <p:cxnSp>
+              <p:nvCxnSpPr>
+                <p:cNvPr id="6" name="Connecteur droit avec flèche 5">
+                  <a:extLst>
+                    <a:ext uri="{FF2B5EF4-FFF2-40B4-BE49-F238E27FC236}">
+                      <a16:creationId xmlns:a16="http://schemas.microsoft.com/office/drawing/2014/main" id="{1CCE6BEB-83CF-4A23-892E-0D37934134D9}"/>
+                    </a:ext>
+                  </a:extLst>
+                </p:cNvPr>
+                <p:cNvCxnSpPr/>
+                <p:nvPr/>
+              </p:nvCxnSpPr>
+              <p:spPr>
+                <a:xfrm>
+                  <a:off x="1016000" y="745067"/>
+                  <a:ext cx="0" cy="821266"/>
+                </a:xfrm>
+                <a:prstGeom prst="straightConnector1">
+                  <a:avLst/>
+                </a:prstGeom>
+                <a:ln>
+                  <a:headEnd type="triangle"/>
+                  <a:tailEnd type="triangle"/>
+                </a:ln>
+              </p:spPr>
+              <p:style>
+                <a:lnRef idx="1">
+                  <a:schemeClr val="accent1"/>
+                </a:lnRef>
+                <a:fillRef idx="0">
+                  <a:schemeClr val="accent1"/>
+                </a:fillRef>
+                <a:effectRef idx="0">
+                  <a:schemeClr val="accent1"/>
+                </a:effectRef>
+                <a:fontRef idx="minor">
+                  <a:schemeClr val="tx1"/>
+                </a:fontRef>
+              </p:style>
+            </p:cxnSp>
+            <p:sp>
+              <p:nvSpPr>
+                <p:cNvPr id="7" name="ZoneTexte 6">
+                  <a:extLst>
+                    <a:ext uri="{FF2B5EF4-FFF2-40B4-BE49-F238E27FC236}">
+                      <a16:creationId xmlns:a16="http://schemas.microsoft.com/office/drawing/2014/main" id="{EB67AE6F-4EE1-48A0-979B-153EF4E1F202}"/>
+                    </a:ext>
+                  </a:extLst>
+                </p:cNvPr>
+                <p:cNvSpPr txBox="1"/>
+                <p:nvPr/>
+              </p:nvSpPr>
+              <p:spPr>
+                <a:xfrm>
+                  <a:off x="270934" y="1069917"/>
+                  <a:ext cx="745066" cy="230832"/>
+                </a:xfrm>
+                <a:prstGeom prst="rect">
+                  <a:avLst/>
+                </a:prstGeom>
+                <a:noFill/>
+              </p:spPr>
+              <p:txBody>
+                <a:bodyPr wrap="square" rtlCol="0">
+                  <a:spAutoFit/>
+                </a:bodyPr>
+                <a:lstStyle/>
+                <a:p>
+                  <a:r>
+                    <a:rPr lang="fr-FR" sz="900" dirty="0">
+                      <a:latin typeface="Arial" panose="020B0604020202020204" pitchFamily="34" charset="0"/>
+                      <a:cs typeface="Arial" panose="020B0604020202020204" pitchFamily="34" charset="0"/>
+                    </a:rPr>
+                    <a:t>12 régions</a:t>
+                  </a:r>
+                </a:p>
+              </p:txBody>
+            </p:sp>
+            <p:cxnSp>
+              <p:nvCxnSpPr>
+                <p:cNvPr id="8" name="Connecteur droit avec flèche 7">
+                  <a:extLst>
+                    <a:ext uri="{FF2B5EF4-FFF2-40B4-BE49-F238E27FC236}">
+                      <a16:creationId xmlns:a16="http://schemas.microsoft.com/office/drawing/2014/main" id="{F6841A1E-B5FD-421C-A88D-FBFFC872847E}"/>
+                    </a:ext>
+                  </a:extLst>
+                </p:cNvPr>
+                <p:cNvCxnSpPr>
+                  <a:cxnSpLocks/>
+                </p:cNvCxnSpPr>
+                <p:nvPr/>
+              </p:nvCxnSpPr>
+              <p:spPr>
+                <a:xfrm>
+                  <a:off x="1193800" y="592667"/>
+                  <a:ext cx="1659467" cy="0"/>
+                </a:xfrm>
+                <a:prstGeom prst="straightConnector1">
+                  <a:avLst/>
+                </a:prstGeom>
+                <a:ln>
+                  <a:headEnd type="triangle"/>
+                  <a:tailEnd type="triangle"/>
+                </a:ln>
+              </p:spPr>
+              <p:style>
+                <a:lnRef idx="1">
+                  <a:schemeClr val="accent1"/>
+                </a:lnRef>
+                <a:fillRef idx="0">
+                  <a:schemeClr val="accent1"/>
+                </a:fillRef>
+                <a:effectRef idx="0">
+                  <a:schemeClr val="accent1"/>
+                </a:effectRef>
+                <a:fontRef idx="minor">
+                  <a:schemeClr val="tx1"/>
+                </a:fontRef>
+              </p:style>
+            </p:cxnSp>
+            <p:sp>
+              <p:nvSpPr>
+                <p:cNvPr id="12" name="ZoneTexte 11">
+                  <a:extLst>
+                    <a:ext uri="{FF2B5EF4-FFF2-40B4-BE49-F238E27FC236}">
+                      <a16:creationId xmlns:a16="http://schemas.microsoft.com/office/drawing/2014/main" id="{5A5AE3FC-E219-4516-97BF-34B08481C6E7}"/>
+                    </a:ext>
+                  </a:extLst>
+                </p:cNvPr>
+                <p:cNvSpPr txBox="1"/>
+                <p:nvPr/>
+              </p:nvSpPr>
+              <p:spPr>
+                <a:xfrm>
+                  <a:off x="1515533" y="368071"/>
+                  <a:ext cx="1143000" cy="230832"/>
+                </a:xfrm>
+                <a:prstGeom prst="rect">
+                  <a:avLst/>
+                </a:prstGeom>
+                <a:noFill/>
+              </p:spPr>
+              <p:txBody>
+                <a:bodyPr wrap="square" rtlCol="0">
+                  <a:spAutoFit/>
+                </a:bodyPr>
+                <a:lstStyle/>
+                <a:p>
+                  <a:r>
+                    <a:rPr lang="fr-FR" sz="900" dirty="0">
+                      <a:latin typeface="Arial" panose="020B0604020202020204" pitchFamily="34" charset="0"/>
+                      <a:cs typeface="Arial" panose="020B0604020202020204" pitchFamily="34" charset="0"/>
+                    </a:rPr>
+                    <a:t> </a:t>
+                  </a:r>
+                  <a:r>
+                    <a:rPr lang="fr-FR" sz="900">
+                      <a:latin typeface="Arial" panose="020B0604020202020204" pitchFamily="34" charset="0"/>
+                      <a:cs typeface="Arial" panose="020B0604020202020204" pitchFamily="34" charset="0"/>
+                    </a:rPr>
+                    <a:t>max 3 </a:t>
+                  </a:r>
+                  <a:r>
+                    <a:rPr lang="fr-FR" sz="900" dirty="0">
+                      <a:latin typeface="Arial" panose="020B0604020202020204" pitchFamily="34" charset="0"/>
+                      <a:cs typeface="Arial" panose="020B0604020202020204" pitchFamily="34" charset="0"/>
+                    </a:rPr>
+                    <a:t>variables</a:t>
+                  </a:r>
+                </a:p>
+              </p:txBody>
+            </p:sp>
+          </p:grpSp>
+          <p:grpSp>
+            <p:nvGrpSpPr>
+              <p:cNvPr id="14" name="Groupe 13">
+                <a:extLst>
+                  <a:ext uri="{FF2B5EF4-FFF2-40B4-BE49-F238E27FC236}">
+                    <a16:creationId xmlns:a16="http://schemas.microsoft.com/office/drawing/2014/main" id="{01CD2FC3-B72C-406A-A028-AF99F36A7492}"/>
+                  </a:ext>
+                </a:extLst>
+              </p:cNvPr>
+              <p:cNvGrpSpPr/>
+              <p:nvPr/>
+            </p:nvGrpSpPr>
+            <p:grpSpPr>
+              <a:xfrm>
+                <a:off x="3771901" y="398389"/>
+                <a:ext cx="2582333" cy="1257529"/>
+                <a:chOff x="270934" y="368071"/>
+                <a:chExt cx="2582333" cy="1257529"/>
+              </a:xfrm>
+            </p:grpSpPr>
+            <p:sp>
+              <p:nvSpPr>
+                <p:cNvPr id="15" name="Rectangle 14">
+                  <a:extLst>
+                    <a:ext uri="{FF2B5EF4-FFF2-40B4-BE49-F238E27FC236}">
+                      <a16:creationId xmlns:a16="http://schemas.microsoft.com/office/drawing/2014/main" id="{1A0C2064-6A4C-4691-9C1F-4AF6ECF3E904}"/>
+                    </a:ext>
+                  </a:extLst>
+                </p:cNvPr>
+                <p:cNvSpPr/>
+                <p:nvPr/>
+              </p:nvSpPr>
+              <p:spPr>
+                <a:xfrm>
+                  <a:off x="1193800" y="745067"/>
+                  <a:ext cx="1659466" cy="880533"/>
+                </a:xfrm>
+                <a:prstGeom prst="rect">
+                  <a:avLst/>
+                </a:prstGeom>
+                <a:solidFill>
+                  <a:schemeClr val="accent1">
+                    <a:lumMod val="40000"/>
+                    <a:lumOff val="60000"/>
+                  </a:schemeClr>
+                </a:solidFill>
+                <a:ln>
+                  <a:solidFill>
+                    <a:schemeClr val="accent1">
+                      <a:lumMod val="75000"/>
+                    </a:schemeClr>
+                  </a:solidFill>
+                </a:ln>
+              </p:spPr>
+              <p:style>
+                <a:lnRef idx="2">
+                  <a:schemeClr val="accent5">
+                    <a:shade val="50000"/>
+                  </a:schemeClr>
+                </a:lnRef>
+                <a:fillRef idx="1">
+                  <a:schemeClr val="accent5"/>
+                </a:fillRef>
+                <a:effectRef idx="0">
+                  <a:schemeClr val="accent5"/>
+                </a:effectRef>
+                <a:fontRef idx="minor">
+                  <a:schemeClr val="lt1"/>
+                </a:fontRef>
+              </p:style>
+              <p:txBody>
+                <a:bodyPr rtlCol="0" anchor="ctr"/>
+                <a:lstStyle/>
+                <a:p>
+                  <a:pPr algn="ctr"/>
+                  <a:r>
+                    <a:rPr lang="fr-FR" dirty="0"/>
+                    <a:t>Animaux</a:t>
+                  </a:r>
+                </a:p>
+              </p:txBody>
+            </p:sp>
+            <p:cxnSp>
+              <p:nvCxnSpPr>
+                <p:cNvPr id="16" name="Connecteur droit avec flèche 15">
+                  <a:extLst>
+                    <a:ext uri="{FF2B5EF4-FFF2-40B4-BE49-F238E27FC236}">
+                      <a16:creationId xmlns:a16="http://schemas.microsoft.com/office/drawing/2014/main" id="{8DCCD066-A17B-4729-B96B-9B814A7F2EEE}"/>
+                    </a:ext>
+                  </a:extLst>
+                </p:cNvPr>
+                <p:cNvCxnSpPr/>
+                <p:nvPr/>
+              </p:nvCxnSpPr>
+              <p:spPr>
+                <a:xfrm>
+                  <a:off x="1016000" y="745067"/>
+                  <a:ext cx="0" cy="821266"/>
+                </a:xfrm>
+                <a:prstGeom prst="straightConnector1">
+                  <a:avLst/>
+                </a:prstGeom>
+                <a:ln>
+                  <a:headEnd type="triangle"/>
+                  <a:tailEnd type="triangle"/>
+                </a:ln>
+              </p:spPr>
+              <p:style>
+                <a:lnRef idx="1">
+                  <a:schemeClr val="accent1"/>
+                </a:lnRef>
+                <a:fillRef idx="0">
+                  <a:schemeClr val="accent1"/>
+                </a:fillRef>
+                <a:effectRef idx="0">
+                  <a:schemeClr val="accent1"/>
+                </a:effectRef>
+                <a:fontRef idx="minor">
+                  <a:schemeClr val="tx1"/>
+                </a:fontRef>
+              </p:style>
+            </p:cxnSp>
+            <p:sp>
+              <p:nvSpPr>
+                <p:cNvPr id="17" name="ZoneTexte 16">
+                  <a:extLst>
+                    <a:ext uri="{FF2B5EF4-FFF2-40B4-BE49-F238E27FC236}">
+                      <a16:creationId xmlns:a16="http://schemas.microsoft.com/office/drawing/2014/main" id="{DF24B1BC-32B2-4473-8BDF-0E2AC86AA40D}"/>
+                    </a:ext>
+                  </a:extLst>
+                </p:cNvPr>
+                <p:cNvSpPr txBox="1"/>
+                <p:nvPr/>
+              </p:nvSpPr>
+              <p:spPr>
+                <a:xfrm>
+                  <a:off x="270934" y="1069917"/>
+                  <a:ext cx="745066" cy="230832"/>
+                </a:xfrm>
+                <a:prstGeom prst="rect">
+                  <a:avLst/>
+                </a:prstGeom>
+                <a:noFill/>
+              </p:spPr>
+              <p:txBody>
+                <a:bodyPr wrap="square" rtlCol="0">
+                  <a:spAutoFit/>
+                </a:bodyPr>
+                <a:lstStyle/>
+                <a:p>
+                  <a:r>
+                    <a:rPr lang="fr-FR" sz="900" dirty="0">
+                      <a:latin typeface="Arial" panose="020B0604020202020204" pitchFamily="34" charset="0"/>
+                      <a:cs typeface="Arial" panose="020B0604020202020204" pitchFamily="34" charset="0"/>
+                    </a:rPr>
+                    <a:t>12 régions</a:t>
+                  </a:r>
+                </a:p>
+              </p:txBody>
+            </p:sp>
+            <p:cxnSp>
+              <p:nvCxnSpPr>
+                <p:cNvPr id="18" name="Connecteur droit avec flèche 17">
+                  <a:extLst>
+                    <a:ext uri="{FF2B5EF4-FFF2-40B4-BE49-F238E27FC236}">
+                      <a16:creationId xmlns:a16="http://schemas.microsoft.com/office/drawing/2014/main" id="{A9A21EDF-20DA-443C-B3BB-94EE1CBD5D7F}"/>
+                    </a:ext>
+                  </a:extLst>
+                </p:cNvPr>
+                <p:cNvCxnSpPr>
+                  <a:cxnSpLocks/>
+                </p:cNvCxnSpPr>
+                <p:nvPr/>
+              </p:nvCxnSpPr>
+              <p:spPr>
+                <a:xfrm>
+                  <a:off x="1193800" y="592667"/>
+                  <a:ext cx="1659467" cy="0"/>
+                </a:xfrm>
+                <a:prstGeom prst="straightConnector1">
+                  <a:avLst/>
+                </a:prstGeom>
+                <a:ln>
+                  <a:headEnd type="triangle"/>
+                  <a:tailEnd type="triangle"/>
+                </a:ln>
+              </p:spPr>
+              <p:style>
+                <a:lnRef idx="1">
+                  <a:schemeClr val="accent1"/>
+                </a:lnRef>
+                <a:fillRef idx="0">
+                  <a:schemeClr val="accent1"/>
+                </a:fillRef>
+                <a:effectRef idx="0">
+                  <a:schemeClr val="accent1"/>
+                </a:effectRef>
+                <a:fontRef idx="minor">
+                  <a:schemeClr val="tx1"/>
+                </a:fontRef>
+              </p:style>
+            </p:cxnSp>
+            <p:sp>
+              <p:nvSpPr>
+                <p:cNvPr id="19" name="ZoneTexte 18">
+                  <a:extLst>
+                    <a:ext uri="{FF2B5EF4-FFF2-40B4-BE49-F238E27FC236}">
+                      <a16:creationId xmlns:a16="http://schemas.microsoft.com/office/drawing/2014/main" id="{24F942E7-77C6-41D5-80C5-4A51D8C705B2}"/>
+                    </a:ext>
+                  </a:extLst>
+                </p:cNvPr>
+                <p:cNvSpPr txBox="1"/>
+                <p:nvPr/>
+              </p:nvSpPr>
+              <p:spPr>
+                <a:xfrm>
+                  <a:off x="1515532" y="368071"/>
+                  <a:ext cx="1143000" cy="230832"/>
+                </a:xfrm>
+                <a:prstGeom prst="rect">
+                  <a:avLst/>
+                </a:prstGeom>
+                <a:noFill/>
+              </p:spPr>
+              <p:txBody>
+                <a:bodyPr wrap="square" rtlCol="0">
+                  <a:spAutoFit/>
+                </a:bodyPr>
+                <a:lstStyle/>
+                <a:p>
+                  <a:r>
+                    <a:rPr lang="fr-FR" sz="900" dirty="0">
+                      <a:latin typeface="Arial" panose="020B0604020202020204" pitchFamily="34" charset="0"/>
+                      <a:cs typeface="Arial" panose="020B0604020202020204" pitchFamily="34" charset="0"/>
+                    </a:rPr>
+                    <a:t> max 4 variables</a:t>
+                  </a:r>
+                </a:p>
+              </p:txBody>
+            </p:sp>
+          </p:grpSp>
+          <p:grpSp>
+            <p:nvGrpSpPr>
+              <p:cNvPr id="33" name="Groupe 32">
+                <a:extLst>
+                  <a:ext uri="{FF2B5EF4-FFF2-40B4-BE49-F238E27FC236}">
+                    <a16:creationId xmlns:a16="http://schemas.microsoft.com/office/drawing/2014/main" id="{B744D23B-2E94-47F7-96A7-4BA7E6FB0089}"/>
+                  </a:ext>
+                </a:extLst>
+              </p:cNvPr>
+              <p:cNvGrpSpPr/>
+              <p:nvPr/>
+            </p:nvGrpSpPr>
+            <p:grpSpPr>
+              <a:xfrm>
+                <a:off x="3860801" y="4678490"/>
+                <a:ext cx="2582333" cy="1257529"/>
+                <a:chOff x="270934" y="368071"/>
+                <a:chExt cx="2582333" cy="1257529"/>
+              </a:xfrm>
+            </p:grpSpPr>
+            <p:sp>
+              <p:nvSpPr>
+                <p:cNvPr id="34" name="Rectangle 33">
+                  <a:extLst>
+                    <a:ext uri="{FF2B5EF4-FFF2-40B4-BE49-F238E27FC236}">
+                      <a16:creationId xmlns:a16="http://schemas.microsoft.com/office/drawing/2014/main" id="{E7ABEB32-5092-4FCF-BF63-D0B007B38D7B}"/>
+                    </a:ext>
+                  </a:extLst>
+                </p:cNvPr>
+                <p:cNvSpPr/>
+                <p:nvPr/>
+              </p:nvSpPr>
+              <p:spPr>
+                <a:xfrm>
+                  <a:off x="1193800" y="745067"/>
+                  <a:ext cx="1659467" cy="880533"/>
+                </a:xfrm>
+                <a:prstGeom prst="rect">
+                  <a:avLst/>
+                </a:prstGeom>
+                <a:solidFill>
+                  <a:schemeClr val="accent1">
+                    <a:lumMod val="40000"/>
+                    <a:lumOff val="60000"/>
+                  </a:schemeClr>
+                </a:solidFill>
+                <a:ln>
+                  <a:solidFill>
+                    <a:schemeClr val="accent1">
+                      <a:lumMod val="75000"/>
+                    </a:schemeClr>
+                  </a:solidFill>
+                </a:ln>
+              </p:spPr>
+              <p:style>
+                <a:lnRef idx="2">
+                  <a:schemeClr val="accent5">
+                    <a:shade val="50000"/>
+                  </a:schemeClr>
+                </a:lnRef>
+                <a:fillRef idx="1">
+                  <a:schemeClr val="accent5"/>
+                </a:fillRef>
+                <a:effectRef idx="0">
+                  <a:schemeClr val="accent5"/>
+                </a:effectRef>
+                <a:fontRef idx="minor">
+                  <a:schemeClr val="lt1"/>
+                </a:fontRef>
+              </p:style>
+              <p:txBody>
+                <a:bodyPr rtlCol="0" anchor="ctr"/>
+                <a:lstStyle/>
+                <a:p>
+                  <a:pPr algn="ctr"/>
+                  <a:r>
+                    <a:rPr lang="fr-FR" dirty="0"/>
+                    <a:t>Environnement</a:t>
+                  </a:r>
+                </a:p>
+              </p:txBody>
+            </p:sp>
+            <p:cxnSp>
+              <p:nvCxnSpPr>
+                <p:cNvPr id="35" name="Connecteur droit avec flèche 34">
+                  <a:extLst>
+                    <a:ext uri="{FF2B5EF4-FFF2-40B4-BE49-F238E27FC236}">
+                      <a16:creationId xmlns:a16="http://schemas.microsoft.com/office/drawing/2014/main" id="{497DCD8A-A1A8-48BB-8426-10C4F231FD9E}"/>
+                    </a:ext>
+                  </a:extLst>
+                </p:cNvPr>
+                <p:cNvCxnSpPr/>
+                <p:nvPr/>
+              </p:nvCxnSpPr>
+              <p:spPr>
+                <a:xfrm>
+                  <a:off x="1016000" y="745067"/>
+                  <a:ext cx="0" cy="821266"/>
+                </a:xfrm>
+                <a:prstGeom prst="straightConnector1">
+                  <a:avLst/>
+                </a:prstGeom>
+                <a:ln>
+                  <a:headEnd type="triangle"/>
+                  <a:tailEnd type="triangle"/>
+                </a:ln>
+              </p:spPr>
+              <p:style>
+                <a:lnRef idx="1">
+                  <a:schemeClr val="accent1"/>
+                </a:lnRef>
+                <a:fillRef idx="0">
+                  <a:schemeClr val="accent1"/>
+                </a:fillRef>
+                <a:effectRef idx="0">
+                  <a:schemeClr val="accent1"/>
+                </a:effectRef>
+                <a:fontRef idx="minor">
+                  <a:schemeClr val="tx1"/>
+                </a:fontRef>
+              </p:style>
+            </p:cxnSp>
+            <p:sp>
+              <p:nvSpPr>
+                <p:cNvPr id="36" name="ZoneTexte 35">
+                  <a:extLst>
+                    <a:ext uri="{FF2B5EF4-FFF2-40B4-BE49-F238E27FC236}">
+                      <a16:creationId xmlns:a16="http://schemas.microsoft.com/office/drawing/2014/main" id="{041529AD-512E-41E1-AC44-DD17CB7DDF2F}"/>
+                    </a:ext>
+                  </a:extLst>
+                </p:cNvPr>
+                <p:cNvSpPr txBox="1"/>
+                <p:nvPr/>
+              </p:nvSpPr>
+              <p:spPr>
+                <a:xfrm>
+                  <a:off x="270934" y="1069917"/>
+                  <a:ext cx="745066" cy="230832"/>
+                </a:xfrm>
+                <a:prstGeom prst="rect">
+                  <a:avLst/>
+                </a:prstGeom>
+                <a:noFill/>
+              </p:spPr>
+              <p:txBody>
+                <a:bodyPr wrap="square" rtlCol="0">
+                  <a:spAutoFit/>
+                </a:bodyPr>
+                <a:lstStyle/>
+                <a:p>
+                  <a:r>
+                    <a:rPr lang="fr-FR" sz="900" dirty="0">
+                      <a:latin typeface="Arial" panose="020B0604020202020204" pitchFamily="34" charset="0"/>
+                      <a:cs typeface="Arial" panose="020B0604020202020204" pitchFamily="34" charset="0"/>
+                    </a:rPr>
+                    <a:t>12 régions</a:t>
+                  </a:r>
+                </a:p>
+              </p:txBody>
+            </p:sp>
+            <p:cxnSp>
+              <p:nvCxnSpPr>
+                <p:cNvPr id="37" name="Connecteur droit avec flèche 36">
+                  <a:extLst>
+                    <a:ext uri="{FF2B5EF4-FFF2-40B4-BE49-F238E27FC236}">
+                      <a16:creationId xmlns:a16="http://schemas.microsoft.com/office/drawing/2014/main" id="{ECA53E8D-6A3F-421D-87CA-AAC798F82B86}"/>
+                    </a:ext>
+                  </a:extLst>
+                </p:cNvPr>
+                <p:cNvCxnSpPr>
+                  <a:cxnSpLocks/>
+                </p:cNvCxnSpPr>
+                <p:nvPr/>
+              </p:nvCxnSpPr>
+              <p:spPr>
+                <a:xfrm>
+                  <a:off x="1193800" y="592667"/>
+                  <a:ext cx="1659467" cy="0"/>
+                </a:xfrm>
+                <a:prstGeom prst="straightConnector1">
+                  <a:avLst/>
+                </a:prstGeom>
+                <a:ln>
+                  <a:headEnd type="triangle"/>
+                  <a:tailEnd type="triangle"/>
+                </a:ln>
+              </p:spPr>
+              <p:style>
+                <a:lnRef idx="1">
+                  <a:schemeClr val="accent1"/>
+                </a:lnRef>
+                <a:fillRef idx="0">
+                  <a:schemeClr val="accent1"/>
+                </a:fillRef>
+                <a:effectRef idx="0">
+                  <a:schemeClr val="accent1"/>
+                </a:effectRef>
+                <a:fontRef idx="minor">
+                  <a:schemeClr val="tx1"/>
+                </a:fontRef>
+              </p:style>
+            </p:cxnSp>
+            <p:sp>
+              <p:nvSpPr>
+                <p:cNvPr id="38" name="ZoneTexte 37">
+                  <a:extLst>
+                    <a:ext uri="{FF2B5EF4-FFF2-40B4-BE49-F238E27FC236}">
+                      <a16:creationId xmlns:a16="http://schemas.microsoft.com/office/drawing/2014/main" id="{9ACF325C-B7E2-4AF5-968E-3C71B3EBB07D}"/>
+                    </a:ext>
+                  </a:extLst>
+                </p:cNvPr>
+                <p:cNvSpPr txBox="1"/>
+                <p:nvPr/>
+              </p:nvSpPr>
+              <p:spPr>
+                <a:xfrm>
+                  <a:off x="1515533" y="368071"/>
+                  <a:ext cx="1143000" cy="230832"/>
+                </a:xfrm>
+                <a:prstGeom prst="rect">
+                  <a:avLst/>
+                </a:prstGeom>
+                <a:noFill/>
+              </p:spPr>
+              <p:txBody>
+                <a:bodyPr wrap="square" rtlCol="0">
+                  <a:spAutoFit/>
+                </a:bodyPr>
+                <a:lstStyle/>
+                <a:p>
+                  <a:r>
+                    <a:rPr lang="fr-FR" sz="900" dirty="0">
+                      <a:latin typeface="Arial" panose="020B0604020202020204" pitchFamily="34" charset="0"/>
+                      <a:cs typeface="Arial" panose="020B0604020202020204" pitchFamily="34" charset="0"/>
+                    </a:rPr>
+                    <a:t> max 2 variables</a:t>
+                  </a:r>
+                </a:p>
+              </p:txBody>
+            </p:sp>
+          </p:grpSp>
+          <p:sp>
+            <p:nvSpPr>
+              <p:cNvPr id="55" name="Ellipse 54">
+                <a:extLst>
+                  <a:ext uri="{FF2B5EF4-FFF2-40B4-BE49-F238E27FC236}">
+                    <a16:creationId xmlns:a16="http://schemas.microsoft.com/office/drawing/2014/main" id="{74A41B7F-8B14-4868-99CF-8907F89937AE}"/>
+                  </a:ext>
+                </a:extLst>
+              </p:cNvPr>
+              <p:cNvSpPr/>
+              <p:nvPr/>
+            </p:nvSpPr>
+            <p:spPr>
+              <a:xfrm>
+                <a:off x="5202767" y="2152553"/>
+                <a:ext cx="643466" cy="558798"/>
+              </a:xfrm>
+              <a:prstGeom prst="ellipse">
+                <a:avLst/>
+              </a:prstGeom>
+              <a:solidFill>
+                <a:schemeClr val="bg2"/>
+              </a:solidFill>
+              <a:ln>
+                <a:solidFill>
+                  <a:schemeClr val="tx1"/>
+                </a:solidFill>
+              </a:ln>
+            </p:spPr>
+            <p:style>
+              <a:lnRef idx="2">
+                <a:schemeClr val="accent3">
+                  <a:shade val="50000"/>
+                </a:schemeClr>
+              </a:lnRef>
+              <a:fillRef idx="1">
+                <a:schemeClr val="accent3"/>
+              </a:fillRef>
+              <a:effectRef idx="0">
+                <a:schemeClr val="accent3"/>
+              </a:effectRef>
+              <a:fontRef idx="minor">
+                <a:schemeClr val="lt1"/>
+              </a:fontRef>
+            </p:style>
+            <p:txBody>
+              <a:bodyPr rtlCol="0" anchor="ctr"/>
+              <a:lstStyle/>
+              <a:p>
+                <a:pPr algn="ctr"/>
+                <a:r>
+                  <a:rPr lang="fr-FR" dirty="0">
+                    <a:solidFill>
+                      <a:schemeClr val="tx1"/>
+                    </a:solidFill>
+                  </a:rPr>
+                  <a:t>t</a:t>
+                </a:r>
+                <a:r>
+                  <a:rPr lang="fr-FR" baseline="-25000" dirty="0">
+                    <a:solidFill>
+                      <a:schemeClr val="tx1"/>
+                    </a:solidFill>
+                  </a:rPr>
+                  <a:t>2</a:t>
+                </a:r>
+              </a:p>
+            </p:txBody>
+          </p:sp>
+          <p:sp>
+            <p:nvSpPr>
+              <p:cNvPr id="56" name="Ellipse 55">
+                <a:extLst>
+                  <a:ext uri="{FF2B5EF4-FFF2-40B4-BE49-F238E27FC236}">
+                    <a16:creationId xmlns:a16="http://schemas.microsoft.com/office/drawing/2014/main" id="{89B56BEC-32A7-401A-9A46-9877A785C0F8}"/>
+                  </a:ext>
+                </a:extLst>
+              </p:cNvPr>
+              <p:cNvSpPr/>
+              <p:nvPr/>
+            </p:nvSpPr>
+            <p:spPr>
+              <a:xfrm>
+                <a:off x="3198285" y="3076302"/>
+                <a:ext cx="643466" cy="558798"/>
+              </a:xfrm>
+              <a:prstGeom prst="ellipse">
+                <a:avLst/>
+              </a:prstGeom>
+              <a:solidFill>
+                <a:schemeClr val="bg2"/>
+              </a:solidFill>
+              <a:ln>
+                <a:solidFill>
+                  <a:schemeClr val="tx1"/>
+                </a:solidFill>
+              </a:ln>
+            </p:spPr>
+            <p:style>
+              <a:lnRef idx="2">
+                <a:schemeClr val="accent3">
+                  <a:shade val="50000"/>
+                </a:schemeClr>
+              </a:lnRef>
+              <a:fillRef idx="1">
+                <a:schemeClr val="accent3"/>
+              </a:fillRef>
+              <a:effectRef idx="0">
+                <a:schemeClr val="accent3"/>
+              </a:effectRef>
+              <a:fontRef idx="minor">
+                <a:schemeClr val="lt1"/>
+              </a:fontRef>
+            </p:style>
+            <p:txBody>
+              <a:bodyPr rtlCol="0" anchor="ctr"/>
+              <a:lstStyle/>
+              <a:p>
+                <a:pPr algn="ctr"/>
+                <a:r>
+                  <a:rPr lang="fr-FR" dirty="0">
+                    <a:solidFill>
+                      <a:schemeClr val="tx1"/>
+                    </a:solidFill>
+                  </a:rPr>
+                  <a:t>t</a:t>
+                </a:r>
+                <a:r>
+                  <a:rPr lang="fr-FR" baseline="-25000" dirty="0">
+                    <a:solidFill>
+                      <a:schemeClr val="tx1"/>
+                    </a:solidFill>
+                  </a:rPr>
+                  <a:t>4</a:t>
+                </a:r>
+              </a:p>
+            </p:txBody>
+          </p:sp>
+          <p:grpSp>
+            <p:nvGrpSpPr>
+              <p:cNvPr id="60" name="Groupe 59">
+                <a:extLst>
+                  <a:ext uri="{FF2B5EF4-FFF2-40B4-BE49-F238E27FC236}">
+                    <a16:creationId xmlns:a16="http://schemas.microsoft.com/office/drawing/2014/main" id="{FDCA1811-6CFC-4654-8487-35124C8C3764}"/>
+                  </a:ext>
+                </a:extLst>
+              </p:cNvPr>
+              <p:cNvGrpSpPr/>
+              <p:nvPr/>
+            </p:nvGrpSpPr>
+            <p:grpSpPr>
+              <a:xfrm>
+                <a:off x="9040281" y="1669621"/>
+                <a:ext cx="1862667" cy="1306770"/>
+                <a:chOff x="270934" y="318830"/>
+                <a:chExt cx="1862667" cy="1306770"/>
+              </a:xfrm>
+            </p:grpSpPr>
+            <p:sp>
+              <p:nvSpPr>
+                <p:cNvPr id="61" name="Rectangle 60">
+                  <a:extLst>
+                    <a:ext uri="{FF2B5EF4-FFF2-40B4-BE49-F238E27FC236}">
+                      <a16:creationId xmlns:a16="http://schemas.microsoft.com/office/drawing/2014/main" id="{37E09C4B-2FA3-4D73-A1BA-DC779677F558}"/>
+                    </a:ext>
+                  </a:extLst>
+                </p:cNvPr>
+                <p:cNvSpPr/>
+                <p:nvPr/>
+              </p:nvSpPr>
+              <p:spPr>
+                <a:xfrm>
+                  <a:off x="1193800" y="745067"/>
+                  <a:ext cx="529167" cy="880533"/>
+                </a:xfrm>
+                <a:prstGeom prst="rect">
+                  <a:avLst/>
+                </a:prstGeom>
+                <a:solidFill>
+                  <a:schemeClr val="accent2">
+                    <a:lumMod val="40000"/>
+                    <a:lumOff val="60000"/>
+                  </a:schemeClr>
+                </a:solidFill>
+                <a:ln/>
+              </p:spPr>
+              <p:style>
+                <a:lnRef idx="2">
+                  <a:schemeClr val="accent2"/>
+                </a:lnRef>
+                <a:fillRef idx="1">
+                  <a:schemeClr val="lt1"/>
+                </a:fillRef>
+                <a:effectRef idx="0">
+                  <a:schemeClr val="accent2"/>
+                </a:effectRef>
+                <a:fontRef idx="minor">
+                  <a:schemeClr val="dk1"/>
+                </a:fontRef>
+              </p:style>
+              <p:txBody>
+                <a:bodyPr rtlCol="0" anchor="ctr"/>
+                <a:lstStyle/>
+                <a:p>
+                  <a:pPr algn="ctr"/>
+                  <a:r>
+                    <a:rPr lang="fr-FR" dirty="0"/>
+                    <a:t>Y</a:t>
+                  </a:r>
+                </a:p>
+              </p:txBody>
+            </p:sp>
+            <p:cxnSp>
+              <p:nvCxnSpPr>
+                <p:cNvPr id="62" name="Connecteur droit avec flèche 61">
+                  <a:extLst>
+                    <a:ext uri="{FF2B5EF4-FFF2-40B4-BE49-F238E27FC236}">
+                      <a16:creationId xmlns:a16="http://schemas.microsoft.com/office/drawing/2014/main" id="{E12D763A-03B0-440C-A97F-B619A2E669E6}"/>
+                    </a:ext>
+                  </a:extLst>
+                </p:cNvPr>
+                <p:cNvCxnSpPr/>
+                <p:nvPr/>
+              </p:nvCxnSpPr>
+              <p:spPr>
+                <a:xfrm>
+                  <a:off x="1016000" y="745067"/>
+                  <a:ext cx="0" cy="821266"/>
+                </a:xfrm>
+                <a:prstGeom prst="straightConnector1">
+                  <a:avLst/>
+                </a:prstGeom>
+                <a:ln>
+                  <a:headEnd type="triangle"/>
+                  <a:tailEnd type="triangle"/>
+                </a:ln>
+              </p:spPr>
+              <p:style>
+                <a:lnRef idx="1">
+                  <a:schemeClr val="accent1"/>
+                </a:lnRef>
+                <a:fillRef idx="0">
+                  <a:schemeClr val="accent1"/>
+                </a:fillRef>
+                <a:effectRef idx="0">
+                  <a:schemeClr val="accent1"/>
+                </a:effectRef>
+                <a:fontRef idx="minor">
+                  <a:schemeClr val="tx1"/>
+                </a:fontRef>
+              </p:style>
+            </p:cxnSp>
+            <p:sp>
+              <p:nvSpPr>
+                <p:cNvPr id="63" name="ZoneTexte 62">
+                  <a:extLst>
+                    <a:ext uri="{FF2B5EF4-FFF2-40B4-BE49-F238E27FC236}">
+                      <a16:creationId xmlns:a16="http://schemas.microsoft.com/office/drawing/2014/main" id="{967EAD35-89EE-4B20-AD20-08F5793FF116}"/>
+                    </a:ext>
+                  </a:extLst>
+                </p:cNvPr>
+                <p:cNvSpPr txBox="1"/>
+                <p:nvPr/>
+              </p:nvSpPr>
+              <p:spPr>
+                <a:xfrm>
+                  <a:off x="270934" y="1069917"/>
+                  <a:ext cx="745066" cy="230832"/>
+                </a:xfrm>
+                <a:prstGeom prst="rect">
+                  <a:avLst/>
+                </a:prstGeom>
+                <a:noFill/>
+              </p:spPr>
+              <p:txBody>
+                <a:bodyPr wrap="square" rtlCol="0">
+                  <a:spAutoFit/>
+                </a:bodyPr>
+                <a:lstStyle/>
+                <a:p>
+                  <a:r>
+                    <a:rPr lang="fr-FR" sz="900" dirty="0">
+                      <a:latin typeface="Arial" panose="020B0604020202020204" pitchFamily="34" charset="0"/>
+                      <a:cs typeface="Arial" panose="020B0604020202020204" pitchFamily="34" charset="0"/>
+                    </a:rPr>
+                    <a:t>12 régions</a:t>
+                  </a:r>
+                </a:p>
+              </p:txBody>
+            </p:sp>
+            <p:cxnSp>
+              <p:nvCxnSpPr>
+                <p:cNvPr id="64" name="Connecteur droit avec flèche 63">
+                  <a:extLst>
+                    <a:ext uri="{FF2B5EF4-FFF2-40B4-BE49-F238E27FC236}">
+                      <a16:creationId xmlns:a16="http://schemas.microsoft.com/office/drawing/2014/main" id="{EE032EF4-A1DC-4DAF-A752-EFFBCF8E5108}"/>
+                    </a:ext>
+                  </a:extLst>
+                </p:cNvPr>
+                <p:cNvCxnSpPr>
+                  <a:cxnSpLocks/>
+                </p:cNvCxnSpPr>
+                <p:nvPr/>
+              </p:nvCxnSpPr>
+              <p:spPr>
+                <a:xfrm>
+                  <a:off x="1193800" y="592667"/>
+                  <a:ext cx="529167" cy="0"/>
+                </a:xfrm>
+                <a:prstGeom prst="straightConnector1">
+                  <a:avLst/>
+                </a:prstGeom>
+                <a:ln>
+                  <a:headEnd type="triangle"/>
+                  <a:tailEnd type="triangle"/>
+                </a:ln>
+              </p:spPr>
+              <p:style>
+                <a:lnRef idx="1">
+                  <a:schemeClr val="accent1"/>
+                </a:lnRef>
+                <a:fillRef idx="0">
+                  <a:schemeClr val="accent1"/>
+                </a:fillRef>
+                <a:effectRef idx="0">
+                  <a:schemeClr val="accent1"/>
+                </a:effectRef>
+                <a:fontRef idx="minor">
+                  <a:schemeClr val="tx1"/>
+                </a:fontRef>
+              </p:style>
+            </p:cxnSp>
+            <p:sp>
+              <p:nvSpPr>
+                <p:cNvPr id="65" name="ZoneTexte 64">
+                  <a:extLst>
+                    <a:ext uri="{FF2B5EF4-FFF2-40B4-BE49-F238E27FC236}">
+                      <a16:creationId xmlns:a16="http://schemas.microsoft.com/office/drawing/2014/main" id="{489AD634-96B9-4903-B1A4-7391D77279AC}"/>
+                    </a:ext>
+                  </a:extLst>
+                </p:cNvPr>
+                <p:cNvSpPr txBox="1"/>
+                <p:nvPr/>
+              </p:nvSpPr>
+              <p:spPr>
+                <a:xfrm>
+                  <a:off x="990601" y="318830"/>
+                  <a:ext cx="1143000" cy="230832"/>
+                </a:xfrm>
+                <a:prstGeom prst="rect">
+                  <a:avLst/>
+                </a:prstGeom>
+                <a:noFill/>
+              </p:spPr>
+              <p:txBody>
+                <a:bodyPr wrap="square" rtlCol="0">
+                  <a:spAutoFit/>
+                </a:bodyPr>
+                <a:lstStyle/>
+                <a:p>
+                  <a:r>
+                    <a:rPr lang="fr-FR" sz="900" dirty="0">
+                      <a:latin typeface="Arial" panose="020B0604020202020204" pitchFamily="34" charset="0"/>
+                      <a:cs typeface="Arial" panose="020B0604020202020204" pitchFamily="34" charset="0"/>
+                    </a:rPr>
+                    <a:t> max 1 variable</a:t>
+                  </a:r>
+                </a:p>
+              </p:txBody>
+            </p:sp>
+          </p:grpSp>
+          <p:sp>
+            <p:nvSpPr>
+              <p:cNvPr id="83" name="Ellipse 82">
+                <a:extLst>
+                  <a:ext uri="{FF2B5EF4-FFF2-40B4-BE49-F238E27FC236}">
+                    <a16:creationId xmlns:a16="http://schemas.microsoft.com/office/drawing/2014/main" id="{C1842BC6-A26B-41CC-9940-91F9885286AD}"/>
+                  </a:ext>
+                </a:extLst>
+              </p:cNvPr>
+              <p:cNvSpPr/>
+              <p:nvPr/>
+            </p:nvSpPr>
+            <p:spPr>
+              <a:xfrm>
+                <a:off x="5202767" y="3939906"/>
+                <a:ext cx="643466" cy="558798"/>
+              </a:xfrm>
+              <a:prstGeom prst="ellipse">
+                <a:avLst/>
+              </a:prstGeom>
+              <a:solidFill>
+                <a:schemeClr val="bg2"/>
+              </a:solidFill>
+              <a:ln>
+                <a:solidFill>
+                  <a:schemeClr val="tx1"/>
+                </a:solidFill>
+              </a:ln>
+            </p:spPr>
+            <p:style>
+              <a:lnRef idx="2">
+                <a:schemeClr val="accent3">
+                  <a:shade val="50000"/>
+                </a:schemeClr>
+              </a:lnRef>
+              <a:fillRef idx="1">
+                <a:schemeClr val="accent3"/>
+              </a:fillRef>
+              <a:effectRef idx="0">
+                <a:schemeClr val="accent3"/>
+              </a:effectRef>
+              <a:fontRef idx="minor">
+                <a:schemeClr val="lt1"/>
+              </a:fontRef>
+            </p:style>
+            <p:txBody>
+              <a:bodyPr rtlCol="0" anchor="ctr"/>
+              <a:lstStyle/>
+              <a:p>
+                <a:pPr algn="ctr"/>
+                <a:r>
+                  <a:rPr lang="fr-FR" dirty="0">
+                    <a:solidFill>
+                      <a:schemeClr val="tx1"/>
+                    </a:solidFill>
+                  </a:rPr>
+                  <a:t>t</a:t>
+                </a:r>
+                <a:r>
+                  <a:rPr lang="fr-FR" baseline="-25000" dirty="0">
+                    <a:solidFill>
+                      <a:schemeClr val="tx1"/>
+                    </a:solidFill>
+                  </a:rPr>
+                  <a:t>3</a:t>
+                </a:r>
+              </a:p>
+            </p:txBody>
+          </p:sp>
+          <p:sp>
+            <p:nvSpPr>
+              <p:cNvPr id="86" name="Ellipse 85">
+                <a:extLst>
+                  <a:ext uri="{FF2B5EF4-FFF2-40B4-BE49-F238E27FC236}">
+                    <a16:creationId xmlns:a16="http://schemas.microsoft.com/office/drawing/2014/main" id="{A614A312-4AE6-4A69-8B72-B20545BF2321}"/>
+                  </a:ext>
+                </a:extLst>
+              </p:cNvPr>
+              <p:cNvSpPr/>
+              <p:nvPr/>
+            </p:nvSpPr>
+            <p:spPr>
+              <a:xfrm>
+                <a:off x="8147048" y="3465767"/>
+                <a:ext cx="643466" cy="558798"/>
+              </a:xfrm>
+              <a:prstGeom prst="ellipse">
+                <a:avLst/>
+              </a:prstGeom>
+              <a:solidFill>
+                <a:schemeClr val="bg2"/>
+              </a:solidFill>
+              <a:ln>
+                <a:solidFill>
+                  <a:schemeClr val="tx1"/>
+                </a:solidFill>
+              </a:ln>
+            </p:spPr>
+            <p:style>
+              <a:lnRef idx="2">
+                <a:schemeClr val="accent3">
+                  <a:shade val="50000"/>
+                </a:schemeClr>
+              </a:lnRef>
+              <a:fillRef idx="1">
+                <a:schemeClr val="accent3"/>
+              </a:fillRef>
+              <a:effectRef idx="0">
+                <a:schemeClr val="accent3"/>
+              </a:effectRef>
+              <a:fontRef idx="minor">
+                <a:schemeClr val="lt1"/>
+              </a:fontRef>
+            </p:style>
+            <p:txBody>
+              <a:bodyPr rtlCol="0" anchor="ctr"/>
+              <a:lstStyle/>
+              <a:p>
+                <a:pPr algn="ctr"/>
+                <a:r>
+                  <a:rPr lang="fr-FR" dirty="0">
+                    <a:solidFill>
+                      <a:schemeClr val="tx1"/>
+                    </a:solidFill>
+                  </a:rPr>
+                  <a:t>t</a:t>
+                </a:r>
+                <a:r>
+                  <a:rPr lang="fr-FR" baseline="-25000" dirty="0">
+                    <a:solidFill>
+                      <a:schemeClr val="tx1"/>
+                    </a:solidFill>
+                  </a:rPr>
+                  <a:t>1</a:t>
+                </a:r>
+              </a:p>
+            </p:txBody>
+          </p:sp>
+          <p:cxnSp>
+            <p:nvCxnSpPr>
+              <p:cNvPr id="9" name="Connecteur droit 8">
+                <a:extLst>
+                  <a:ext uri="{FF2B5EF4-FFF2-40B4-BE49-F238E27FC236}">
+                    <a16:creationId xmlns:a16="http://schemas.microsoft.com/office/drawing/2014/main" id="{87E5FD23-E975-439D-B0AA-32809D704A39}"/>
+                  </a:ext>
+                </a:extLst>
+              </p:cNvPr>
+              <p:cNvCxnSpPr>
+                <a:stCxn id="40" idx="3"/>
+                <a:endCxn id="56" idx="2"/>
+              </p:cNvCxnSpPr>
+              <p:nvPr/>
+            </p:nvCxnSpPr>
+            <p:spPr>
+              <a:xfrm flipV="1">
+                <a:off x="2688167" y="3355701"/>
+                <a:ext cx="510118" cy="48573"/>
+              </a:xfrm>
+              <a:prstGeom prst="line">
+                <a:avLst/>
+              </a:prstGeom>
+            </p:spPr>
+            <p:style>
+              <a:lnRef idx="1">
+                <a:schemeClr val="accent1"/>
+              </a:lnRef>
+              <a:fillRef idx="0">
+                <a:schemeClr val="accent1"/>
+              </a:fillRef>
+              <a:effectRef idx="0">
+                <a:schemeClr val="accent1"/>
+              </a:effectRef>
+              <a:fontRef idx="minor">
+                <a:schemeClr val="tx1"/>
+              </a:fontRef>
+            </p:style>
+          </p:cxnSp>
+          <p:cxnSp>
+            <p:nvCxnSpPr>
+              <p:cNvPr id="87" name="Connecteur droit 86">
+                <a:extLst>
+                  <a:ext uri="{FF2B5EF4-FFF2-40B4-BE49-F238E27FC236}">
+                    <a16:creationId xmlns:a16="http://schemas.microsoft.com/office/drawing/2014/main" id="{90BCFD3A-51F0-41F8-9779-74B91B4BB72A}"/>
+                  </a:ext>
+                </a:extLst>
+              </p:cNvPr>
+              <p:cNvCxnSpPr>
+                <a:cxnSpLocks/>
+                <a:stCxn id="55" idx="0"/>
+              </p:cNvCxnSpPr>
+              <p:nvPr/>
+            </p:nvCxnSpPr>
+            <p:spPr>
+              <a:xfrm flipV="1">
+                <a:off x="5524500" y="1669621"/>
+                <a:ext cx="152400" cy="482932"/>
+              </a:xfrm>
+              <a:prstGeom prst="line">
+                <a:avLst/>
+              </a:prstGeom>
+            </p:spPr>
+            <p:style>
+              <a:lnRef idx="1">
+                <a:schemeClr val="accent1"/>
+              </a:lnRef>
+              <a:fillRef idx="0">
+                <a:schemeClr val="accent1"/>
+              </a:fillRef>
+              <a:effectRef idx="0">
+                <a:schemeClr val="accent1"/>
+              </a:effectRef>
+              <a:fontRef idx="minor">
+                <a:schemeClr val="tx1"/>
+              </a:fontRef>
+            </p:style>
+          </p:cxnSp>
+          <p:cxnSp>
+            <p:nvCxnSpPr>
+              <p:cNvPr id="89" name="Connecteur droit 88">
+                <a:extLst>
+                  <a:ext uri="{FF2B5EF4-FFF2-40B4-BE49-F238E27FC236}">
+                    <a16:creationId xmlns:a16="http://schemas.microsoft.com/office/drawing/2014/main" id="{19305432-3DBB-4E6F-AB21-C0863F67B497}"/>
+                  </a:ext>
+                </a:extLst>
+              </p:cNvPr>
+              <p:cNvCxnSpPr>
+                <a:cxnSpLocks/>
+                <a:endCxn id="83" idx="4"/>
+              </p:cNvCxnSpPr>
+              <p:nvPr/>
+            </p:nvCxnSpPr>
+            <p:spPr>
+              <a:xfrm flipH="1" flipV="1">
+                <a:off x="5524500" y="4498704"/>
+                <a:ext cx="63500" cy="562464"/>
+              </a:xfrm>
+              <a:prstGeom prst="line">
+                <a:avLst/>
+              </a:prstGeom>
+            </p:spPr>
+            <p:style>
+              <a:lnRef idx="1">
+                <a:schemeClr val="accent1"/>
+              </a:lnRef>
+              <a:fillRef idx="0">
+                <a:schemeClr val="accent1"/>
+              </a:fillRef>
+              <a:effectRef idx="0">
+                <a:schemeClr val="accent1"/>
+              </a:effectRef>
+              <a:fontRef idx="minor">
+                <a:schemeClr val="tx1"/>
+              </a:fontRef>
+            </p:style>
+          </p:cxnSp>
+          <p:cxnSp>
+            <p:nvCxnSpPr>
+              <p:cNvPr id="91" name="Connecteur droit 90">
+                <a:extLst>
+                  <a:ext uri="{FF2B5EF4-FFF2-40B4-BE49-F238E27FC236}">
+                    <a16:creationId xmlns:a16="http://schemas.microsoft.com/office/drawing/2014/main" id="{F0BAA152-E957-4290-879D-BA430D576440}"/>
+                  </a:ext>
+                </a:extLst>
+              </p:cNvPr>
+              <p:cNvCxnSpPr>
+                <a:cxnSpLocks/>
+                <a:stCxn id="4" idx="0"/>
+                <a:endCxn id="86" idx="4"/>
+              </p:cNvCxnSpPr>
+              <p:nvPr/>
+            </p:nvCxnSpPr>
+            <p:spPr>
+              <a:xfrm flipH="1" flipV="1">
+                <a:off x="8468781" y="4024565"/>
+                <a:ext cx="508001" cy="706070"/>
+              </a:xfrm>
+              <a:prstGeom prst="line">
+                <a:avLst/>
+              </a:prstGeom>
+            </p:spPr>
+            <p:style>
+              <a:lnRef idx="1">
+                <a:schemeClr val="accent1"/>
+              </a:lnRef>
+              <a:fillRef idx="0">
+                <a:schemeClr val="accent1"/>
+              </a:fillRef>
+              <a:effectRef idx="0">
+                <a:schemeClr val="accent1"/>
+              </a:effectRef>
+              <a:fontRef idx="minor">
+                <a:schemeClr val="tx1"/>
+              </a:fontRef>
+            </p:style>
+          </p:cxnSp>
+          <p:cxnSp>
+            <p:nvCxnSpPr>
+              <p:cNvPr id="71" name="Connecteur droit avec flèche 70">
+                <a:extLst>
+                  <a:ext uri="{FF2B5EF4-FFF2-40B4-BE49-F238E27FC236}">
+                    <a16:creationId xmlns:a16="http://schemas.microsoft.com/office/drawing/2014/main" id="{EB4C53B0-33A0-4C3E-90F5-F0DCA6E2DC82}"/>
+                  </a:ext>
+                </a:extLst>
+              </p:cNvPr>
+              <p:cNvCxnSpPr>
+                <a:stCxn id="56" idx="7"/>
+                <a:endCxn id="55" idx="2"/>
+              </p:cNvCxnSpPr>
+              <p:nvPr/>
+            </p:nvCxnSpPr>
+            <p:spPr>
+              <a:xfrm flipV="1">
+                <a:off x="3747518" y="2431952"/>
+                <a:ext cx="1455249" cy="726184"/>
+              </a:xfrm>
+              <a:prstGeom prst="straightConnector1">
+                <a:avLst/>
+              </a:prstGeom>
+              <a:ln>
+                <a:headEnd type="triangle"/>
+                <a:tailEnd type="triangle"/>
+              </a:ln>
+            </p:spPr>
+            <p:style>
+              <a:lnRef idx="1">
+                <a:schemeClr val="accent6"/>
+              </a:lnRef>
+              <a:fillRef idx="0">
+                <a:schemeClr val="accent6"/>
+              </a:fillRef>
+              <a:effectRef idx="0">
+                <a:schemeClr val="accent6"/>
+              </a:effectRef>
+              <a:fontRef idx="minor">
+                <a:schemeClr val="tx1"/>
+              </a:fontRef>
+            </p:style>
+          </p:cxnSp>
+          <p:cxnSp>
+            <p:nvCxnSpPr>
+              <p:cNvPr id="77" name="Connecteur droit avec flèche 76">
+                <a:extLst>
+                  <a:ext uri="{FF2B5EF4-FFF2-40B4-BE49-F238E27FC236}">
+                    <a16:creationId xmlns:a16="http://schemas.microsoft.com/office/drawing/2014/main" id="{F7A96C17-B3D7-4203-A4D0-86AAB47C13EE}"/>
+                  </a:ext>
+                </a:extLst>
+              </p:cNvPr>
+              <p:cNvCxnSpPr>
+                <a:stCxn id="56" idx="5"/>
+                <a:endCxn id="83" idx="1"/>
+              </p:cNvCxnSpPr>
+              <p:nvPr/>
+            </p:nvCxnSpPr>
+            <p:spPr>
+              <a:xfrm>
+                <a:off x="3747518" y="3553266"/>
+                <a:ext cx="1549482" cy="468474"/>
+              </a:xfrm>
+              <a:prstGeom prst="straightConnector1">
+                <a:avLst/>
+              </a:prstGeom>
+              <a:ln>
+                <a:headEnd type="triangle"/>
+                <a:tailEnd type="triangle"/>
+              </a:ln>
+            </p:spPr>
+            <p:style>
+              <a:lnRef idx="1">
+                <a:schemeClr val="accent6"/>
+              </a:lnRef>
+              <a:fillRef idx="0">
+                <a:schemeClr val="accent6"/>
+              </a:fillRef>
+              <a:effectRef idx="0">
+                <a:schemeClr val="accent6"/>
+              </a:effectRef>
+              <a:fontRef idx="minor">
+                <a:schemeClr val="tx1"/>
+              </a:fontRef>
+            </p:style>
+          </p:cxnSp>
+          <p:cxnSp>
+            <p:nvCxnSpPr>
+              <p:cNvPr id="97" name="Connecteur droit avec flèche 96">
+                <a:extLst>
+                  <a:ext uri="{FF2B5EF4-FFF2-40B4-BE49-F238E27FC236}">
+                    <a16:creationId xmlns:a16="http://schemas.microsoft.com/office/drawing/2014/main" id="{244CE777-55BB-43E1-A3F2-7E4552216145}"/>
+                  </a:ext>
+                </a:extLst>
+              </p:cNvPr>
+              <p:cNvCxnSpPr>
+                <a:cxnSpLocks/>
+                <a:endCxn id="83" idx="0"/>
+              </p:cNvCxnSpPr>
+              <p:nvPr/>
+            </p:nvCxnSpPr>
+            <p:spPr>
+              <a:xfrm>
+                <a:off x="5496310" y="2706669"/>
+                <a:ext cx="28190" cy="1233237"/>
+              </a:xfrm>
+              <a:prstGeom prst="straightConnector1">
+                <a:avLst/>
+              </a:prstGeom>
+              <a:ln>
+                <a:headEnd type="triangle"/>
+                <a:tailEnd type="triangle"/>
+              </a:ln>
+            </p:spPr>
+            <p:style>
+              <a:lnRef idx="1">
+                <a:schemeClr val="accent6"/>
+              </a:lnRef>
+              <a:fillRef idx="0">
+                <a:schemeClr val="accent6"/>
+              </a:fillRef>
+              <a:effectRef idx="0">
+                <a:schemeClr val="accent6"/>
+              </a:effectRef>
+              <a:fontRef idx="minor">
+                <a:schemeClr val="tx1"/>
+              </a:fontRef>
+            </p:style>
+          </p:cxnSp>
+          <p:cxnSp>
+            <p:nvCxnSpPr>
+              <p:cNvPr id="101" name="Connecteur droit avec flèche 100">
+                <a:extLst>
+                  <a:ext uri="{FF2B5EF4-FFF2-40B4-BE49-F238E27FC236}">
+                    <a16:creationId xmlns:a16="http://schemas.microsoft.com/office/drawing/2014/main" id="{6D6723AA-2943-4961-9FD5-220254AAEDD0}"/>
+                  </a:ext>
+                </a:extLst>
+              </p:cNvPr>
+              <p:cNvCxnSpPr>
+                <a:cxnSpLocks/>
+                <a:stCxn id="56" idx="6"/>
+                <a:endCxn id="86" idx="2"/>
+              </p:cNvCxnSpPr>
+              <p:nvPr/>
+            </p:nvCxnSpPr>
+            <p:spPr>
+              <a:xfrm>
+                <a:off x="3841751" y="3355701"/>
+                <a:ext cx="4305297" cy="389465"/>
+              </a:xfrm>
+              <a:prstGeom prst="straightConnector1">
+                <a:avLst/>
+              </a:prstGeom>
+              <a:ln>
+                <a:tailEnd type="triangle"/>
+              </a:ln>
+            </p:spPr>
+            <p:style>
+              <a:lnRef idx="1">
+                <a:schemeClr val="dk1"/>
+              </a:lnRef>
+              <a:fillRef idx="0">
+                <a:schemeClr val="dk1"/>
+              </a:fillRef>
+              <a:effectRef idx="0">
+                <a:schemeClr val="dk1"/>
+              </a:effectRef>
+              <a:fontRef idx="minor">
+                <a:schemeClr val="tx1"/>
+              </a:fontRef>
+            </p:style>
+          </p:cxnSp>
+          <p:cxnSp>
+            <p:nvCxnSpPr>
+              <p:cNvPr id="104" name="Connecteur droit avec flèche 103">
+                <a:extLst>
+                  <a:ext uri="{FF2B5EF4-FFF2-40B4-BE49-F238E27FC236}">
+                    <a16:creationId xmlns:a16="http://schemas.microsoft.com/office/drawing/2014/main" id="{4F173E60-0876-487C-A09D-58F4FD00B860}"/>
+                  </a:ext>
+                </a:extLst>
+              </p:cNvPr>
+              <p:cNvCxnSpPr>
+                <a:cxnSpLocks/>
+                <a:stCxn id="83" idx="6"/>
+                <a:endCxn id="86" idx="3"/>
+              </p:cNvCxnSpPr>
+              <p:nvPr/>
+            </p:nvCxnSpPr>
+            <p:spPr>
+              <a:xfrm flipV="1">
+                <a:off x="5846233" y="3942731"/>
+                <a:ext cx="2395048" cy="276574"/>
+              </a:xfrm>
+              <a:prstGeom prst="straightConnector1">
+                <a:avLst/>
+              </a:prstGeom>
+              <a:ln>
+                <a:tailEnd type="triangle"/>
+              </a:ln>
+            </p:spPr>
+            <p:style>
+              <a:lnRef idx="1">
+                <a:schemeClr val="dk1"/>
+              </a:lnRef>
+              <a:fillRef idx="0">
+                <a:schemeClr val="dk1"/>
+              </a:fillRef>
+              <a:effectRef idx="0">
+                <a:schemeClr val="dk1"/>
+              </a:effectRef>
+              <a:fontRef idx="minor">
+                <a:schemeClr val="tx1"/>
+              </a:fontRef>
+            </p:style>
+          </p:cxnSp>
+          <p:cxnSp>
+            <p:nvCxnSpPr>
+              <p:cNvPr id="105" name="Connecteur droit avec flèche 104">
+                <a:extLst>
+                  <a:ext uri="{FF2B5EF4-FFF2-40B4-BE49-F238E27FC236}">
+                    <a16:creationId xmlns:a16="http://schemas.microsoft.com/office/drawing/2014/main" id="{535EA614-6159-464F-AC2B-AFB341605941}"/>
+                  </a:ext>
+                </a:extLst>
+              </p:cNvPr>
+              <p:cNvCxnSpPr>
+                <a:cxnSpLocks/>
+                <a:stCxn id="86" idx="0"/>
+                <a:endCxn id="112" idx="4"/>
+              </p:cNvCxnSpPr>
+              <p:nvPr/>
+            </p:nvCxnSpPr>
+            <p:spPr>
+              <a:xfrm flipV="1">
+                <a:off x="8468781" y="2777001"/>
+                <a:ext cx="249766" cy="688766"/>
+              </a:xfrm>
+              <a:prstGeom prst="straightConnector1">
+                <a:avLst/>
+              </a:prstGeom>
+              <a:ln>
+                <a:tailEnd type="triangle"/>
+              </a:ln>
+            </p:spPr>
+            <p:style>
+              <a:lnRef idx="1">
+                <a:schemeClr val="accent2"/>
+              </a:lnRef>
+              <a:fillRef idx="0">
+                <a:schemeClr val="accent2"/>
+              </a:fillRef>
+              <a:effectRef idx="0">
+                <a:schemeClr val="accent2"/>
+              </a:effectRef>
+              <a:fontRef idx="minor">
+                <a:schemeClr val="tx1"/>
+              </a:fontRef>
+            </p:style>
+          </p:cxnSp>
+          <p:sp>
+            <p:nvSpPr>
+              <p:cNvPr id="112" name="Ellipse 111">
+                <a:extLst>
+                  <a:ext uri="{FF2B5EF4-FFF2-40B4-BE49-F238E27FC236}">
+                    <a16:creationId xmlns:a16="http://schemas.microsoft.com/office/drawing/2014/main" id="{493842CD-0665-4A27-9432-1B5D4CD35AA8}"/>
+                  </a:ext>
+                </a:extLst>
+              </p:cNvPr>
+              <p:cNvSpPr/>
+              <p:nvPr/>
+            </p:nvSpPr>
+            <p:spPr>
+              <a:xfrm>
+                <a:off x="8396814" y="2218203"/>
+                <a:ext cx="643466" cy="558798"/>
+              </a:xfrm>
+              <a:prstGeom prst="ellipse">
+                <a:avLst/>
+              </a:prstGeom>
+              <a:solidFill>
+                <a:schemeClr val="bg2"/>
+              </a:solidFill>
+              <a:ln>
+                <a:solidFill>
+                  <a:schemeClr val="tx1"/>
+                </a:solidFill>
+              </a:ln>
+            </p:spPr>
+            <p:style>
+              <a:lnRef idx="2">
+                <a:schemeClr val="accent3">
+                  <a:shade val="50000"/>
+                </a:schemeClr>
+              </a:lnRef>
+              <a:fillRef idx="1">
+                <a:schemeClr val="accent3"/>
+              </a:fillRef>
+              <a:effectRef idx="0">
+                <a:schemeClr val="accent3"/>
+              </a:effectRef>
+              <a:fontRef idx="minor">
+                <a:schemeClr val="lt1"/>
+              </a:fontRef>
+            </p:style>
+            <p:txBody>
+              <a:bodyPr rtlCol="0" anchor="ctr"/>
+              <a:lstStyle/>
+              <a:p>
+                <a:pPr algn="ctr"/>
+                <a:r>
+                  <a:rPr lang="fr-FR" dirty="0" err="1">
+                    <a:solidFill>
+                      <a:schemeClr val="tx1"/>
+                    </a:solidFill>
+                  </a:rPr>
+                  <a:t>t</a:t>
+                </a:r>
+                <a:r>
+                  <a:rPr lang="fr-FR" baseline="-25000" dirty="0" err="1">
+                    <a:solidFill>
+                      <a:schemeClr val="tx1"/>
+                    </a:solidFill>
+                  </a:rPr>
+                  <a:t>y</a:t>
+                </a:r>
+                <a:endParaRPr lang="fr-FR" baseline="-25000" dirty="0">
+                  <a:solidFill>
+                    <a:schemeClr val="tx1"/>
+                  </a:solidFill>
+                </a:endParaRPr>
+              </a:p>
+            </p:txBody>
+          </p:sp>
+          <p:cxnSp>
+            <p:nvCxnSpPr>
+              <p:cNvPr id="115" name="Connecteur droit avec flèche 114">
+                <a:extLst>
+                  <a:ext uri="{FF2B5EF4-FFF2-40B4-BE49-F238E27FC236}">
+                    <a16:creationId xmlns:a16="http://schemas.microsoft.com/office/drawing/2014/main" id="{C55FE631-DE36-4001-953D-547F103476B8}"/>
+                  </a:ext>
+                </a:extLst>
+              </p:cNvPr>
+              <p:cNvCxnSpPr>
+                <a:cxnSpLocks/>
+                <a:stCxn id="55" idx="7"/>
+                <a:endCxn id="112" idx="2"/>
+              </p:cNvCxnSpPr>
+              <p:nvPr/>
+            </p:nvCxnSpPr>
+            <p:spPr>
+              <a:xfrm>
+                <a:off x="5752000" y="2234387"/>
+                <a:ext cx="2644814" cy="263215"/>
+              </a:xfrm>
+              <a:prstGeom prst="straightConnector1">
+                <a:avLst/>
+              </a:prstGeom>
+              <a:ln>
+                <a:tailEnd type="triangle"/>
+              </a:ln>
+            </p:spPr>
+            <p:style>
+              <a:lnRef idx="1">
+                <a:schemeClr val="accent2"/>
+              </a:lnRef>
+              <a:fillRef idx="0">
+                <a:schemeClr val="accent2"/>
+              </a:fillRef>
+              <a:effectRef idx="0">
+                <a:schemeClr val="accent2"/>
+              </a:effectRef>
+              <a:fontRef idx="minor">
+                <a:schemeClr val="tx1"/>
+              </a:fontRef>
+            </p:style>
+          </p:cxnSp>
+          <p:cxnSp>
+            <p:nvCxnSpPr>
+              <p:cNvPr id="119" name="Connecteur droit avec flèche 118">
+                <a:extLst>
+                  <a:ext uri="{FF2B5EF4-FFF2-40B4-BE49-F238E27FC236}">
+                    <a16:creationId xmlns:a16="http://schemas.microsoft.com/office/drawing/2014/main" id="{22B5DE84-1C10-45BC-BAEB-F2A2D97E6B8A}"/>
+                  </a:ext>
+                </a:extLst>
+              </p:cNvPr>
+              <p:cNvCxnSpPr>
+                <a:cxnSpLocks/>
+                <a:stCxn id="56" idx="6"/>
+              </p:cNvCxnSpPr>
+              <p:nvPr/>
+            </p:nvCxnSpPr>
+            <p:spPr>
+              <a:xfrm flipV="1">
+                <a:off x="3841751" y="2692227"/>
+                <a:ext cx="4654546" cy="663474"/>
+              </a:xfrm>
+              <a:prstGeom prst="straightConnector1">
+                <a:avLst/>
+              </a:prstGeom>
+              <a:ln>
+                <a:tailEnd type="triangle"/>
+              </a:ln>
+            </p:spPr>
+            <p:style>
+              <a:lnRef idx="1">
+                <a:schemeClr val="accent2"/>
+              </a:lnRef>
+              <a:fillRef idx="0">
+                <a:schemeClr val="accent2"/>
+              </a:fillRef>
+              <a:effectRef idx="0">
+                <a:schemeClr val="accent2"/>
+              </a:effectRef>
+              <a:fontRef idx="minor">
+                <a:schemeClr val="tx1"/>
+              </a:fontRef>
+            </p:style>
+          </p:cxnSp>
+          <p:cxnSp>
+            <p:nvCxnSpPr>
+              <p:cNvPr id="122" name="Connecteur droit avec flèche 121">
+                <a:extLst>
+                  <a:ext uri="{FF2B5EF4-FFF2-40B4-BE49-F238E27FC236}">
+                    <a16:creationId xmlns:a16="http://schemas.microsoft.com/office/drawing/2014/main" id="{6A96B123-4EE6-4AEA-9FBE-4ACC354255C2}"/>
+                  </a:ext>
+                </a:extLst>
+              </p:cNvPr>
+              <p:cNvCxnSpPr>
+                <a:cxnSpLocks/>
+                <a:stCxn id="83" idx="7"/>
+                <a:endCxn id="112" idx="3"/>
+              </p:cNvCxnSpPr>
+              <p:nvPr/>
+            </p:nvCxnSpPr>
+            <p:spPr>
+              <a:xfrm flipV="1">
+                <a:off x="5752000" y="2695167"/>
+                <a:ext cx="2739047" cy="1326573"/>
+              </a:xfrm>
+              <a:prstGeom prst="straightConnector1">
+                <a:avLst/>
+              </a:prstGeom>
+              <a:ln>
+                <a:tailEnd type="triangle"/>
+              </a:ln>
+            </p:spPr>
+            <p:style>
+              <a:lnRef idx="1">
+                <a:schemeClr val="accent2"/>
+              </a:lnRef>
+              <a:fillRef idx="0">
+                <a:schemeClr val="accent2"/>
+              </a:fillRef>
+              <a:effectRef idx="0">
+                <a:schemeClr val="accent2"/>
+              </a:effectRef>
+              <a:fontRef idx="minor">
+                <a:schemeClr val="tx1"/>
+              </a:fontRef>
+            </p:style>
+          </p:cxnSp>
+          <p:cxnSp>
+            <p:nvCxnSpPr>
+              <p:cNvPr id="125" name="Connecteur droit 124">
+                <a:extLst>
+                  <a:ext uri="{FF2B5EF4-FFF2-40B4-BE49-F238E27FC236}">
+                    <a16:creationId xmlns:a16="http://schemas.microsoft.com/office/drawing/2014/main" id="{EA4C95C5-5B3C-4AB3-9E7C-3B45FEF5B3B1}"/>
+                  </a:ext>
+                </a:extLst>
+              </p:cNvPr>
+              <p:cNvCxnSpPr>
+                <a:cxnSpLocks/>
+                <a:stCxn id="61" idx="1"/>
+              </p:cNvCxnSpPr>
+              <p:nvPr/>
+            </p:nvCxnSpPr>
+            <p:spPr>
+              <a:xfrm flipH="1" flipV="1">
+                <a:off x="9040281" y="2457685"/>
+                <a:ext cx="922866" cy="78440"/>
+              </a:xfrm>
+              <a:prstGeom prst="line">
+                <a:avLst/>
+              </a:prstGeom>
+            </p:spPr>
+            <p:style>
+              <a:lnRef idx="1">
+                <a:schemeClr val="accent1"/>
+              </a:lnRef>
+              <a:fillRef idx="0">
+                <a:schemeClr val="accent1"/>
+              </a:fillRef>
+              <a:effectRef idx="0">
+                <a:schemeClr val="accent1"/>
+              </a:effectRef>
+              <a:fontRef idx="minor">
+                <a:schemeClr val="tx1"/>
+              </a:fontRef>
+            </p:style>
+          </p:cxnSp>
+        </p:grpSp>
+      </p:grpSp>
+    </p:spTree>
+    <p:extLst>
+      <p:ext uri="{BB962C8B-B14F-4D97-AF65-F5344CB8AC3E}">
+        <p14:creationId xmlns:p14="http://schemas.microsoft.com/office/powerpoint/2010/main" val="632821837"/>
+      </p:ext>
+    </p:extLst>
+  </p:cSld>
+  <p:clrMapOvr>
+    <a:masterClrMapping/>
+  </p:clrMapOvr>
+</p:sld>
+</file>
+
+<file path=ppt/slides/slide2.xml><?xml version="1.0" encoding="utf-8"?>
+<p:sld xmlns:a="http://schemas.openxmlformats.org/drawingml/2006/main" xmlns:r="http://schemas.openxmlformats.org/officeDocument/2006/relationships" xmlns:p="http://schemas.openxmlformats.org/presentationml/2006/main">
+  <p:cSld>
+    <p:spTree>
+      <p:nvGrpSpPr>
+        <p:cNvPr id="1" name=""/>
+        <p:cNvGrpSpPr/>
+        <p:nvPr/>
+      </p:nvGrpSpPr>
+      <p:grpSpPr>
+        <a:xfrm>
+          <a:off x="0" y="0"/>
+          <a:ext cx="0" cy="0"/>
+          <a:chOff x="0" y="0"/>
+          <a:chExt cx="0" cy="0"/>
+        </a:xfrm>
+      </p:grpSpPr>
+      <p:grpSp>
+        <p:nvGrpSpPr>
+          <p:cNvPr id="100" name="Groupe 99">
+            <a:extLst>
+              <a:ext uri="{FF2B5EF4-FFF2-40B4-BE49-F238E27FC236}">
+                <a16:creationId xmlns:a16="http://schemas.microsoft.com/office/drawing/2014/main" id="{B87AC518-1796-49AB-93BC-3D713E5720D1}"/>
+              </a:ext>
+            </a:extLst>
+          </p:cNvPr>
+          <p:cNvGrpSpPr/>
+          <p:nvPr/>
+        </p:nvGrpSpPr>
+        <p:grpSpPr>
+          <a:xfrm>
+            <a:off x="66630" y="355310"/>
+            <a:ext cx="10861717" cy="6046670"/>
+            <a:chOff x="66630" y="355310"/>
+            <a:chExt cx="10861717" cy="6046670"/>
+          </a:xfrm>
+        </p:grpSpPr>
+        <p:grpSp>
+          <p:nvGrpSpPr>
+            <p:cNvPr id="3" name="Groupe 2">
+              <a:extLst>
+                <a:ext uri="{FF2B5EF4-FFF2-40B4-BE49-F238E27FC236}">
+                  <a16:creationId xmlns:a16="http://schemas.microsoft.com/office/drawing/2014/main" id="{F5C23EA5-E784-4021-A82D-AE7317BAA0EA}"/>
+                </a:ext>
+              </a:extLst>
+            </p:cNvPr>
+            <p:cNvGrpSpPr/>
+            <p:nvPr/>
+          </p:nvGrpSpPr>
+          <p:grpSpPr>
+            <a:xfrm>
+              <a:off x="66630" y="355310"/>
+              <a:ext cx="10861717" cy="5580709"/>
+              <a:chOff x="66630" y="355310"/>
+              <a:chExt cx="10861717" cy="5580709"/>
+            </a:xfrm>
+          </p:grpSpPr>
+          <p:grpSp>
+            <p:nvGrpSpPr>
+              <p:cNvPr id="39" name="Groupe 38">
+                <a:extLst>
+                  <a:ext uri="{FF2B5EF4-FFF2-40B4-BE49-F238E27FC236}">
+                    <a16:creationId xmlns:a16="http://schemas.microsoft.com/office/drawing/2014/main" id="{5FF32897-D699-4EF8-97BB-81B42CDC2DD0}"/>
+                  </a:ext>
+                </a:extLst>
+              </p:cNvPr>
+              <p:cNvGrpSpPr/>
+              <p:nvPr/>
+            </p:nvGrpSpPr>
+            <p:grpSpPr>
+              <a:xfrm>
+                <a:off x="66630" y="2529846"/>
+                <a:ext cx="2621537" cy="1314694"/>
+                <a:chOff x="231730" y="311793"/>
+                <a:chExt cx="2621537" cy="1314694"/>
+              </a:xfrm>
+            </p:grpSpPr>
+            <p:sp>
+              <p:nvSpPr>
+                <p:cNvPr id="40" name="Rectangle 39">
+                  <a:extLst>
+                    <a:ext uri="{FF2B5EF4-FFF2-40B4-BE49-F238E27FC236}">
+                      <a16:creationId xmlns:a16="http://schemas.microsoft.com/office/drawing/2014/main" id="{248E56DC-04D6-4514-8581-639195D6C8E4}"/>
+                    </a:ext>
+                  </a:extLst>
+                </p:cNvPr>
+                <p:cNvSpPr/>
+                <p:nvPr/>
+              </p:nvSpPr>
+              <p:spPr>
+                <a:xfrm>
+                  <a:off x="1193800" y="745954"/>
+                  <a:ext cx="1659467" cy="880533"/>
+                </a:xfrm>
+                <a:prstGeom prst="rect">
+                  <a:avLst/>
+                </a:prstGeom>
+                <a:solidFill>
+                  <a:srgbClr val="E76BF3"/>
+                </a:solidFill>
+                <a:ln>
+                  <a:solidFill>
+                    <a:schemeClr val="accent1">
+                      <a:lumMod val="75000"/>
+                    </a:schemeClr>
+                  </a:solidFill>
+                </a:ln>
+              </p:spPr>
+              <p:style>
+                <a:lnRef idx="2">
+                  <a:schemeClr val="accent5">
+                    <a:shade val="50000"/>
+                  </a:schemeClr>
+                </a:lnRef>
+                <a:fillRef idx="1">
+                  <a:schemeClr val="accent5"/>
+                </a:fillRef>
+                <a:effectRef idx="0">
+                  <a:schemeClr val="accent5"/>
+                </a:effectRef>
+                <a:fontRef idx="minor">
+                  <a:schemeClr val="lt1"/>
+                </a:fontRef>
+              </p:style>
+              <p:txBody>
+                <a:bodyPr rtlCol="0" anchor="ctr"/>
+                <a:lstStyle/>
+                <a:p>
+                  <a:pPr algn="ctr"/>
+                  <a:r>
+                    <a:rPr lang="fr-FR" sz="3200" dirty="0" err="1"/>
+                    <a:t>Humans</a:t>
+                  </a:r>
+                  <a:endParaRPr lang="fr-FR" sz="3200" dirty="0"/>
+                </a:p>
+              </p:txBody>
+            </p:sp>
+            <p:cxnSp>
+              <p:nvCxnSpPr>
+                <p:cNvPr id="41" name="Connecteur droit avec flèche 40">
+                  <a:extLst>
+                    <a:ext uri="{FF2B5EF4-FFF2-40B4-BE49-F238E27FC236}">
+                      <a16:creationId xmlns:a16="http://schemas.microsoft.com/office/drawing/2014/main" id="{084830E6-54A0-4390-B044-961F5B950BC5}"/>
+                    </a:ext>
+                  </a:extLst>
+                </p:cNvPr>
+                <p:cNvCxnSpPr/>
+                <p:nvPr/>
+              </p:nvCxnSpPr>
+              <p:spPr>
+                <a:xfrm>
+                  <a:off x="1016000" y="745067"/>
+                  <a:ext cx="0" cy="821266"/>
+                </a:xfrm>
+                <a:prstGeom prst="straightConnector1">
+                  <a:avLst/>
+                </a:prstGeom>
+                <a:ln>
+                  <a:headEnd type="triangle"/>
+                  <a:tailEnd type="triangle"/>
+                </a:ln>
+              </p:spPr>
+              <p:style>
+                <a:lnRef idx="1">
+                  <a:schemeClr val="accent1"/>
+                </a:lnRef>
+                <a:fillRef idx="0">
+                  <a:schemeClr val="accent1"/>
+                </a:fillRef>
+                <a:effectRef idx="0">
+                  <a:schemeClr val="accent1"/>
+                </a:effectRef>
+                <a:fontRef idx="minor">
+                  <a:schemeClr val="tx1"/>
+                </a:fontRef>
+              </p:style>
+            </p:cxnSp>
+            <p:sp>
+              <p:nvSpPr>
+                <p:cNvPr id="42" name="ZoneTexte 41">
+                  <a:extLst>
+                    <a:ext uri="{FF2B5EF4-FFF2-40B4-BE49-F238E27FC236}">
+                      <a16:creationId xmlns:a16="http://schemas.microsoft.com/office/drawing/2014/main" id="{E2D3ACDF-5E51-48DE-8050-87366971D5AA}"/>
+                    </a:ext>
+                  </a:extLst>
+                </p:cNvPr>
+                <p:cNvSpPr txBox="1"/>
+                <p:nvPr/>
+              </p:nvSpPr>
+              <p:spPr>
+                <a:xfrm>
+                  <a:off x="231730" y="940083"/>
+                  <a:ext cx="791636" cy="523220"/>
+                </a:xfrm>
+                <a:prstGeom prst="rect">
+                  <a:avLst/>
+                </a:prstGeom>
+                <a:noFill/>
+              </p:spPr>
+              <p:txBody>
+                <a:bodyPr wrap="square" rtlCol="0">
+                  <a:spAutoFit/>
+                </a:bodyPr>
+                <a:lstStyle/>
+                <a:p>
+                  <a:pPr algn="ctr"/>
+                  <a:r>
+                    <a:rPr lang="fr-FR" sz="1400" dirty="0">
+                      <a:latin typeface="Arial" panose="020B0604020202020204" pitchFamily="34" charset="0"/>
+                      <a:cs typeface="Arial" panose="020B0604020202020204" pitchFamily="34" charset="0"/>
+                    </a:rPr>
+                    <a:t>12 </a:t>
+                  </a:r>
+                  <a:r>
+                    <a:rPr lang="fr-FR" sz="1400" dirty="0" err="1">
+                      <a:latin typeface="Arial" panose="020B0604020202020204" pitchFamily="34" charset="0"/>
+                      <a:cs typeface="Arial" panose="020B0604020202020204" pitchFamily="34" charset="0"/>
+                    </a:rPr>
+                    <a:t>regions</a:t>
+                  </a:r>
+                  <a:endParaRPr lang="fr-FR" sz="1000" dirty="0">
+                    <a:latin typeface="Arial" panose="020B0604020202020204" pitchFamily="34" charset="0"/>
+                    <a:cs typeface="Arial" panose="020B0604020202020204" pitchFamily="34" charset="0"/>
+                  </a:endParaRPr>
+                </a:p>
+              </p:txBody>
+            </p:sp>
+            <p:cxnSp>
+              <p:nvCxnSpPr>
+                <p:cNvPr id="43" name="Connecteur droit avec flèche 42">
+                  <a:extLst>
+                    <a:ext uri="{FF2B5EF4-FFF2-40B4-BE49-F238E27FC236}">
+                      <a16:creationId xmlns:a16="http://schemas.microsoft.com/office/drawing/2014/main" id="{46455CAF-F801-4643-BB0E-28BC07737614}"/>
+                    </a:ext>
+                  </a:extLst>
+                </p:cNvPr>
+                <p:cNvCxnSpPr>
+                  <a:cxnSpLocks/>
+                </p:cNvCxnSpPr>
+                <p:nvPr/>
+              </p:nvCxnSpPr>
+              <p:spPr>
+                <a:xfrm>
+                  <a:off x="1193800" y="592667"/>
+                  <a:ext cx="1659467" cy="0"/>
+                </a:xfrm>
+                <a:prstGeom prst="straightConnector1">
+                  <a:avLst/>
+                </a:prstGeom>
+                <a:ln>
+                  <a:headEnd type="triangle"/>
+                  <a:tailEnd type="triangle"/>
+                </a:ln>
+              </p:spPr>
+              <p:style>
+                <a:lnRef idx="1">
+                  <a:schemeClr val="accent1"/>
+                </a:lnRef>
+                <a:fillRef idx="0">
+                  <a:schemeClr val="accent1"/>
+                </a:fillRef>
+                <a:effectRef idx="0">
+                  <a:schemeClr val="accent1"/>
+                </a:effectRef>
+                <a:fontRef idx="minor">
+                  <a:schemeClr val="tx1"/>
+                </a:fontRef>
+              </p:style>
+            </p:cxnSp>
+            <p:sp>
+              <p:nvSpPr>
+                <p:cNvPr id="44" name="ZoneTexte 43">
+                  <a:extLst>
+                    <a:ext uri="{FF2B5EF4-FFF2-40B4-BE49-F238E27FC236}">
+                      <a16:creationId xmlns:a16="http://schemas.microsoft.com/office/drawing/2014/main" id="{7669819F-8761-4D86-96A1-CF36AFE272B8}"/>
+                    </a:ext>
+                  </a:extLst>
+                </p:cNvPr>
+                <p:cNvSpPr txBox="1"/>
+                <p:nvPr/>
+              </p:nvSpPr>
+              <p:spPr>
+                <a:xfrm>
+                  <a:off x="1525018" y="311793"/>
+                  <a:ext cx="1143000" cy="307777"/>
+                </a:xfrm>
+                <a:prstGeom prst="rect">
+                  <a:avLst/>
+                </a:prstGeom>
+                <a:noFill/>
+              </p:spPr>
+              <p:txBody>
+                <a:bodyPr wrap="square" rtlCol="0">
+                  <a:spAutoFit/>
+                </a:bodyPr>
+                <a:lstStyle/>
+                <a:p>
+                  <a:r>
+                    <a:rPr lang="fr-FR" sz="900" dirty="0">
+                      <a:latin typeface="Arial" panose="020B0604020202020204" pitchFamily="34" charset="0"/>
+                      <a:cs typeface="Arial" panose="020B0604020202020204" pitchFamily="34" charset="0"/>
+                    </a:rPr>
+                    <a:t> </a:t>
+                  </a:r>
+                  <a:r>
+                    <a:rPr lang="fr-FR" sz="1400" dirty="0">
+                      <a:latin typeface="Arial" panose="020B0604020202020204" pitchFamily="34" charset="0"/>
+                      <a:cs typeface="Arial" panose="020B0604020202020204" pitchFamily="34" charset="0"/>
+                    </a:rPr>
+                    <a:t>2 fPC1</a:t>
+                  </a:r>
+                  <a:endParaRPr lang="fr-FR" sz="900" dirty="0">
+                    <a:latin typeface="Arial" panose="020B0604020202020204" pitchFamily="34" charset="0"/>
+                    <a:cs typeface="Arial" panose="020B0604020202020204" pitchFamily="34" charset="0"/>
+                  </a:endParaRPr>
+                </a:p>
+              </p:txBody>
+            </p:sp>
+          </p:grpSp>
+          <p:grpSp>
+            <p:nvGrpSpPr>
+              <p:cNvPr id="2" name="Groupe 1">
+                <a:extLst>
+                  <a:ext uri="{FF2B5EF4-FFF2-40B4-BE49-F238E27FC236}">
+                    <a16:creationId xmlns:a16="http://schemas.microsoft.com/office/drawing/2014/main" id="{E15AC3C4-F2BD-4AAE-8051-3253D6A9CC25}"/>
+                  </a:ext>
+                </a:extLst>
+              </p:cNvPr>
+              <p:cNvGrpSpPr/>
+              <p:nvPr/>
+            </p:nvGrpSpPr>
+            <p:grpSpPr>
+              <a:xfrm>
+                <a:off x="3198285" y="355310"/>
+                <a:ext cx="7730062" cy="5580709"/>
+                <a:chOff x="3198285" y="355310"/>
+                <a:chExt cx="7730062" cy="5580709"/>
+              </a:xfrm>
+            </p:grpSpPr>
+            <p:grpSp>
+              <p:nvGrpSpPr>
+                <p:cNvPr id="13" name="Groupe 12">
+                  <a:extLst>
+                    <a:ext uri="{FF2B5EF4-FFF2-40B4-BE49-F238E27FC236}">
+                      <a16:creationId xmlns:a16="http://schemas.microsoft.com/office/drawing/2014/main" id="{8FA7A248-7FC3-4B2D-92F7-169FBE8F2955}"/>
+                    </a:ext>
+                  </a:extLst>
+                </p:cNvPr>
+                <p:cNvGrpSpPr/>
+                <p:nvPr/>
+              </p:nvGrpSpPr>
+              <p:grpSpPr>
+                <a:xfrm>
+                  <a:off x="7651747" y="4329002"/>
+                  <a:ext cx="2912026" cy="1333622"/>
+                  <a:chOff x="698499" y="343434"/>
+                  <a:chExt cx="2912026" cy="1333622"/>
+                </a:xfrm>
+              </p:grpSpPr>
+              <p:sp>
+                <p:nvSpPr>
+                  <p:cNvPr id="4" name="Rectangle 3">
+                    <a:extLst>
+                      <a:ext uri="{FF2B5EF4-FFF2-40B4-BE49-F238E27FC236}">
+                        <a16:creationId xmlns:a16="http://schemas.microsoft.com/office/drawing/2014/main" id="{A992EBD8-A7E1-44AD-8244-ED10E8F0F5D1}"/>
+                      </a:ext>
+                    </a:extLst>
+                  </p:cNvPr>
+                  <p:cNvSpPr/>
+                  <p:nvPr/>
+                </p:nvSpPr>
+                <p:spPr>
+                  <a:xfrm>
+                    <a:off x="1642531" y="796523"/>
+                    <a:ext cx="1659467" cy="880533"/>
+                  </a:xfrm>
+                  <a:prstGeom prst="rect">
+                    <a:avLst/>
+                  </a:prstGeom>
+                  <a:solidFill>
+                    <a:srgbClr val="A3A500"/>
+                  </a:solidFill>
+                  <a:ln>
+                    <a:solidFill>
+                      <a:schemeClr val="accent1">
+                        <a:lumMod val="75000"/>
+                      </a:schemeClr>
+                    </a:solidFill>
+                  </a:ln>
+                </p:spPr>
+                <p:style>
+                  <a:lnRef idx="2">
+                    <a:schemeClr val="accent5">
+                      <a:shade val="50000"/>
+                    </a:schemeClr>
+                  </a:lnRef>
+                  <a:fillRef idx="1">
+                    <a:schemeClr val="accent5"/>
+                  </a:fillRef>
+                  <a:effectRef idx="0">
+                    <a:schemeClr val="accent5"/>
+                  </a:effectRef>
+                  <a:fontRef idx="minor">
+                    <a:schemeClr val="lt1"/>
+                  </a:fontRef>
+                </p:style>
+                <p:txBody>
+                  <a:bodyPr rtlCol="0" anchor="ctr"/>
+                  <a:lstStyle/>
+                  <a:p>
+                    <a:pPr algn="ctr"/>
+                    <a:r>
+                      <a:rPr lang="fr-FR" sz="3200" dirty="0"/>
+                      <a:t>AMC</a:t>
+                    </a:r>
+                  </a:p>
+                </p:txBody>
+              </p:sp>
+              <p:cxnSp>
+                <p:nvCxnSpPr>
+                  <p:cNvPr id="6" name="Connecteur droit avec flèche 5">
+                    <a:extLst>
+                      <a:ext uri="{FF2B5EF4-FFF2-40B4-BE49-F238E27FC236}">
+                        <a16:creationId xmlns:a16="http://schemas.microsoft.com/office/drawing/2014/main" id="{1CCE6BEB-83CF-4A23-892E-0D37934134D9}"/>
+                      </a:ext>
+                    </a:extLst>
+                  </p:cNvPr>
+                  <p:cNvCxnSpPr/>
+                  <p:nvPr/>
+                </p:nvCxnSpPr>
+                <p:spPr>
+                  <a:xfrm>
+                    <a:off x="1509181" y="826156"/>
+                    <a:ext cx="0" cy="821266"/>
+                  </a:xfrm>
+                  <a:prstGeom prst="straightConnector1">
+                    <a:avLst/>
+                  </a:prstGeom>
+                  <a:ln>
+                    <a:headEnd type="triangle"/>
+                    <a:tailEnd type="triangle"/>
+                  </a:ln>
+                </p:spPr>
+                <p:style>
+                  <a:lnRef idx="1">
+                    <a:schemeClr val="accent1"/>
+                  </a:lnRef>
+                  <a:fillRef idx="0">
+                    <a:schemeClr val="accent1"/>
+                  </a:fillRef>
+                  <a:effectRef idx="0">
+                    <a:schemeClr val="accent1"/>
+                  </a:effectRef>
+                  <a:fontRef idx="minor">
+                    <a:schemeClr val="tx1"/>
+                  </a:fontRef>
+                </p:style>
+              </p:cxnSp>
+              <p:sp>
+                <p:nvSpPr>
+                  <p:cNvPr id="7" name="ZoneTexte 6">
+                    <a:extLst>
+                      <a:ext uri="{FF2B5EF4-FFF2-40B4-BE49-F238E27FC236}">
+                        <a16:creationId xmlns:a16="http://schemas.microsoft.com/office/drawing/2014/main" id="{EB67AE6F-4EE1-48A0-979B-153EF4E1F202}"/>
+                      </a:ext>
+                    </a:extLst>
+                  </p:cNvPr>
+                  <p:cNvSpPr txBox="1"/>
+                  <p:nvPr/>
+                </p:nvSpPr>
+                <p:spPr>
+                  <a:xfrm>
+                    <a:off x="698499" y="1146338"/>
+                    <a:ext cx="817031" cy="523220"/>
+                  </a:xfrm>
+                  <a:prstGeom prst="rect">
+                    <a:avLst/>
+                  </a:prstGeom>
+                  <a:noFill/>
+                </p:spPr>
+                <p:txBody>
+                  <a:bodyPr wrap="square" rtlCol="0">
+                    <a:spAutoFit/>
+                  </a:bodyPr>
+                  <a:lstStyle/>
+                  <a:p>
+                    <a:pPr algn="ctr"/>
+                    <a:r>
+                      <a:rPr lang="fr-FR" sz="1400" dirty="0">
+                        <a:latin typeface="Arial" panose="020B0604020202020204" pitchFamily="34" charset="0"/>
+                        <a:cs typeface="Arial" panose="020B0604020202020204" pitchFamily="34" charset="0"/>
+                      </a:rPr>
+                      <a:t>12 </a:t>
+                    </a:r>
+                    <a:r>
+                      <a:rPr lang="fr-FR" sz="1400" dirty="0" err="1">
+                        <a:latin typeface="Arial" panose="020B0604020202020204" pitchFamily="34" charset="0"/>
+                        <a:cs typeface="Arial" panose="020B0604020202020204" pitchFamily="34" charset="0"/>
+                      </a:rPr>
+                      <a:t>regions</a:t>
+                    </a:r>
+                    <a:endParaRPr lang="fr-FR" sz="1400" dirty="0">
+                      <a:latin typeface="Arial" panose="020B0604020202020204" pitchFamily="34" charset="0"/>
+                      <a:cs typeface="Arial" panose="020B0604020202020204" pitchFamily="34" charset="0"/>
+                    </a:endParaRPr>
+                  </a:p>
+                </p:txBody>
+              </p:sp>
+              <p:cxnSp>
+                <p:nvCxnSpPr>
+                  <p:cNvPr id="8" name="Connecteur droit avec flèche 7">
+                    <a:extLst>
+                      <a:ext uri="{FF2B5EF4-FFF2-40B4-BE49-F238E27FC236}">
+                        <a16:creationId xmlns:a16="http://schemas.microsoft.com/office/drawing/2014/main" id="{F6841A1E-B5FD-421C-A88D-FBFFC872847E}"/>
+                      </a:ext>
+                    </a:extLst>
+                  </p:cNvPr>
+                  <p:cNvCxnSpPr>
+                    <a:cxnSpLocks/>
+                  </p:cNvCxnSpPr>
+                  <p:nvPr/>
+                </p:nvCxnSpPr>
+                <p:spPr>
+                  <a:xfrm>
+                    <a:off x="1642531" y="639534"/>
+                    <a:ext cx="1659467" cy="0"/>
+                  </a:xfrm>
+                  <a:prstGeom prst="straightConnector1">
+                    <a:avLst/>
+                  </a:prstGeom>
+                  <a:ln>
+                    <a:headEnd type="triangle"/>
+                    <a:tailEnd type="triangle"/>
+                  </a:ln>
+                </p:spPr>
+                <p:style>
+                  <a:lnRef idx="1">
+                    <a:schemeClr val="accent1"/>
+                  </a:lnRef>
+                  <a:fillRef idx="0">
+                    <a:schemeClr val="accent1"/>
+                  </a:fillRef>
+                  <a:effectRef idx="0">
+                    <a:schemeClr val="accent1"/>
+                  </a:effectRef>
+                  <a:fontRef idx="minor">
+                    <a:schemeClr val="tx1"/>
+                  </a:fontRef>
+                </p:style>
+              </p:cxnSp>
+              <p:sp>
+                <p:nvSpPr>
+                  <p:cNvPr id="12" name="ZoneTexte 11">
+                    <a:extLst>
+                      <a:ext uri="{FF2B5EF4-FFF2-40B4-BE49-F238E27FC236}">
+                        <a16:creationId xmlns:a16="http://schemas.microsoft.com/office/drawing/2014/main" id="{5A5AE3FC-E219-4516-97BF-34B08481C6E7}"/>
+                      </a:ext>
+                    </a:extLst>
+                  </p:cNvPr>
+                  <p:cNvSpPr txBox="1"/>
+                  <p:nvPr/>
+                </p:nvSpPr>
+                <p:spPr>
+                  <a:xfrm>
+                    <a:off x="2053673" y="343434"/>
+                    <a:ext cx="1556852" cy="307777"/>
+                  </a:xfrm>
+                  <a:prstGeom prst="rect">
+                    <a:avLst/>
+                  </a:prstGeom>
+                  <a:noFill/>
+                </p:spPr>
+                <p:txBody>
+                  <a:bodyPr wrap="square" rtlCol="0">
+                    <a:spAutoFit/>
+                  </a:bodyPr>
+                  <a:lstStyle/>
+                  <a:p>
+                    <a:r>
+                      <a:rPr lang="fr-FR" sz="1400" dirty="0">
+                        <a:latin typeface="Arial" panose="020B0604020202020204" pitchFamily="34" charset="0"/>
+                        <a:cs typeface="Arial" panose="020B0604020202020204" pitchFamily="34" charset="0"/>
+                      </a:rPr>
+                      <a:t>  2 fPC1</a:t>
+                    </a:r>
+                  </a:p>
+                </p:txBody>
+              </p:sp>
+            </p:grpSp>
+            <p:grpSp>
+              <p:nvGrpSpPr>
+                <p:cNvPr id="14" name="Groupe 13">
+                  <a:extLst>
+                    <a:ext uri="{FF2B5EF4-FFF2-40B4-BE49-F238E27FC236}">
+                      <a16:creationId xmlns:a16="http://schemas.microsoft.com/office/drawing/2014/main" id="{01CD2FC3-B72C-406A-A028-AF99F36A7492}"/>
+                    </a:ext>
+                  </a:extLst>
+                </p:cNvPr>
+                <p:cNvGrpSpPr/>
+                <p:nvPr/>
+              </p:nvGrpSpPr>
+              <p:grpSpPr>
+                <a:xfrm>
+                  <a:off x="3747518" y="355310"/>
+                  <a:ext cx="3057565" cy="1300608"/>
+                  <a:chOff x="246551" y="324992"/>
+                  <a:chExt cx="3057565" cy="1300608"/>
+                </a:xfrm>
+              </p:grpSpPr>
+              <p:sp>
+                <p:nvSpPr>
+                  <p:cNvPr id="15" name="Rectangle 14">
+                    <a:extLst>
+                      <a:ext uri="{FF2B5EF4-FFF2-40B4-BE49-F238E27FC236}">
+                        <a16:creationId xmlns:a16="http://schemas.microsoft.com/office/drawing/2014/main" id="{1A0C2064-6A4C-4691-9C1F-4AF6ECF3E904}"/>
+                      </a:ext>
+                    </a:extLst>
+                  </p:cNvPr>
+                  <p:cNvSpPr/>
+                  <p:nvPr/>
+                </p:nvSpPr>
+                <p:spPr>
+                  <a:xfrm>
+                    <a:off x="1193800" y="745067"/>
+                    <a:ext cx="1659466" cy="880533"/>
+                  </a:xfrm>
+                  <a:prstGeom prst="rect">
+                    <a:avLst/>
+                  </a:prstGeom>
+                  <a:solidFill>
+                    <a:srgbClr val="00B0F6"/>
+                  </a:solidFill>
+                  <a:ln>
+                    <a:solidFill>
+                      <a:schemeClr val="accent1">
+                        <a:lumMod val="75000"/>
+                      </a:schemeClr>
+                    </a:solidFill>
+                  </a:ln>
+                </p:spPr>
+                <p:style>
+                  <a:lnRef idx="2">
+                    <a:schemeClr val="accent5">
+                      <a:shade val="50000"/>
+                    </a:schemeClr>
+                  </a:lnRef>
+                  <a:fillRef idx="1">
+                    <a:schemeClr val="accent5"/>
+                  </a:fillRef>
+                  <a:effectRef idx="0">
+                    <a:schemeClr val="accent5"/>
+                  </a:effectRef>
+                  <a:fontRef idx="minor">
+                    <a:schemeClr val="lt1"/>
+                  </a:fontRef>
+                </p:style>
+                <p:txBody>
+                  <a:bodyPr rtlCol="0" anchor="ctr"/>
+                  <a:lstStyle/>
+                  <a:p>
+                    <a:pPr algn="ctr"/>
+                    <a:r>
+                      <a:rPr lang="fr-FR" sz="3200" dirty="0"/>
+                      <a:t>Animals</a:t>
+                    </a:r>
+                  </a:p>
+                </p:txBody>
+              </p:sp>
+              <p:cxnSp>
+                <p:nvCxnSpPr>
+                  <p:cNvPr id="16" name="Connecteur droit avec flèche 15">
+                    <a:extLst>
+                      <a:ext uri="{FF2B5EF4-FFF2-40B4-BE49-F238E27FC236}">
+                        <a16:creationId xmlns:a16="http://schemas.microsoft.com/office/drawing/2014/main" id="{8DCCD066-A17B-4729-B96B-9B814A7F2EEE}"/>
+                      </a:ext>
+                    </a:extLst>
+                  </p:cNvPr>
+                  <p:cNvCxnSpPr/>
+                  <p:nvPr/>
+                </p:nvCxnSpPr>
+                <p:spPr>
+                  <a:xfrm>
+                    <a:off x="1016000" y="745067"/>
+                    <a:ext cx="0" cy="821266"/>
+                  </a:xfrm>
+                  <a:prstGeom prst="straightConnector1">
+                    <a:avLst/>
+                  </a:prstGeom>
+                  <a:ln>
+                    <a:headEnd type="triangle"/>
+                    <a:tailEnd type="triangle"/>
+                  </a:ln>
+                </p:spPr>
+                <p:style>
+                  <a:lnRef idx="1">
+                    <a:schemeClr val="accent1"/>
+                  </a:lnRef>
+                  <a:fillRef idx="0">
+                    <a:schemeClr val="accent1"/>
+                  </a:fillRef>
+                  <a:effectRef idx="0">
+                    <a:schemeClr val="accent1"/>
+                  </a:effectRef>
+                  <a:fontRef idx="minor">
+                    <a:schemeClr val="tx1"/>
+                  </a:fontRef>
+                </p:style>
+              </p:cxnSp>
+              <p:sp>
+                <p:nvSpPr>
+                  <p:cNvPr id="17" name="ZoneTexte 16">
+                    <a:extLst>
+                      <a:ext uri="{FF2B5EF4-FFF2-40B4-BE49-F238E27FC236}">
+                        <a16:creationId xmlns:a16="http://schemas.microsoft.com/office/drawing/2014/main" id="{DF24B1BC-32B2-4473-8BDF-0E2AC86AA40D}"/>
+                      </a:ext>
+                    </a:extLst>
+                  </p:cNvPr>
+                  <p:cNvSpPr txBox="1"/>
+                  <p:nvPr/>
+                </p:nvSpPr>
+                <p:spPr>
+                  <a:xfrm>
+                    <a:off x="246551" y="974823"/>
+                    <a:ext cx="769449" cy="523220"/>
+                  </a:xfrm>
+                  <a:prstGeom prst="rect">
+                    <a:avLst/>
+                  </a:prstGeom>
+                  <a:noFill/>
+                </p:spPr>
+                <p:txBody>
+                  <a:bodyPr wrap="square" rtlCol="0">
+                    <a:spAutoFit/>
+                  </a:bodyPr>
+                  <a:lstStyle/>
+                  <a:p>
+                    <a:pPr algn="ctr"/>
+                    <a:r>
+                      <a:rPr lang="fr-FR" sz="1400" dirty="0">
+                        <a:latin typeface="Arial" panose="020B0604020202020204" pitchFamily="34" charset="0"/>
+                        <a:cs typeface="Arial" panose="020B0604020202020204" pitchFamily="34" charset="0"/>
+                      </a:rPr>
+                      <a:t>12 </a:t>
+                    </a:r>
+                    <a:r>
+                      <a:rPr lang="fr-FR" sz="1400" dirty="0" err="1">
+                        <a:latin typeface="Arial" panose="020B0604020202020204" pitchFamily="34" charset="0"/>
+                        <a:cs typeface="Arial" panose="020B0604020202020204" pitchFamily="34" charset="0"/>
+                      </a:rPr>
+                      <a:t>regions</a:t>
+                    </a:r>
+                    <a:endParaRPr lang="fr-FR" sz="1400" dirty="0">
+                      <a:latin typeface="Arial" panose="020B0604020202020204" pitchFamily="34" charset="0"/>
+                      <a:cs typeface="Arial" panose="020B0604020202020204" pitchFamily="34" charset="0"/>
+                    </a:endParaRPr>
+                  </a:p>
+                </p:txBody>
+              </p:sp>
+              <p:cxnSp>
+                <p:nvCxnSpPr>
+                  <p:cNvPr id="18" name="Connecteur droit avec flèche 17">
+                    <a:extLst>
+                      <a:ext uri="{FF2B5EF4-FFF2-40B4-BE49-F238E27FC236}">
+                        <a16:creationId xmlns:a16="http://schemas.microsoft.com/office/drawing/2014/main" id="{A9A21EDF-20DA-443C-B3BB-94EE1CBD5D7F}"/>
+                      </a:ext>
+                    </a:extLst>
+                  </p:cNvPr>
+                  <p:cNvCxnSpPr>
+                    <a:cxnSpLocks/>
+                  </p:cNvCxnSpPr>
+                  <p:nvPr/>
+                </p:nvCxnSpPr>
+                <p:spPr>
+                  <a:xfrm>
+                    <a:off x="1193800" y="592667"/>
+                    <a:ext cx="1659467" cy="0"/>
+                  </a:xfrm>
+                  <a:prstGeom prst="straightConnector1">
+                    <a:avLst/>
+                  </a:prstGeom>
+                  <a:ln>
+                    <a:headEnd type="triangle"/>
+                    <a:tailEnd type="triangle"/>
+                  </a:ln>
+                </p:spPr>
+                <p:style>
+                  <a:lnRef idx="1">
+                    <a:schemeClr val="accent1"/>
+                  </a:lnRef>
+                  <a:fillRef idx="0">
+                    <a:schemeClr val="accent1"/>
+                  </a:fillRef>
+                  <a:effectRef idx="0">
+                    <a:schemeClr val="accent1"/>
+                  </a:effectRef>
+                  <a:fontRef idx="minor">
+                    <a:schemeClr val="tx1"/>
+                  </a:fontRef>
+                </p:style>
+              </p:cxnSp>
+              <p:sp>
+                <p:nvSpPr>
+                  <p:cNvPr id="19" name="ZoneTexte 18">
+                    <a:extLst>
+                      <a:ext uri="{FF2B5EF4-FFF2-40B4-BE49-F238E27FC236}">
+                        <a16:creationId xmlns:a16="http://schemas.microsoft.com/office/drawing/2014/main" id="{24F942E7-77C6-41D5-80C5-4A51D8C705B2}"/>
+                      </a:ext>
+                    </a:extLst>
+                  </p:cNvPr>
+                  <p:cNvSpPr txBox="1"/>
+                  <p:nvPr/>
+                </p:nvSpPr>
+                <p:spPr>
+                  <a:xfrm>
+                    <a:off x="1386415" y="324992"/>
+                    <a:ext cx="1917701" cy="307777"/>
+                  </a:xfrm>
+                  <a:prstGeom prst="rect">
+                    <a:avLst/>
+                  </a:prstGeom>
+                  <a:noFill/>
+                </p:spPr>
+                <p:txBody>
+                  <a:bodyPr wrap="square" rtlCol="0">
+                    <a:spAutoFit/>
+                  </a:bodyPr>
+                  <a:lstStyle/>
+                  <a:p>
+                    <a:r>
+                      <a:rPr lang="fr-FR" sz="900" dirty="0">
+                        <a:latin typeface="Arial" panose="020B0604020202020204" pitchFamily="34" charset="0"/>
+                        <a:cs typeface="Arial" panose="020B0604020202020204" pitchFamily="34" charset="0"/>
+                      </a:rPr>
+                      <a:t> </a:t>
+                    </a:r>
+                    <a:r>
+                      <a:rPr lang="fr-FR" sz="1400" dirty="0">
+                        <a:latin typeface="Arial" panose="020B0604020202020204" pitchFamily="34" charset="0"/>
+                        <a:cs typeface="Arial" panose="020B0604020202020204" pitchFamily="34" charset="0"/>
+                      </a:rPr>
+                      <a:t> 4 fPC1</a:t>
+                    </a:r>
+                    <a:endParaRPr lang="fr-FR" sz="900" dirty="0">
+                      <a:latin typeface="Arial" panose="020B0604020202020204" pitchFamily="34" charset="0"/>
+                      <a:cs typeface="Arial" panose="020B0604020202020204" pitchFamily="34" charset="0"/>
+                    </a:endParaRPr>
+                  </a:p>
+                </p:txBody>
+              </p:sp>
+            </p:grpSp>
+            <p:grpSp>
+              <p:nvGrpSpPr>
+                <p:cNvPr id="33" name="Groupe 32">
+                  <a:extLst>
+                    <a:ext uri="{FF2B5EF4-FFF2-40B4-BE49-F238E27FC236}">
+                      <a16:creationId xmlns:a16="http://schemas.microsoft.com/office/drawing/2014/main" id="{B744D23B-2E94-47F7-96A7-4BA7E6FB0089}"/>
+                    </a:ext>
+                  </a:extLst>
+                </p:cNvPr>
+                <p:cNvGrpSpPr/>
+                <p:nvPr/>
+              </p:nvGrpSpPr>
+              <p:grpSpPr>
+                <a:xfrm>
+                  <a:off x="3358602" y="4587922"/>
+                  <a:ext cx="3865579" cy="1348097"/>
+                  <a:chOff x="-231265" y="277503"/>
+                  <a:chExt cx="3865579" cy="1348097"/>
+                </a:xfrm>
+              </p:grpSpPr>
+              <p:sp>
+                <p:nvSpPr>
+                  <p:cNvPr id="34" name="Rectangle 33">
+                    <a:extLst>
+                      <a:ext uri="{FF2B5EF4-FFF2-40B4-BE49-F238E27FC236}">
+                        <a16:creationId xmlns:a16="http://schemas.microsoft.com/office/drawing/2014/main" id="{E7ABEB32-5092-4FCF-BF63-D0B007B38D7B}"/>
+                      </a:ext>
+                    </a:extLst>
+                  </p:cNvPr>
+                  <p:cNvSpPr/>
+                  <p:nvPr/>
+                </p:nvSpPr>
+                <p:spPr>
+                  <a:xfrm>
+                    <a:off x="863600" y="745067"/>
+                    <a:ext cx="2770714" cy="880533"/>
+                  </a:xfrm>
+                  <a:prstGeom prst="rect">
+                    <a:avLst/>
+                  </a:prstGeom>
+                  <a:solidFill>
+                    <a:srgbClr val="00BF7D"/>
+                  </a:solidFill>
+                  <a:ln>
+                    <a:solidFill>
+                      <a:schemeClr val="accent1">
+                        <a:lumMod val="75000"/>
+                      </a:schemeClr>
+                    </a:solidFill>
+                  </a:ln>
+                </p:spPr>
+                <p:style>
+                  <a:lnRef idx="2">
+                    <a:schemeClr val="accent5">
+                      <a:shade val="50000"/>
+                    </a:schemeClr>
+                  </a:lnRef>
+                  <a:fillRef idx="1">
+                    <a:schemeClr val="accent5"/>
+                  </a:fillRef>
+                  <a:effectRef idx="0">
+                    <a:schemeClr val="accent5"/>
+                  </a:effectRef>
+                  <a:fontRef idx="minor">
+                    <a:schemeClr val="lt1"/>
+                  </a:fontRef>
+                </p:style>
+                <p:txBody>
+                  <a:bodyPr rtlCol="0" anchor="ctr"/>
+                  <a:lstStyle/>
+                  <a:p>
+                    <a:pPr algn="ctr"/>
+                    <a:r>
+                      <a:rPr lang="fr-FR" sz="3200" dirty="0"/>
+                      <a:t>Environnement</a:t>
+                    </a:r>
+                  </a:p>
+                </p:txBody>
+              </p:sp>
+              <p:cxnSp>
+                <p:nvCxnSpPr>
+                  <p:cNvPr id="35" name="Connecteur droit avec flèche 34">
+                    <a:extLst>
+                      <a:ext uri="{FF2B5EF4-FFF2-40B4-BE49-F238E27FC236}">
+                        <a16:creationId xmlns:a16="http://schemas.microsoft.com/office/drawing/2014/main" id="{497DCD8A-A1A8-48BB-8426-10C4F231FD9E}"/>
+                      </a:ext>
+                    </a:extLst>
+                  </p:cNvPr>
+                  <p:cNvCxnSpPr/>
+                  <p:nvPr/>
+                </p:nvCxnSpPr>
+                <p:spPr>
+                  <a:xfrm>
+                    <a:off x="635551" y="774700"/>
+                    <a:ext cx="0" cy="821266"/>
+                  </a:xfrm>
+                  <a:prstGeom prst="straightConnector1">
+                    <a:avLst/>
+                  </a:prstGeom>
+                  <a:ln>
+                    <a:headEnd type="triangle"/>
+                    <a:tailEnd type="triangle"/>
+                  </a:ln>
+                </p:spPr>
+                <p:style>
+                  <a:lnRef idx="1">
+                    <a:schemeClr val="accent1"/>
+                  </a:lnRef>
+                  <a:fillRef idx="0">
+                    <a:schemeClr val="accent1"/>
+                  </a:fillRef>
+                  <a:effectRef idx="0">
+                    <a:schemeClr val="accent1"/>
+                  </a:effectRef>
+                  <a:fontRef idx="minor">
+                    <a:schemeClr val="tx1"/>
+                  </a:fontRef>
+                </p:style>
+              </p:cxnSp>
+              <p:sp>
+                <p:nvSpPr>
+                  <p:cNvPr id="36" name="ZoneTexte 35">
+                    <a:extLst>
+                      <a:ext uri="{FF2B5EF4-FFF2-40B4-BE49-F238E27FC236}">
+                        <a16:creationId xmlns:a16="http://schemas.microsoft.com/office/drawing/2014/main" id="{041529AD-512E-41E1-AC44-DD17CB7DDF2F}"/>
+                      </a:ext>
+                    </a:extLst>
+                  </p:cNvPr>
+                  <p:cNvSpPr txBox="1"/>
+                  <p:nvPr/>
+                </p:nvSpPr>
+                <p:spPr>
+                  <a:xfrm>
+                    <a:off x="-231265" y="923723"/>
+                    <a:ext cx="858349" cy="523220"/>
+                  </a:xfrm>
+                  <a:prstGeom prst="rect">
+                    <a:avLst/>
+                  </a:prstGeom>
+                  <a:noFill/>
+                </p:spPr>
+                <p:txBody>
+                  <a:bodyPr wrap="square" rtlCol="0">
+                    <a:spAutoFit/>
+                  </a:bodyPr>
+                  <a:lstStyle/>
+                  <a:p>
+                    <a:pPr algn="ctr"/>
+                    <a:r>
+                      <a:rPr lang="fr-FR" sz="1400" dirty="0">
+                        <a:latin typeface="Arial" panose="020B0604020202020204" pitchFamily="34" charset="0"/>
+                        <a:cs typeface="Arial" panose="020B0604020202020204" pitchFamily="34" charset="0"/>
+                      </a:rPr>
+                      <a:t>12 </a:t>
+                    </a:r>
+                    <a:r>
+                      <a:rPr lang="fr-FR" sz="1400" dirty="0" err="1">
+                        <a:latin typeface="Arial" panose="020B0604020202020204" pitchFamily="34" charset="0"/>
+                        <a:cs typeface="Arial" panose="020B0604020202020204" pitchFamily="34" charset="0"/>
+                      </a:rPr>
+                      <a:t>regions</a:t>
+                    </a:r>
+                    <a:endParaRPr lang="fr-FR" sz="1400" dirty="0">
+                      <a:latin typeface="Arial" panose="020B0604020202020204" pitchFamily="34" charset="0"/>
+                      <a:cs typeface="Arial" panose="020B0604020202020204" pitchFamily="34" charset="0"/>
+                    </a:endParaRPr>
+                  </a:p>
+                </p:txBody>
+              </p:sp>
+              <p:cxnSp>
+                <p:nvCxnSpPr>
+                  <p:cNvPr id="37" name="Connecteur droit avec flèche 36">
+                    <a:extLst>
+                      <a:ext uri="{FF2B5EF4-FFF2-40B4-BE49-F238E27FC236}">
+                        <a16:creationId xmlns:a16="http://schemas.microsoft.com/office/drawing/2014/main" id="{ECA53E8D-6A3F-421D-87CA-AAC798F82B86}"/>
+                      </a:ext>
+                    </a:extLst>
+                  </p:cNvPr>
+                  <p:cNvCxnSpPr>
+                    <a:cxnSpLocks/>
+                  </p:cNvCxnSpPr>
+                  <p:nvPr/>
+                </p:nvCxnSpPr>
+                <p:spPr>
+                  <a:xfrm>
+                    <a:off x="863600" y="592667"/>
+                    <a:ext cx="2770714" cy="0"/>
+                  </a:xfrm>
+                  <a:prstGeom prst="straightConnector1">
+                    <a:avLst/>
+                  </a:prstGeom>
+                  <a:ln>
+                    <a:headEnd type="triangle"/>
+                    <a:tailEnd type="triangle"/>
+                  </a:ln>
+                </p:spPr>
+                <p:style>
+                  <a:lnRef idx="1">
+                    <a:schemeClr val="accent1"/>
+                  </a:lnRef>
+                  <a:fillRef idx="0">
+                    <a:schemeClr val="accent1"/>
+                  </a:fillRef>
+                  <a:effectRef idx="0">
+                    <a:schemeClr val="accent1"/>
+                  </a:effectRef>
+                  <a:fontRef idx="minor">
+                    <a:schemeClr val="tx1"/>
+                  </a:fontRef>
+                </p:style>
+              </p:cxnSp>
+              <p:sp>
+                <p:nvSpPr>
+                  <p:cNvPr id="38" name="ZoneTexte 37">
+                    <a:extLst>
+                      <a:ext uri="{FF2B5EF4-FFF2-40B4-BE49-F238E27FC236}">
+                        <a16:creationId xmlns:a16="http://schemas.microsoft.com/office/drawing/2014/main" id="{9ACF325C-B7E2-4AF5-968E-3C71B3EBB07D}"/>
+                      </a:ext>
+                    </a:extLst>
+                  </p:cNvPr>
+                  <p:cNvSpPr txBox="1"/>
+                  <p:nvPr/>
+                </p:nvSpPr>
+                <p:spPr>
+                  <a:xfrm>
+                    <a:off x="1985474" y="277503"/>
+                    <a:ext cx="1143000" cy="307777"/>
+                  </a:xfrm>
+                  <a:prstGeom prst="rect">
+                    <a:avLst/>
+                  </a:prstGeom>
+                  <a:noFill/>
+                </p:spPr>
+                <p:txBody>
+                  <a:bodyPr wrap="square" rtlCol="0">
+                    <a:spAutoFit/>
+                  </a:bodyPr>
+                  <a:lstStyle/>
+                  <a:p>
+                    <a:r>
+                      <a:rPr lang="fr-FR" sz="900" dirty="0">
+                        <a:latin typeface="Arial" panose="020B0604020202020204" pitchFamily="34" charset="0"/>
+                        <a:cs typeface="Arial" panose="020B0604020202020204" pitchFamily="34" charset="0"/>
+                      </a:rPr>
+                      <a:t> </a:t>
+                    </a:r>
+                    <a:r>
+                      <a:rPr lang="fr-FR" sz="1400" dirty="0">
+                        <a:latin typeface="Arial" panose="020B0604020202020204" pitchFamily="34" charset="0"/>
+                        <a:cs typeface="Arial" panose="020B0604020202020204" pitchFamily="34" charset="0"/>
+                      </a:rPr>
+                      <a:t> 2 fPC1</a:t>
+                    </a:r>
+                    <a:endParaRPr lang="fr-FR" sz="900" dirty="0">
+                      <a:latin typeface="Arial" panose="020B0604020202020204" pitchFamily="34" charset="0"/>
+                      <a:cs typeface="Arial" panose="020B0604020202020204" pitchFamily="34" charset="0"/>
+                    </a:endParaRPr>
+                  </a:p>
+                </p:txBody>
+              </p:sp>
+            </p:grpSp>
+            <p:sp>
+              <p:nvSpPr>
+                <p:cNvPr id="55" name="Ellipse 54">
+                  <a:extLst>
+                    <a:ext uri="{FF2B5EF4-FFF2-40B4-BE49-F238E27FC236}">
+                      <a16:creationId xmlns:a16="http://schemas.microsoft.com/office/drawing/2014/main" id="{74A41B7F-8B14-4868-99CF-8907F89937AE}"/>
+                    </a:ext>
+                  </a:extLst>
+                </p:cNvPr>
+                <p:cNvSpPr/>
+                <p:nvPr/>
+              </p:nvSpPr>
+              <p:spPr>
+                <a:xfrm>
+                  <a:off x="5202767" y="2152553"/>
+                  <a:ext cx="643466" cy="558798"/>
+                </a:xfrm>
+                <a:prstGeom prst="ellipse">
+                  <a:avLst/>
+                </a:prstGeom>
+                <a:solidFill>
+                  <a:schemeClr val="bg2"/>
+                </a:solidFill>
+                <a:ln>
+                  <a:solidFill>
+                    <a:schemeClr val="tx1"/>
+                  </a:solidFill>
+                </a:ln>
+              </p:spPr>
+              <p:style>
+                <a:lnRef idx="2">
+                  <a:schemeClr val="accent3">
+                    <a:shade val="50000"/>
+                  </a:schemeClr>
+                </a:lnRef>
+                <a:fillRef idx="1">
+                  <a:schemeClr val="accent3"/>
+                </a:fillRef>
+                <a:effectRef idx="0">
+                  <a:schemeClr val="accent3"/>
+                </a:effectRef>
+                <a:fontRef idx="minor">
+                  <a:schemeClr val="lt1"/>
+                </a:fontRef>
+              </p:style>
+              <p:txBody>
+                <a:bodyPr rtlCol="0" anchor="ctr"/>
+                <a:lstStyle/>
+                <a:p>
+                  <a:pPr algn="ctr"/>
+                  <a:r>
+                    <a:rPr lang="fr-FR" sz="2800" dirty="0">
+                      <a:solidFill>
+                        <a:schemeClr val="tx1"/>
+                      </a:solidFill>
+                    </a:rPr>
+                    <a:t>t</a:t>
+                  </a:r>
+                  <a:r>
+                    <a:rPr lang="fr-FR" sz="2800" baseline="-25000" dirty="0">
+                      <a:solidFill>
+                        <a:schemeClr val="tx1"/>
+                      </a:solidFill>
+                    </a:rPr>
+                    <a:t>2</a:t>
+                  </a:r>
+                </a:p>
+              </p:txBody>
+            </p:sp>
+            <p:sp>
+              <p:nvSpPr>
+                <p:cNvPr id="56" name="Ellipse 55">
+                  <a:extLst>
+                    <a:ext uri="{FF2B5EF4-FFF2-40B4-BE49-F238E27FC236}">
+                      <a16:creationId xmlns:a16="http://schemas.microsoft.com/office/drawing/2014/main" id="{89B56BEC-32A7-401A-9A46-9877A785C0F8}"/>
+                    </a:ext>
+                  </a:extLst>
+                </p:cNvPr>
+                <p:cNvSpPr/>
+                <p:nvPr/>
+              </p:nvSpPr>
+              <p:spPr>
+                <a:xfrm>
+                  <a:off x="3198285" y="3076302"/>
+                  <a:ext cx="643466" cy="558798"/>
+                </a:xfrm>
+                <a:prstGeom prst="ellipse">
+                  <a:avLst/>
+                </a:prstGeom>
+                <a:solidFill>
+                  <a:schemeClr val="bg2"/>
+                </a:solidFill>
+                <a:ln>
+                  <a:solidFill>
+                    <a:schemeClr val="tx1"/>
+                  </a:solidFill>
+                </a:ln>
+              </p:spPr>
+              <p:style>
+                <a:lnRef idx="2">
+                  <a:schemeClr val="accent3">
+                    <a:shade val="50000"/>
+                  </a:schemeClr>
+                </a:lnRef>
+                <a:fillRef idx="1">
+                  <a:schemeClr val="accent3"/>
+                </a:fillRef>
+                <a:effectRef idx="0">
+                  <a:schemeClr val="accent3"/>
+                </a:effectRef>
+                <a:fontRef idx="minor">
+                  <a:schemeClr val="lt1"/>
+                </a:fontRef>
+              </p:style>
+              <p:txBody>
+                <a:bodyPr rtlCol="0" anchor="ctr"/>
+                <a:lstStyle/>
+                <a:p>
+                  <a:pPr algn="ctr"/>
+                  <a:r>
+                    <a:rPr lang="fr-FR" sz="2800" dirty="0">
+                      <a:solidFill>
+                        <a:schemeClr val="tx1"/>
+                      </a:solidFill>
+                    </a:rPr>
+                    <a:t>t</a:t>
+                  </a:r>
+                  <a:r>
+                    <a:rPr lang="fr-FR" sz="2800" baseline="-25000" dirty="0">
+                      <a:solidFill>
+                        <a:schemeClr val="tx1"/>
+                      </a:solidFill>
+                    </a:rPr>
+                    <a:t>4</a:t>
+                  </a:r>
+                </a:p>
+              </p:txBody>
+            </p:sp>
+            <p:grpSp>
+              <p:nvGrpSpPr>
+                <p:cNvPr id="60" name="Groupe 59">
+                  <a:extLst>
+                    <a:ext uri="{FF2B5EF4-FFF2-40B4-BE49-F238E27FC236}">
+                      <a16:creationId xmlns:a16="http://schemas.microsoft.com/office/drawing/2014/main" id="{FDCA1811-6CFC-4654-8487-35124C8C3764}"/>
+                    </a:ext>
+                  </a:extLst>
+                </p:cNvPr>
+                <p:cNvGrpSpPr/>
+                <p:nvPr/>
+              </p:nvGrpSpPr>
+              <p:grpSpPr>
+                <a:xfrm>
+                  <a:off x="9059332" y="1632143"/>
+                  <a:ext cx="1869015" cy="1344248"/>
+                  <a:chOff x="289985" y="281352"/>
+                  <a:chExt cx="1869015" cy="1344248"/>
+                </a:xfrm>
+              </p:grpSpPr>
+              <p:sp>
+                <p:nvSpPr>
+                  <p:cNvPr id="61" name="Rectangle 60">
+                    <a:extLst>
+                      <a:ext uri="{FF2B5EF4-FFF2-40B4-BE49-F238E27FC236}">
+                        <a16:creationId xmlns:a16="http://schemas.microsoft.com/office/drawing/2014/main" id="{37E09C4B-2FA3-4D73-A1BA-DC779677F558}"/>
+                      </a:ext>
+                    </a:extLst>
+                  </p:cNvPr>
+                  <p:cNvSpPr/>
+                  <p:nvPr/>
+                </p:nvSpPr>
+                <p:spPr>
+                  <a:xfrm>
+                    <a:off x="1193800" y="745067"/>
+                    <a:ext cx="529167" cy="880533"/>
+                  </a:xfrm>
+                  <a:prstGeom prst="rect">
+                    <a:avLst/>
+                  </a:prstGeom>
+                  <a:solidFill>
+                    <a:srgbClr val="F8766D"/>
+                  </a:solidFill>
+                  <a:ln/>
+                </p:spPr>
+                <p:style>
+                  <a:lnRef idx="2">
+                    <a:schemeClr val="accent2"/>
+                  </a:lnRef>
+                  <a:fillRef idx="1">
+                    <a:schemeClr val="lt1"/>
+                  </a:fillRef>
+                  <a:effectRef idx="0">
+                    <a:schemeClr val="accent2"/>
+                  </a:effectRef>
+                  <a:fontRef idx="minor">
+                    <a:schemeClr val="dk1"/>
+                  </a:fontRef>
+                </p:style>
+                <p:txBody>
+                  <a:bodyPr rtlCol="0" anchor="ctr"/>
+                  <a:lstStyle/>
+                  <a:p>
+                    <a:pPr algn="ctr"/>
+                    <a:r>
+                      <a:rPr lang="fr-FR" sz="3200" dirty="0"/>
+                      <a:t>Y</a:t>
+                    </a:r>
+                  </a:p>
+                </p:txBody>
+              </p:sp>
+              <p:cxnSp>
+                <p:nvCxnSpPr>
+                  <p:cNvPr id="62" name="Connecteur droit avec flèche 61">
+                    <a:extLst>
+                      <a:ext uri="{FF2B5EF4-FFF2-40B4-BE49-F238E27FC236}">
+                        <a16:creationId xmlns:a16="http://schemas.microsoft.com/office/drawing/2014/main" id="{E12D763A-03B0-440C-A97F-B619A2E669E6}"/>
+                      </a:ext>
+                    </a:extLst>
+                  </p:cNvPr>
+                  <p:cNvCxnSpPr/>
+                  <p:nvPr/>
+                </p:nvCxnSpPr>
+                <p:spPr>
+                  <a:xfrm>
+                    <a:off x="1016000" y="745067"/>
+                    <a:ext cx="0" cy="821266"/>
+                  </a:xfrm>
+                  <a:prstGeom prst="straightConnector1">
+                    <a:avLst/>
+                  </a:prstGeom>
+                  <a:ln>
+                    <a:headEnd type="triangle"/>
+                    <a:tailEnd type="triangle"/>
+                  </a:ln>
+                </p:spPr>
+                <p:style>
+                  <a:lnRef idx="1">
+                    <a:schemeClr val="accent1"/>
+                  </a:lnRef>
+                  <a:fillRef idx="0">
+                    <a:schemeClr val="accent1"/>
+                  </a:fillRef>
+                  <a:effectRef idx="0">
+                    <a:schemeClr val="accent1"/>
+                  </a:effectRef>
+                  <a:fontRef idx="minor">
+                    <a:schemeClr val="tx1"/>
+                  </a:fontRef>
+                </p:style>
+              </p:cxnSp>
+              <p:sp>
+                <p:nvSpPr>
+                  <p:cNvPr id="63" name="ZoneTexte 62">
+                    <a:extLst>
+                      <a:ext uri="{FF2B5EF4-FFF2-40B4-BE49-F238E27FC236}">
+                        <a16:creationId xmlns:a16="http://schemas.microsoft.com/office/drawing/2014/main" id="{967EAD35-89EE-4B20-AD20-08F5793FF116}"/>
+                      </a:ext>
+                    </a:extLst>
+                  </p:cNvPr>
+                  <p:cNvSpPr txBox="1"/>
+                  <p:nvPr/>
+                </p:nvSpPr>
+                <p:spPr>
+                  <a:xfrm>
+                    <a:off x="289985" y="872591"/>
+                    <a:ext cx="814915" cy="523220"/>
+                  </a:xfrm>
+                  <a:prstGeom prst="rect">
+                    <a:avLst/>
+                  </a:prstGeom>
+                  <a:noFill/>
+                </p:spPr>
+                <p:txBody>
+                  <a:bodyPr wrap="square" rtlCol="0">
+                    <a:spAutoFit/>
+                  </a:bodyPr>
+                  <a:lstStyle/>
+                  <a:p>
+                    <a:pPr algn="ctr"/>
+                    <a:r>
+                      <a:rPr lang="fr-FR" sz="1400" dirty="0">
+                        <a:latin typeface="Arial" panose="020B0604020202020204" pitchFamily="34" charset="0"/>
+                        <a:cs typeface="Arial" panose="020B0604020202020204" pitchFamily="34" charset="0"/>
+                      </a:rPr>
+                      <a:t>12 </a:t>
+                    </a:r>
+                    <a:r>
+                      <a:rPr lang="fr-FR" sz="1400" dirty="0" err="1">
+                        <a:latin typeface="Arial" panose="020B0604020202020204" pitchFamily="34" charset="0"/>
+                        <a:cs typeface="Arial" panose="020B0604020202020204" pitchFamily="34" charset="0"/>
+                      </a:rPr>
+                      <a:t>regions</a:t>
+                    </a:r>
+                    <a:endParaRPr lang="fr-FR" sz="900" dirty="0">
+                      <a:latin typeface="Arial" panose="020B0604020202020204" pitchFamily="34" charset="0"/>
+                      <a:cs typeface="Arial" panose="020B0604020202020204" pitchFamily="34" charset="0"/>
+                    </a:endParaRPr>
+                  </a:p>
+                </p:txBody>
+              </p:sp>
+              <p:cxnSp>
+                <p:nvCxnSpPr>
+                  <p:cNvPr id="64" name="Connecteur droit avec flèche 63">
+                    <a:extLst>
+                      <a:ext uri="{FF2B5EF4-FFF2-40B4-BE49-F238E27FC236}">
+                        <a16:creationId xmlns:a16="http://schemas.microsoft.com/office/drawing/2014/main" id="{EE032EF4-A1DC-4DAF-A752-EFFBCF8E5108}"/>
+                      </a:ext>
+                    </a:extLst>
+                  </p:cNvPr>
+                  <p:cNvCxnSpPr>
+                    <a:cxnSpLocks/>
+                  </p:cNvCxnSpPr>
+                  <p:nvPr/>
+                </p:nvCxnSpPr>
+                <p:spPr>
+                  <a:xfrm>
+                    <a:off x="1193800" y="592667"/>
+                    <a:ext cx="529167" cy="0"/>
+                  </a:xfrm>
+                  <a:prstGeom prst="straightConnector1">
+                    <a:avLst/>
+                  </a:prstGeom>
+                  <a:ln>
+                    <a:headEnd type="triangle"/>
+                    <a:tailEnd type="triangle"/>
+                  </a:ln>
+                </p:spPr>
+                <p:style>
+                  <a:lnRef idx="1">
+                    <a:schemeClr val="accent1"/>
+                  </a:lnRef>
+                  <a:fillRef idx="0">
+                    <a:schemeClr val="accent1"/>
+                  </a:fillRef>
+                  <a:effectRef idx="0">
+                    <a:schemeClr val="accent1"/>
+                  </a:effectRef>
+                  <a:fontRef idx="minor">
+                    <a:schemeClr val="tx1"/>
+                  </a:fontRef>
+                </p:style>
+              </p:cxnSp>
+              <p:sp>
+                <p:nvSpPr>
+                  <p:cNvPr id="65" name="ZoneTexte 64">
+                    <a:extLst>
+                      <a:ext uri="{FF2B5EF4-FFF2-40B4-BE49-F238E27FC236}">
+                        <a16:creationId xmlns:a16="http://schemas.microsoft.com/office/drawing/2014/main" id="{489AD634-96B9-4903-B1A4-7391D77279AC}"/>
+                      </a:ext>
+                    </a:extLst>
+                  </p:cNvPr>
+                  <p:cNvSpPr txBox="1"/>
+                  <p:nvPr/>
+                </p:nvSpPr>
+                <p:spPr>
+                  <a:xfrm>
+                    <a:off x="1016000" y="281352"/>
+                    <a:ext cx="1143000" cy="307777"/>
+                  </a:xfrm>
+                  <a:prstGeom prst="rect">
+                    <a:avLst/>
+                  </a:prstGeom>
+                  <a:noFill/>
+                </p:spPr>
+                <p:txBody>
+                  <a:bodyPr wrap="square" rtlCol="0">
+                    <a:spAutoFit/>
+                  </a:bodyPr>
+                  <a:lstStyle/>
+                  <a:p>
+                    <a:r>
+                      <a:rPr lang="fr-FR" sz="900" dirty="0">
+                        <a:latin typeface="Arial" panose="020B0604020202020204" pitchFamily="34" charset="0"/>
+                        <a:cs typeface="Arial" panose="020B0604020202020204" pitchFamily="34" charset="0"/>
+                      </a:rPr>
+                      <a:t> </a:t>
+                    </a:r>
+                    <a:r>
+                      <a:rPr lang="fr-FR" sz="1400" dirty="0">
+                        <a:latin typeface="Arial" panose="020B0604020202020204" pitchFamily="34" charset="0"/>
+                        <a:cs typeface="Arial" panose="020B0604020202020204" pitchFamily="34" charset="0"/>
+                      </a:rPr>
+                      <a:t> 1 fPC1</a:t>
+                    </a:r>
+                    <a:endParaRPr lang="fr-FR" sz="900" dirty="0">
+                      <a:latin typeface="Arial" panose="020B0604020202020204" pitchFamily="34" charset="0"/>
+                      <a:cs typeface="Arial" panose="020B0604020202020204" pitchFamily="34" charset="0"/>
+                    </a:endParaRPr>
+                  </a:p>
+                </p:txBody>
+              </p:sp>
+            </p:grpSp>
+            <p:sp>
+              <p:nvSpPr>
+                <p:cNvPr id="83" name="Ellipse 82">
+                  <a:extLst>
+                    <a:ext uri="{FF2B5EF4-FFF2-40B4-BE49-F238E27FC236}">
+                      <a16:creationId xmlns:a16="http://schemas.microsoft.com/office/drawing/2014/main" id="{C1842BC6-A26B-41CC-9940-91F9885286AD}"/>
+                    </a:ext>
+                  </a:extLst>
+                </p:cNvPr>
+                <p:cNvSpPr/>
+                <p:nvPr/>
+              </p:nvSpPr>
+              <p:spPr>
+                <a:xfrm>
+                  <a:off x="5202767" y="3939906"/>
+                  <a:ext cx="643466" cy="558798"/>
+                </a:xfrm>
+                <a:prstGeom prst="ellipse">
+                  <a:avLst/>
+                </a:prstGeom>
+                <a:solidFill>
+                  <a:schemeClr val="bg2"/>
+                </a:solidFill>
+                <a:ln>
+                  <a:solidFill>
+                    <a:schemeClr val="tx1"/>
+                  </a:solidFill>
+                </a:ln>
+              </p:spPr>
+              <p:style>
+                <a:lnRef idx="2">
+                  <a:schemeClr val="accent3">
+                    <a:shade val="50000"/>
+                  </a:schemeClr>
+                </a:lnRef>
+                <a:fillRef idx="1">
+                  <a:schemeClr val="accent3"/>
+                </a:fillRef>
+                <a:effectRef idx="0">
+                  <a:schemeClr val="accent3"/>
+                </a:effectRef>
+                <a:fontRef idx="minor">
+                  <a:schemeClr val="lt1"/>
+                </a:fontRef>
+              </p:style>
+              <p:txBody>
+                <a:bodyPr rtlCol="0" anchor="ctr"/>
+                <a:lstStyle/>
+                <a:p>
+                  <a:pPr algn="ctr"/>
+                  <a:r>
+                    <a:rPr lang="fr-FR" sz="2800" dirty="0">
+                      <a:solidFill>
+                        <a:schemeClr val="tx1"/>
+                      </a:solidFill>
+                    </a:rPr>
+                    <a:t>t</a:t>
+                  </a:r>
+                  <a:r>
+                    <a:rPr lang="fr-FR" sz="2800" baseline="-25000" dirty="0">
+                      <a:solidFill>
+                        <a:schemeClr val="tx1"/>
+                      </a:solidFill>
+                    </a:rPr>
+                    <a:t>3</a:t>
+                  </a:r>
+                </a:p>
+              </p:txBody>
+            </p:sp>
+            <p:sp>
+              <p:nvSpPr>
+                <p:cNvPr id="86" name="Ellipse 85">
+                  <a:extLst>
+                    <a:ext uri="{FF2B5EF4-FFF2-40B4-BE49-F238E27FC236}">
+                      <a16:creationId xmlns:a16="http://schemas.microsoft.com/office/drawing/2014/main" id="{A614A312-4AE6-4A69-8B72-B20545BF2321}"/>
+                    </a:ext>
+                  </a:extLst>
+                </p:cNvPr>
+                <p:cNvSpPr/>
+                <p:nvPr/>
+              </p:nvSpPr>
+              <p:spPr>
+                <a:xfrm>
+                  <a:off x="8147048" y="3465767"/>
+                  <a:ext cx="643466" cy="558798"/>
+                </a:xfrm>
+                <a:prstGeom prst="ellipse">
+                  <a:avLst/>
+                </a:prstGeom>
+                <a:solidFill>
+                  <a:schemeClr val="bg2"/>
+                </a:solidFill>
+                <a:ln>
+                  <a:solidFill>
+                    <a:schemeClr val="tx1"/>
+                  </a:solidFill>
+                </a:ln>
+              </p:spPr>
+              <p:style>
+                <a:lnRef idx="2">
+                  <a:schemeClr val="accent3">
+                    <a:shade val="50000"/>
+                  </a:schemeClr>
+                </a:lnRef>
+                <a:fillRef idx="1">
+                  <a:schemeClr val="accent3"/>
+                </a:fillRef>
+                <a:effectRef idx="0">
+                  <a:schemeClr val="accent3"/>
+                </a:effectRef>
+                <a:fontRef idx="minor">
+                  <a:schemeClr val="lt1"/>
+                </a:fontRef>
+              </p:style>
+              <p:txBody>
+                <a:bodyPr rtlCol="0" anchor="ctr"/>
+                <a:lstStyle/>
+                <a:p>
+                  <a:pPr algn="ctr"/>
+                  <a:r>
+                    <a:rPr lang="fr-FR" sz="2800" dirty="0">
+                      <a:solidFill>
+                        <a:schemeClr val="tx1"/>
+                      </a:solidFill>
+                    </a:rPr>
+                    <a:t>t</a:t>
+                  </a:r>
+                  <a:r>
+                    <a:rPr lang="fr-FR" sz="2800" baseline="-25000" dirty="0">
+                      <a:solidFill>
+                        <a:schemeClr val="tx1"/>
+                      </a:solidFill>
+                    </a:rPr>
+                    <a:t>1</a:t>
+                  </a:r>
+                </a:p>
+              </p:txBody>
+            </p:sp>
+            <p:cxnSp>
+              <p:nvCxnSpPr>
+                <p:cNvPr id="101" name="Connecteur droit avec flèche 100">
+                  <a:extLst>
+                    <a:ext uri="{FF2B5EF4-FFF2-40B4-BE49-F238E27FC236}">
+                      <a16:creationId xmlns:a16="http://schemas.microsoft.com/office/drawing/2014/main" id="{6D6723AA-2943-4961-9FD5-220254AAEDD0}"/>
+                    </a:ext>
+                  </a:extLst>
+                </p:cNvPr>
+                <p:cNvCxnSpPr>
+                  <a:cxnSpLocks/>
+                  <a:stCxn id="56" idx="6"/>
+                  <a:endCxn id="86" idx="2"/>
+                </p:cNvCxnSpPr>
+                <p:nvPr/>
+              </p:nvCxnSpPr>
+              <p:spPr>
+                <a:xfrm>
+                  <a:off x="3841751" y="3355701"/>
+                  <a:ext cx="4305297" cy="389465"/>
+                </a:xfrm>
+                <a:prstGeom prst="straightConnector1">
+                  <a:avLst/>
+                </a:prstGeom>
+                <a:ln>
+                  <a:tailEnd type="triangle"/>
+                </a:ln>
+              </p:spPr>
+              <p:style>
+                <a:lnRef idx="1">
+                  <a:schemeClr val="dk1"/>
+                </a:lnRef>
+                <a:fillRef idx="0">
+                  <a:schemeClr val="dk1"/>
+                </a:fillRef>
+                <a:effectRef idx="0">
+                  <a:schemeClr val="dk1"/>
+                </a:effectRef>
+                <a:fontRef idx="minor">
+                  <a:schemeClr val="tx1"/>
+                </a:fontRef>
+              </p:style>
+            </p:cxnSp>
+            <p:cxnSp>
+              <p:nvCxnSpPr>
+                <p:cNvPr id="104" name="Connecteur droit avec flèche 103">
+                  <a:extLst>
+                    <a:ext uri="{FF2B5EF4-FFF2-40B4-BE49-F238E27FC236}">
+                      <a16:creationId xmlns:a16="http://schemas.microsoft.com/office/drawing/2014/main" id="{4F173E60-0876-487C-A09D-58F4FD00B860}"/>
+                    </a:ext>
+                  </a:extLst>
+                </p:cNvPr>
+                <p:cNvCxnSpPr>
+                  <a:cxnSpLocks/>
+                  <a:stCxn id="83" idx="6"/>
+                  <a:endCxn id="86" idx="3"/>
+                </p:cNvCxnSpPr>
+                <p:nvPr/>
+              </p:nvCxnSpPr>
+              <p:spPr>
+                <a:xfrm flipV="1">
+                  <a:off x="5846233" y="3942731"/>
+                  <a:ext cx="2395048" cy="276574"/>
+                </a:xfrm>
+                <a:prstGeom prst="straightConnector1">
+                  <a:avLst/>
+                </a:prstGeom>
+                <a:ln>
+                  <a:tailEnd type="triangle"/>
+                </a:ln>
+              </p:spPr>
+              <p:style>
+                <a:lnRef idx="1">
+                  <a:schemeClr val="dk1"/>
+                </a:lnRef>
+                <a:fillRef idx="0">
+                  <a:schemeClr val="dk1"/>
+                </a:fillRef>
+                <a:effectRef idx="0">
+                  <a:schemeClr val="dk1"/>
+                </a:effectRef>
+                <a:fontRef idx="minor">
+                  <a:schemeClr val="tx1"/>
+                </a:fontRef>
+              </p:style>
+            </p:cxnSp>
+            <p:cxnSp>
+              <p:nvCxnSpPr>
+                <p:cNvPr id="105" name="Connecteur droit avec flèche 104">
+                  <a:extLst>
+                    <a:ext uri="{FF2B5EF4-FFF2-40B4-BE49-F238E27FC236}">
+                      <a16:creationId xmlns:a16="http://schemas.microsoft.com/office/drawing/2014/main" id="{535EA614-6159-464F-AC2B-AFB341605941}"/>
+                    </a:ext>
+                  </a:extLst>
+                </p:cNvPr>
+                <p:cNvCxnSpPr>
+                  <a:cxnSpLocks/>
+                  <a:stCxn id="86" idx="0"/>
+                  <a:endCxn id="112" idx="4"/>
+                </p:cNvCxnSpPr>
+                <p:nvPr/>
+              </p:nvCxnSpPr>
+              <p:spPr>
+                <a:xfrm flipV="1">
+                  <a:off x="8468781" y="2777001"/>
+                  <a:ext cx="249766" cy="688766"/>
+                </a:xfrm>
+                <a:prstGeom prst="straightConnector1">
+                  <a:avLst/>
+                </a:prstGeom>
+                <a:ln>
+                  <a:tailEnd type="triangle"/>
+                </a:ln>
+              </p:spPr>
+              <p:style>
+                <a:lnRef idx="1">
+                  <a:schemeClr val="dk1"/>
+                </a:lnRef>
+                <a:fillRef idx="0">
+                  <a:schemeClr val="dk1"/>
+                </a:fillRef>
+                <a:effectRef idx="0">
+                  <a:schemeClr val="dk1"/>
+                </a:effectRef>
+                <a:fontRef idx="minor">
+                  <a:schemeClr val="tx1"/>
+                </a:fontRef>
+              </p:style>
+            </p:cxnSp>
+            <p:sp>
+              <p:nvSpPr>
+                <p:cNvPr id="112" name="Ellipse 111">
+                  <a:extLst>
+                    <a:ext uri="{FF2B5EF4-FFF2-40B4-BE49-F238E27FC236}">
+                      <a16:creationId xmlns:a16="http://schemas.microsoft.com/office/drawing/2014/main" id="{493842CD-0665-4A27-9432-1B5D4CD35AA8}"/>
+                    </a:ext>
+                  </a:extLst>
+                </p:cNvPr>
+                <p:cNvSpPr/>
+                <p:nvPr/>
+              </p:nvSpPr>
+              <p:spPr>
+                <a:xfrm>
+                  <a:off x="8396814" y="2218203"/>
+                  <a:ext cx="643466" cy="558798"/>
+                </a:xfrm>
+                <a:prstGeom prst="ellipse">
+                  <a:avLst/>
+                </a:prstGeom>
+                <a:solidFill>
+                  <a:schemeClr val="bg2"/>
+                </a:solidFill>
+                <a:ln>
+                  <a:solidFill>
+                    <a:schemeClr val="tx1"/>
+                  </a:solidFill>
+                </a:ln>
+              </p:spPr>
+              <p:style>
+                <a:lnRef idx="2">
+                  <a:schemeClr val="accent3">
+                    <a:shade val="50000"/>
+                  </a:schemeClr>
+                </a:lnRef>
+                <a:fillRef idx="1">
+                  <a:schemeClr val="accent3"/>
+                </a:fillRef>
+                <a:effectRef idx="0">
+                  <a:schemeClr val="accent3"/>
+                </a:effectRef>
+                <a:fontRef idx="minor">
+                  <a:schemeClr val="lt1"/>
+                </a:fontRef>
+              </p:style>
+              <p:txBody>
+                <a:bodyPr rtlCol="0" anchor="ctr"/>
+                <a:lstStyle/>
+                <a:p>
+                  <a:pPr algn="ctr"/>
+                  <a:r>
+                    <a:rPr lang="fr-FR" sz="2800" dirty="0" err="1">
+                      <a:solidFill>
+                        <a:schemeClr val="tx1"/>
+                      </a:solidFill>
+                    </a:rPr>
+                    <a:t>t</a:t>
+                  </a:r>
+                  <a:r>
+                    <a:rPr lang="fr-FR" sz="2800" baseline="-25000" dirty="0" err="1">
+                      <a:solidFill>
+                        <a:schemeClr val="tx1"/>
+                      </a:solidFill>
+                    </a:rPr>
+                    <a:t>y</a:t>
+                  </a:r>
+                  <a:endParaRPr lang="fr-FR" sz="2800" baseline="-25000" dirty="0">
+                    <a:solidFill>
+                      <a:schemeClr val="tx1"/>
+                    </a:solidFill>
+                  </a:endParaRPr>
+                </a:p>
+              </p:txBody>
+            </p:sp>
+            <p:cxnSp>
+              <p:nvCxnSpPr>
+                <p:cNvPr id="115" name="Connecteur droit avec flèche 114">
+                  <a:extLst>
+                    <a:ext uri="{FF2B5EF4-FFF2-40B4-BE49-F238E27FC236}">
+                      <a16:creationId xmlns:a16="http://schemas.microsoft.com/office/drawing/2014/main" id="{C55FE631-DE36-4001-953D-547F103476B8}"/>
+                    </a:ext>
+                  </a:extLst>
+                </p:cNvPr>
+                <p:cNvCxnSpPr>
+                  <a:cxnSpLocks/>
+                  <a:stCxn id="55" idx="7"/>
+                  <a:endCxn id="112" idx="2"/>
+                </p:cNvCxnSpPr>
+                <p:nvPr/>
+              </p:nvCxnSpPr>
+              <p:spPr>
+                <a:xfrm>
+                  <a:off x="5752000" y="2234387"/>
+                  <a:ext cx="2644814" cy="263215"/>
+                </a:xfrm>
+                <a:prstGeom prst="straightConnector1">
+                  <a:avLst/>
+                </a:prstGeom>
+                <a:ln>
+                  <a:tailEnd type="triangle"/>
+                </a:ln>
+              </p:spPr>
+              <p:style>
+                <a:lnRef idx="1">
+                  <a:schemeClr val="dk1"/>
+                </a:lnRef>
+                <a:fillRef idx="0">
+                  <a:schemeClr val="dk1"/>
+                </a:fillRef>
+                <a:effectRef idx="0">
+                  <a:schemeClr val="dk1"/>
+                </a:effectRef>
+                <a:fontRef idx="minor">
+                  <a:schemeClr val="tx1"/>
+                </a:fontRef>
+              </p:style>
+            </p:cxnSp>
+            <p:cxnSp>
+              <p:nvCxnSpPr>
+                <p:cNvPr id="119" name="Connecteur droit avec flèche 118">
+                  <a:extLst>
+                    <a:ext uri="{FF2B5EF4-FFF2-40B4-BE49-F238E27FC236}">
+                      <a16:creationId xmlns:a16="http://schemas.microsoft.com/office/drawing/2014/main" id="{22B5DE84-1C10-45BC-BAEB-F2A2D97E6B8A}"/>
+                    </a:ext>
+                  </a:extLst>
+                </p:cNvPr>
+                <p:cNvCxnSpPr>
+                  <a:cxnSpLocks/>
+                  <a:stCxn id="56" idx="6"/>
+                </p:cNvCxnSpPr>
+                <p:nvPr/>
+              </p:nvCxnSpPr>
+              <p:spPr>
+                <a:xfrm flipV="1">
+                  <a:off x="3841751" y="2692227"/>
+                  <a:ext cx="4654546" cy="663474"/>
+                </a:xfrm>
+                <a:prstGeom prst="straightConnector1">
+                  <a:avLst/>
+                </a:prstGeom>
+                <a:ln>
+                  <a:tailEnd type="triangle"/>
+                </a:ln>
+              </p:spPr>
+              <p:style>
+                <a:lnRef idx="1">
+                  <a:schemeClr val="dk1"/>
+                </a:lnRef>
+                <a:fillRef idx="0">
+                  <a:schemeClr val="dk1"/>
+                </a:fillRef>
+                <a:effectRef idx="0">
+                  <a:schemeClr val="dk1"/>
+                </a:effectRef>
+                <a:fontRef idx="minor">
+                  <a:schemeClr val="tx1"/>
+                </a:fontRef>
+              </p:style>
+            </p:cxnSp>
+            <p:cxnSp>
+              <p:nvCxnSpPr>
+                <p:cNvPr id="122" name="Connecteur droit avec flèche 121">
+                  <a:extLst>
+                    <a:ext uri="{FF2B5EF4-FFF2-40B4-BE49-F238E27FC236}">
+                      <a16:creationId xmlns:a16="http://schemas.microsoft.com/office/drawing/2014/main" id="{6A96B123-4EE6-4AEA-9FBE-4ACC354255C2}"/>
+                    </a:ext>
+                  </a:extLst>
+                </p:cNvPr>
+                <p:cNvCxnSpPr>
+                  <a:cxnSpLocks/>
+                  <a:stCxn id="83" idx="7"/>
+                  <a:endCxn id="112" idx="3"/>
+                </p:cNvCxnSpPr>
+                <p:nvPr/>
+              </p:nvCxnSpPr>
+              <p:spPr>
+                <a:xfrm flipV="1">
+                  <a:off x="5752000" y="2695167"/>
+                  <a:ext cx="2739047" cy="1326573"/>
+                </a:xfrm>
+                <a:prstGeom prst="straightConnector1">
+                  <a:avLst/>
+                </a:prstGeom>
+                <a:ln>
+                  <a:tailEnd type="triangle"/>
+                </a:ln>
+              </p:spPr>
+              <p:style>
+                <a:lnRef idx="1">
+                  <a:schemeClr val="dk1"/>
+                </a:lnRef>
+                <a:fillRef idx="0">
+                  <a:schemeClr val="dk1"/>
+                </a:fillRef>
+                <a:effectRef idx="0">
+                  <a:schemeClr val="dk1"/>
+                </a:effectRef>
+                <a:fontRef idx="minor">
+                  <a:schemeClr val="tx1"/>
+                </a:fontRef>
+              </p:style>
+            </p:cxnSp>
+          </p:grpSp>
+        </p:grpSp>
+        <p:cxnSp>
+          <p:nvCxnSpPr>
+            <p:cNvPr id="10" name="Connecteur droit avec flèche 9">
+              <a:extLst>
+                <a:ext uri="{FF2B5EF4-FFF2-40B4-BE49-F238E27FC236}">
+                  <a16:creationId xmlns:a16="http://schemas.microsoft.com/office/drawing/2014/main" id="{F3837C4B-EF0F-4E06-82E7-4ECCC3ED23F7}"/>
+                </a:ext>
+              </a:extLst>
+            </p:cNvPr>
+            <p:cNvCxnSpPr>
+              <a:stCxn id="56" idx="0"/>
+              <a:endCxn id="55" idx="2"/>
+            </p:cNvCxnSpPr>
             <p:nvPr/>
           </p:nvCxnSpPr>
           <p:spPr>
-            <a:xfrm>
-              <a:off x="1016000" y="745067"/>
-              <a:ext cx="0" cy="821266"/>
+            <a:xfrm flipV="1">
+              <a:off x="3520018" y="2431952"/>
+              <a:ext cx="1682749" cy="644350"/>
             </a:xfrm>
             <a:prstGeom prst="straightConnector1">
               <a:avLst/>
             </a:prstGeom>
             <a:ln>
-              <a:headEnd type="triangle"/>
               <a:tailEnd type="triangle"/>
             </a:ln>
           </p:spPr>
           <p:style>
             <a:lnRef idx="1">
-              <a:schemeClr val="accent1"/>
+              <a:schemeClr val="dk1"/>
             </a:lnRef>
             <a:fillRef idx="0">
-              <a:schemeClr val="accent1"/>
+              <a:schemeClr val="dk1"/>
             </a:fillRef>
             <a:effectRef idx="0">
-              <a:schemeClr val="accent1"/>
+              <a:schemeClr val="dk1"/>
             </a:effectRef>
             <a:fontRef idx="minor">
               <a:schemeClr val="tx1"/>
             </a:fontRef>
           </p:style>
         </p:cxnSp>
-        <p:sp>
-          <p:nvSpPr>
-            <p:cNvPr id="7" name="ZoneTexte 6">
+        <p:cxnSp>
+          <p:nvCxnSpPr>
+            <p:cNvPr id="20" name="Connecteur droit avec flèche 19">
               <a:extLst>
                 <a:ext uri="{FF2B5EF4-FFF2-40B4-BE49-F238E27FC236}">
-                  <a16:creationId xmlns:a16="http://schemas.microsoft.com/office/drawing/2014/main" id="{EB67AE6F-4EE1-48A0-979B-153EF4E1F202}"/>
+                  <a16:creationId xmlns:a16="http://schemas.microsoft.com/office/drawing/2014/main" id="{C76F8430-8FE8-4A8E-B9E3-55CC544E2A39}"/>
                 </a:ext>
               </a:extLst>
             </p:cNvPr>
-            <p:cNvSpPr txBox="1"/>
+            <p:cNvCxnSpPr>
+              <a:stCxn id="55" idx="3"/>
+              <a:endCxn id="56" idx="7"/>
+            </p:cNvCxnSpPr>
             <p:nvPr/>
-          </p:nvSpPr>
+          </p:nvCxnSpPr>
+          <p:spPr>
+            <a:xfrm flipH="1">
+              <a:off x="3747518" y="2629517"/>
+              <a:ext cx="1549482" cy="528619"/>
+            </a:xfrm>
+            <a:prstGeom prst="straightConnector1">
+              <a:avLst/>
+            </a:prstGeom>
+            <a:ln>
+              <a:tailEnd type="triangle"/>
+            </a:ln>
+          </p:spPr>
+          <p:style>
+            <a:lnRef idx="1">
+              <a:schemeClr val="dk1"/>
+            </a:lnRef>
+            <a:fillRef idx="0">
+              <a:schemeClr val="dk1"/>
+            </a:fillRef>
+            <a:effectRef idx="0">
+              <a:schemeClr val="dk1"/>
+            </a:effectRef>
+            <a:fontRef idx="minor">
+              <a:schemeClr val="tx1"/>
+            </a:fontRef>
+          </p:style>
+        </p:cxnSp>
+        <p:cxnSp>
+          <p:nvCxnSpPr>
+            <p:cNvPr id="22" name="Connecteur droit avec flèche 21">
+              <a:extLst>
+                <a:ext uri="{FF2B5EF4-FFF2-40B4-BE49-F238E27FC236}">
+                  <a16:creationId xmlns:a16="http://schemas.microsoft.com/office/drawing/2014/main" id="{336756FC-FCB2-4490-8690-356296E3CF66}"/>
+                </a:ext>
+              </a:extLst>
+            </p:cNvPr>
+            <p:cNvCxnSpPr>
+              <a:stCxn id="55" idx="4"/>
+              <a:endCxn id="83" idx="0"/>
+            </p:cNvCxnSpPr>
+            <p:nvPr/>
+          </p:nvCxnSpPr>
           <p:spPr>
             <a:xfrm>
-              <a:off x="270934" y="1069917"/>
-              <a:ext cx="745066" cy="230832"/>
+              <a:off x="5524500" y="2711351"/>
+              <a:ext cx="0" cy="1228555"/>
             </a:xfrm>
-            <a:prstGeom prst="rect">
+            <a:prstGeom prst="straightConnector1">
               <a:avLst/>
             </a:prstGeom>
-            <a:noFill/>
+            <a:ln>
+              <a:tailEnd type="triangle"/>
+            </a:ln>
           </p:spPr>
-          <p:txBody>
-            <a:bodyPr wrap="square" rtlCol="0">
-              <a:spAutoFit/>
-            </a:bodyPr>
-            <a:lstStyle/>
-            <a:p>
-              <a:r>
-                <a:rPr lang="fr-FR" sz="900" dirty="0">
-                  <a:latin typeface="Arial" panose="020B0604020202020204" pitchFamily="34" charset="0"/>
-                  <a:cs typeface="Arial" panose="020B0604020202020204" pitchFamily="34" charset="0"/>
-                </a:rPr>
-                <a:t>12 régions</a:t>
-              </a:r>
-            </a:p>
-          </p:txBody>
-        </p:sp>
+          <p:style>
+            <a:lnRef idx="1">
+              <a:schemeClr val="dk1"/>
+            </a:lnRef>
+            <a:fillRef idx="0">
+              <a:schemeClr val="dk1"/>
+            </a:fillRef>
+            <a:effectRef idx="0">
+              <a:schemeClr val="dk1"/>
+            </a:effectRef>
+            <a:fontRef idx="minor">
+              <a:schemeClr val="tx1"/>
+            </a:fontRef>
+          </p:style>
+        </p:cxnSp>
         <p:cxnSp>
           <p:nvCxnSpPr>
-            <p:cNvPr id="8" name="Connecteur droit avec flèche 7">
+            <p:cNvPr id="24" name="Connecteur droit avec flèche 23">
               <a:extLst>
                 <a:ext uri="{FF2B5EF4-FFF2-40B4-BE49-F238E27FC236}">
-                  <a16:creationId xmlns:a16="http://schemas.microsoft.com/office/drawing/2014/main" id="{F6841A1E-B5FD-421C-A88D-FBFFC872847E}"/>
+                  <a16:creationId xmlns:a16="http://schemas.microsoft.com/office/drawing/2014/main" id="{8A228844-DE5E-43D8-A7DE-DF032FAA7F41}"/>
+                </a:ext>
+              </a:extLst>
+            </p:cNvPr>
+            <p:cNvCxnSpPr>
+              <a:stCxn id="83" idx="1"/>
+              <a:endCxn id="55" idx="3"/>
+            </p:cNvCxnSpPr>
+            <p:nvPr/>
+          </p:nvCxnSpPr>
+          <p:spPr>
+            <a:xfrm flipV="1">
+              <a:off x="5297000" y="2629517"/>
+              <a:ext cx="0" cy="1392223"/>
+            </a:xfrm>
+            <a:prstGeom prst="straightConnector1">
+              <a:avLst/>
+            </a:prstGeom>
+            <a:ln>
+              <a:tailEnd type="triangle"/>
+            </a:ln>
+          </p:spPr>
+          <p:style>
+            <a:lnRef idx="1">
+              <a:schemeClr val="dk1"/>
+            </a:lnRef>
+            <a:fillRef idx="0">
+              <a:schemeClr val="dk1"/>
+            </a:fillRef>
+            <a:effectRef idx="0">
+              <a:schemeClr val="dk1"/>
+            </a:effectRef>
+            <a:fontRef idx="minor">
+              <a:schemeClr val="tx1"/>
+            </a:fontRef>
+          </p:style>
+        </p:cxnSp>
+        <p:cxnSp>
+          <p:nvCxnSpPr>
+            <p:cNvPr id="26" name="Connecteur droit avec flèche 25">
+              <a:extLst>
+                <a:ext uri="{FF2B5EF4-FFF2-40B4-BE49-F238E27FC236}">
+                  <a16:creationId xmlns:a16="http://schemas.microsoft.com/office/drawing/2014/main" id="{45A9A7C0-CABE-4D22-8DA2-F0ACEDBFA7DA}"/>
+                </a:ext>
+              </a:extLst>
+            </p:cNvPr>
+            <p:cNvCxnSpPr>
+              <a:stCxn id="56" idx="5"/>
+              <a:endCxn id="83" idx="2"/>
+            </p:cNvCxnSpPr>
+            <p:nvPr/>
+          </p:nvCxnSpPr>
+          <p:spPr>
+            <a:xfrm>
+              <a:off x="3747518" y="3553266"/>
+              <a:ext cx="1455249" cy="666039"/>
+            </a:xfrm>
+            <a:prstGeom prst="straightConnector1">
+              <a:avLst/>
+            </a:prstGeom>
+            <a:ln>
+              <a:tailEnd type="triangle"/>
+            </a:ln>
+          </p:spPr>
+          <p:style>
+            <a:lnRef idx="1">
+              <a:schemeClr val="dk1"/>
+            </a:lnRef>
+            <a:fillRef idx="0">
+              <a:schemeClr val="dk1"/>
+            </a:fillRef>
+            <a:effectRef idx="0">
+              <a:schemeClr val="dk1"/>
+            </a:effectRef>
+            <a:fontRef idx="minor">
+              <a:schemeClr val="tx1"/>
+            </a:fontRef>
+          </p:style>
+        </p:cxnSp>
+        <p:cxnSp>
+          <p:nvCxnSpPr>
+            <p:cNvPr id="28" name="Connecteur droit avec flèche 27">
+              <a:extLst>
+                <a:ext uri="{FF2B5EF4-FFF2-40B4-BE49-F238E27FC236}">
+                  <a16:creationId xmlns:a16="http://schemas.microsoft.com/office/drawing/2014/main" id="{CB2B12AE-421E-43AA-994C-1B3B6B2A93F2}"/>
+                </a:ext>
+              </a:extLst>
+            </p:cNvPr>
+            <p:cNvCxnSpPr>
+              <a:stCxn id="83" idx="1"/>
+              <a:endCxn id="56" idx="6"/>
+            </p:cNvCxnSpPr>
+            <p:nvPr/>
+          </p:nvCxnSpPr>
+          <p:spPr>
+            <a:xfrm flipH="1" flipV="1">
+              <a:off x="3841751" y="3355701"/>
+              <a:ext cx="1455249" cy="666039"/>
+            </a:xfrm>
+            <a:prstGeom prst="straightConnector1">
+              <a:avLst/>
+            </a:prstGeom>
+            <a:ln>
+              <a:tailEnd type="triangle"/>
+            </a:ln>
+          </p:spPr>
+          <p:style>
+            <a:lnRef idx="1">
+              <a:schemeClr val="dk1"/>
+            </a:lnRef>
+            <a:fillRef idx="0">
+              <a:schemeClr val="dk1"/>
+            </a:fillRef>
+            <a:effectRef idx="0">
+              <a:schemeClr val="dk1"/>
+            </a:effectRef>
+            <a:fontRef idx="minor">
+              <a:schemeClr val="tx1"/>
+            </a:fontRef>
+          </p:style>
+        </p:cxnSp>
+        <p:cxnSp>
+          <p:nvCxnSpPr>
+            <p:cNvPr id="46" name="Connecteur droit avec flèche 45">
+              <a:extLst>
+                <a:ext uri="{FF2B5EF4-FFF2-40B4-BE49-F238E27FC236}">
+                  <a16:creationId xmlns:a16="http://schemas.microsoft.com/office/drawing/2014/main" id="{86F673A2-3DC1-4D60-83AE-D0293555EF0B}"/>
+                </a:ext>
+              </a:extLst>
+            </p:cNvPr>
+            <p:cNvCxnSpPr>
+              <a:endCxn id="56" idx="3"/>
+            </p:cNvCxnSpPr>
+            <p:nvPr/>
+          </p:nvCxnSpPr>
+          <p:spPr>
+            <a:xfrm flipV="1">
+              <a:off x="2688167" y="3553266"/>
+              <a:ext cx="604351" cy="81834"/>
+            </a:xfrm>
+            <a:prstGeom prst="straightConnector1">
+              <a:avLst/>
+            </a:prstGeom>
+            <a:ln>
+              <a:prstDash val="dashDot"/>
+              <a:tailEnd type="triangle"/>
+            </a:ln>
+          </p:spPr>
+          <p:style>
+            <a:lnRef idx="1">
+              <a:schemeClr val="dk1"/>
+            </a:lnRef>
+            <a:fillRef idx="0">
+              <a:schemeClr val="dk1"/>
+            </a:fillRef>
+            <a:effectRef idx="0">
+              <a:schemeClr val="dk1"/>
+            </a:effectRef>
+            <a:fontRef idx="minor">
+              <a:schemeClr val="tx1"/>
+            </a:fontRef>
+          </p:style>
+        </p:cxnSp>
+        <p:cxnSp>
+          <p:nvCxnSpPr>
+            <p:cNvPr id="48" name="Connecteur droit avec flèche 47">
+              <a:extLst>
+                <a:ext uri="{FF2B5EF4-FFF2-40B4-BE49-F238E27FC236}">
+                  <a16:creationId xmlns:a16="http://schemas.microsoft.com/office/drawing/2014/main" id="{8CBD54D4-0B9A-4B76-8180-AE1ECF8F08A5}"/>
+                </a:ext>
+              </a:extLst>
+            </p:cNvPr>
+            <p:cNvCxnSpPr>
+              <a:stCxn id="15" idx="2"/>
+              <a:endCxn id="55" idx="0"/>
+            </p:cNvCxnSpPr>
+            <p:nvPr/>
+          </p:nvCxnSpPr>
+          <p:spPr>
+            <a:xfrm>
+              <a:off x="5524500" y="1655918"/>
+              <a:ext cx="0" cy="496635"/>
+            </a:xfrm>
+            <a:prstGeom prst="straightConnector1">
+              <a:avLst/>
+            </a:prstGeom>
+            <a:ln>
+              <a:prstDash val="dashDot"/>
+              <a:tailEnd type="triangle"/>
+            </a:ln>
+          </p:spPr>
+          <p:style>
+            <a:lnRef idx="1">
+              <a:schemeClr val="dk1"/>
+            </a:lnRef>
+            <a:fillRef idx="0">
+              <a:schemeClr val="dk1"/>
+            </a:fillRef>
+            <a:effectRef idx="0">
+              <a:schemeClr val="dk1"/>
+            </a:effectRef>
+            <a:fontRef idx="minor">
+              <a:schemeClr val="tx1"/>
+            </a:fontRef>
+          </p:style>
+        </p:cxnSp>
+        <p:cxnSp>
+          <p:nvCxnSpPr>
+            <p:cNvPr id="73" name="Connecteur droit avec flèche 72">
+              <a:extLst>
+                <a:ext uri="{FF2B5EF4-FFF2-40B4-BE49-F238E27FC236}">
+                  <a16:creationId xmlns:a16="http://schemas.microsoft.com/office/drawing/2014/main" id="{F2DAB3C4-02AE-4CFA-8AD2-53CCA6EB1DF9}"/>
+                </a:ext>
+              </a:extLst>
+            </p:cNvPr>
+            <p:cNvCxnSpPr>
+              <a:cxnSpLocks/>
+              <a:endCxn id="83" idx="4"/>
+            </p:cNvCxnSpPr>
+            <p:nvPr/>
+          </p:nvCxnSpPr>
+          <p:spPr>
+            <a:xfrm flipV="1">
+              <a:off x="5524500" y="4498704"/>
+              <a:ext cx="0" cy="556782"/>
+            </a:xfrm>
+            <a:prstGeom prst="straightConnector1">
+              <a:avLst/>
+            </a:prstGeom>
+            <a:ln>
+              <a:prstDash val="dashDot"/>
+              <a:tailEnd type="triangle"/>
+            </a:ln>
+          </p:spPr>
+          <p:style>
+            <a:lnRef idx="1">
+              <a:schemeClr val="dk1"/>
+            </a:lnRef>
+            <a:fillRef idx="0">
+              <a:schemeClr val="dk1"/>
+            </a:fillRef>
+            <a:effectRef idx="0">
+              <a:schemeClr val="dk1"/>
+            </a:effectRef>
+            <a:fontRef idx="minor">
+              <a:schemeClr val="tx1"/>
+            </a:fontRef>
+          </p:style>
+        </p:cxnSp>
+        <p:cxnSp>
+          <p:nvCxnSpPr>
+            <p:cNvPr id="75" name="Connecteur droit avec flèche 74">
+              <a:extLst>
+                <a:ext uri="{FF2B5EF4-FFF2-40B4-BE49-F238E27FC236}">
+                  <a16:creationId xmlns:a16="http://schemas.microsoft.com/office/drawing/2014/main" id="{A1435939-3328-4DAD-A42D-9312EA26A3DE}"/>
+                </a:ext>
+              </a:extLst>
+            </p:cNvPr>
+            <p:cNvCxnSpPr>
+              <a:cxnSpLocks/>
+              <a:endCxn id="86" idx="5"/>
+            </p:cNvCxnSpPr>
+            <p:nvPr/>
+          </p:nvCxnSpPr>
+          <p:spPr>
+            <a:xfrm flipH="1" flipV="1">
+              <a:off x="8696281" y="3942731"/>
+              <a:ext cx="595374" cy="828334"/>
+            </a:xfrm>
+            <a:prstGeom prst="straightConnector1">
+              <a:avLst/>
+            </a:prstGeom>
+            <a:ln>
+              <a:prstDash val="dashDot"/>
+              <a:tailEnd type="triangle"/>
+            </a:ln>
+          </p:spPr>
+          <p:style>
+            <a:lnRef idx="1">
+              <a:schemeClr val="dk1"/>
+            </a:lnRef>
+            <a:fillRef idx="0">
+              <a:schemeClr val="dk1"/>
+            </a:fillRef>
+            <a:effectRef idx="0">
+              <a:schemeClr val="dk1"/>
+            </a:effectRef>
+            <a:fontRef idx="minor">
+              <a:schemeClr val="tx1"/>
+            </a:fontRef>
+          </p:style>
+        </p:cxnSp>
+        <p:cxnSp>
+          <p:nvCxnSpPr>
+            <p:cNvPr id="78" name="Connecteur droit avec flèche 77">
+              <a:extLst>
+                <a:ext uri="{FF2B5EF4-FFF2-40B4-BE49-F238E27FC236}">
+                  <a16:creationId xmlns:a16="http://schemas.microsoft.com/office/drawing/2014/main" id="{4D494EB8-6042-43DD-A77E-3C256D26FFF0}"/>
+                </a:ext>
+              </a:extLst>
+            </p:cNvPr>
+            <p:cNvCxnSpPr>
+              <a:cxnSpLocks/>
+            </p:cNvCxnSpPr>
+            <p:nvPr/>
+          </p:nvCxnSpPr>
+          <p:spPr>
+            <a:xfrm flipH="1">
+              <a:off x="8888941" y="2234387"/>
+              <a:ext cx="1074206" cy="25733"/>
+            </a:xfrm>
+            <a:prstGeom prst="straightConnector1">
+              <a:avLst/>
+            </a:prstGeom>
+            <a:ln>
+              <a:prstDash val="dashDot"/>
+              <a:tailEnd type="triangle"/>
+            </a:ln>
+          </p:spPr>
+          <p:style>
+            <a:lnRef idx="1">
+              <a:schemeClr val="dk1"/>
+            </a:lnRef>
+            <a:fillRef idx="0">
+              <a:schemeClr val="dk1"/>
+            </a:fillRef>
+            <a:effectRef idx="0">
+              <a:schemeClr val="dk1"/>
+            </a:effectRef>
+            <a:fontRef idx="minor">
+              <a:schemeClr val="tx1"/>
+            </a:fontRef>
+          </p:style>
+        </p:cxnSp>
+        <p:cxnSp>
+          <p:nvCxnSpPr>
+            <p:cNvPr id="58" name="Connecteur droit avec flèche 57">
+              <a:extLst>
+                <a:ext uri="{FF2B5EF4-FFF2-40B4-BE49-F238E27FC236}">
+                  <a16:creationId xmlns:a16="http://schemas.microsoft.com/office/drawing/2014/main" id="{16431977-C88A-450D-B61D-A1A2478D7E57}"/>
+                </a:ext>
+              </a:extLst>
+            </p:cNvPr>
+            <p:cNvCxnSpPr>
+              <a:stCxn id="56" idx="1"/>
+            </p:cNvCxnSpPr>
+            <p:nvPr/>
+          </p:nvCxnSpPr>
+          <p:spPr>
+            <a:xfrm flipH="1">
+              <a:off x="2688167" y="3158136"/>
+              <a:ext cx="604351" cy="0"/>
+            </a:xfrm>
+            <a:prstGeom prst="straightConnector1">
+              <a:avLst/>
+            </a:prstGeom>
+            <a:ln w="6350">
+              <a:prstDash val="sysDash"/>
+              <a:tailEnd type="triangle"/>
+            </a:ln>
+          </p:spPr>
+          <p:style>
+            <a:lnRef idx="1">
+              <a:schemeClr val="dk1"/>
+            </a:lnRef>
+            <a:fillRef idx="0">
+              <a:schemeClr val="dk1"/>
+            </a:fillRef>
+            <a:effectRef idx="0">
+              <a:schemeClr val="dk1"/>
+            </a:effectRef>
+            <a:fontRef idx="minor">
+              <a:schemeClr val="tx1"/>
+            </a:fontRef>
+          </p:style>
+        </p:cxnSp>
+        <p:cxnSp>
+          <p:nvCxnSpPr>
+            <p:cNvPr id="84" name="Connecteur droit avec flèche 83">
+              <a:extLst>
+                <a:ext uri="{FF2B5EF4-FFF2-40B4-BE49-F238E27FC236}">
+                  <a16:creationId xmlns:a16="http://schemas.microsoft.com/office/drawing/2014/main" id="{4B6E22DC-37D1-4F2D-9CC4-89B7AEAFE219}"/>
+                </a:ext>
+              </a:extLst>
+            </p:cNvPr>
+            <p:cNvCxnSpPr>
+              <a:cxnSpLocks/>
+              <a:stCxn id="55" idx="1"/>
+            </p:cNvCxnSpPr>
+            <p:nvPr/>
+          </p:nvCxnSpPr>
+          <p:spPr>
+            <a:xfrm flipV="1">
+              <a:off x="5297000" y="1655885"/>
+              <a:ext cx="4234" cy="578502"/>
+            </a:xfrm>
+            <a:prstGeom prst="straightConnector1">
+              <a:avLst/>
+            </a:prstGeom>
+            <a:ln>
+              <a:prstDash val="sysDash"/>
+              <a:tailEnd type="triangle"/>
+            </a:ln>
+          </p:spPr>
+          <p:style>
+            <a:lnRef idx="1">
+              <a:schemeClr val="dk1"/>
+            </a:lnRef>
+            <a:fillRef idx="0">
+              <a:schemeClr val="dk1"/>
+            </a:fillRef>
+            <a:effectRef idx="0">
+              <a:schemeClr val="dk1"/>
+            </a:effectRef>
+            <a:fontRef idx="minor">
+              <a:schemeClr val="tx1"/>
+            </a:fontRef>
+          </p:style>
+        </p:cxnSp>
+        <p:cxnSp>
+          <p:nvCxnSpPr>
+            <p:cNvPr id="88" name="Connecteur droit avec flèche 87">
+              <a:extLst>
+                <a:ext uri="{FF2B5EF4-FFF2-40B4-BE49-F238E27FC236}">
+                  <a16:creationId xmlns:a16="http://schemas.microsoft.com/office/drawing/2014/main" id="{F874736B-50E5-4E86-ACFD-372680EF6DC7}"/>
+                </a:ext>
+              </a:extLst>
+            </p:cNvPr>
+            <p:cNvCxnSpPr>
+              <a:cxnSpLocks/>
+            </p:cNvCxnSpPr>
+            <p:nvPr/>
+          </p:nvCxnSpPr>
+          <p:spPr>
+            <a:xfrm flipH="1">
+              <a:off x="5297000" y="4428136"/>
+              <a:ext cx="1" cy="627350"/>
+            </a:xfrm>
+            <a:prstGeom prst="straightConnector1">
+              <a:avLst/>
+            </a:prstGeom>
+            <a:ln>
+              <a:prstDash val="sysDash"/>
+              <a:tailEnd type="triangle"/>
+            </a:ln>
+          </p:spPr>
+          <p:style>
+            <a:lnRef idx="1">
+              <a:schemeClr val="dk1"/>
+            </a:lnRef>
+            <a:fillRef idx="0">
+              <a:schemeClr val="dk1"/>
+            </a:fillRef>
+            <a:effectRef idx="0">
+              <a:schemeClr val="dk1"/>
+            </a:effectRef>
+            <a:fontRef idx="minor">
+              <a:schemeClr val="tx1"/>
+            </a:fontRef>
+          </p:style>
+        </p:cxnSp>
+        <p:cxnSp>
+          <p:nvCxnSpPr>
+            <p:cNvPr id="92" name="Connecteur droit avec flèche 91">
+              <a:extLst>
+                <a:ext uri="{FF2B5EF4-FFF2-40B4-BE49-F238E27FC236}">
+                  <a16:creationId xmlns:a16="http://schemas.microsoft.com/office/drawing/2014/main" id="{5E5935FA-017F-4934-8362-7E47777E5A90}"/>
+                </a:ext>
+              </a:extLst>
+            </p:cNvPr>
+            <p:cNvCxnSpPr>
+              <a:cxnSpLocks/>
+              <a:stCxn id="86" idx="4"/>
+            </p:cNvCxnSpPr>
+            <p:nvPr/>
+          </p:nvCxnSpPr>
+          <p:spPr>
+            <a:xfrm>
+              <a:off x="8468781" y="4024565"/>
+              <a:ext cx="644608" cy="787159"/>
+            </a:xfrm>
+            <a:prstGeom prst="straightConnector1">
+              <a:avLst/>
+            </a:prstGeom>
+            <a:ln>
+              <a:prstDash val="sysDash"/>
+              <a:tailEnd type="triangle"/>
+            </a:ln>
+          </p:spPr>
+          <p:style>
+            <a:lnRef idx="1">
+              <a:schemeClr val="dk1"/>
+            </a:lnRef>
+            <a:fillRef idx="0">
+              <a:schemeClr val="dk1"/>
+            </a:fillRef>
+            <a:effectRef idx="0">
+              <a:schemeClr val="dk1"/>
+            </a:effectRef>
+            <a:fontRef idx="minor">
+              <a:schemeClr val="tx1"/>
+            </a:fontRef>
+          </p:style>
+        </p:cxnSp>
+        <p:cxnSp>
+          <p:nvCxnSpPr>
+            <p:cNvPr id="94" name="Connecteur droit avec flèche 93">
+              <a:extLst>
+                <a:ext uri="{FF2B5EF4-FFF2-40B4-BE49-F238E27FC236}">
+                  <a16:creationId xmlns:a16="http://schemas.microsoft.com/office/drawing/2014/main" id="{5F774878-6F6A-4CEE-B40C-E2E8A627E390}"/>
                 </a:ext>
               </a:extLst>
             </p:cNvPr>
@@ -3502,251 +8149,38 @@
           </p:nvCxnSpPr>
           <p:spPr>
             <a:xfrm>
-              <a:off x="1193800" y="592667"/>
-              <a:ext cx="1659467" cy="0"/>
+              <a:off x="9014883" y="2594615"/>
+              <a:ext cx="936663" cy="224303"/>
             </a:xfrm>
             <a:prstGeom prst="straightConnector1">
               <a:avLst/>
             </a:prstGeom>
             <a:ln>
-              <a:headEnd type="triangle"/>
+              <a:prstDash val="sysDash"/>
               <a:tailEnd type="triangle"/>
             </a:ln>
           </p:spPr>
           <p:style>
             <a:lnRef idx="1">
-              <a:schemeClr val="accent1"/>
+              <a:schemeClr val="dk1"/>
             </a:lnRef>
             <a:fillRef idx="0">
-              <a:schemeClr val="accent1"/>
+              <a:schemeClr val="dk1"/>
             </a:fillRef>
             <a:effectRef idx="0">
-              <a:schemeClr val="accent1"/>
+              <a:schemeClr val="dk1"/>
             </a:effectRef>
             <a:fontRef idx="minor">
               <a:schemeClr val="tx1"/>
             </a:fontRef>
           </p:style>
         </p:cxnSp>
-        <p:sp>
-          <p:nvSpPr>
-            <p:cNvPr id="12" name="ZoneTexte 11">
+        <p:cxnSp>
+          <p:nvCxnSpPr>
+            <p:cNvPr id="96" name="Connecteur droit avec flèche 95">
               <a:extLst>
                 <a:ext uri="{FF2B5EF4-FFF2-40B4-BE49-F238E27FC236}">
-                  <a16:creationId xmlns:a16="http://schemas.microsoft.com/office/drawing/2014/main" id="{5A5AE3FC-E219-4516-97BF-34B08481C6E7}"/>
-                </a:ext>
-              </a:extLst>
-            </p:cNvPr>
-            <p:cNvSpPr txBox="1"/>
-            <p:nvPr/>
-          </p:nvSpPr>
-          <p:spPr>
-            <a:xfrm>
-              <a:off x="1515533" y="368071"/>
-              <a:ext cx="1143000" cy="230832"/>
-            </a:xfrm>
-            <a:prstGeom prst="rect">
-              <a:avLst/>
-            </a:prstGeom>
-            <a:noFill/>
-          </p:spPr>
-          <p:txBody>
-            <a:bodyPr wrap="square" rtlCol="0">
-              <a:spAutoFit/>
-            </a:bodyPr>
-            <a:lstStyle/>
-            <a:p>
-              <a:r>
-                <a:rPr lang="fr-FR" sz="900" dirty="0">
-                  <a:latin typeface="Arial" panose="020B0604020202020204" pitchFamily="34" charset="0"/>
-                  <a:cs typeface="Arial" panose="020B0604020202020204" pitchFamily="34" charset="0"/>
-                </a:rPr>
-                <a:t> </a:t>
-              </a:r>
-              <a:r>
-                <a:rPr lang="fr-FR" sz="900">
-                  <a:latin typeface="Arial" panose="020B0604020202020204" pitchFamily="34" charset="0"/>
-                  <a:cs typeface="Arial" panose="020B0604020202020204" pitchFamily="34" charset="0"/>
-                </a:rPr>
-                <a:t>max 3 </a:t>
-              </a:r>
-              <a:r>
-                <a:rPr lang="fr-FR" sz="900" dirty="0">
-                  <a:latin typeface="Arial" panose="020B0604020202020204" pitchFamily="34" charset="0"/>
-                  <a:cs typeface="Arial" panose="020B0604020202020204" pitchFamily="34" charset="0"/>
-                </a:rPr>
-                <a:t>variables</a:t>
-              </a:r>
-            </a:p>
-          </p:txBody>
-        </p:sp>
-      </p:grpSp>
-      <p:grpSp>
-        <p:nvGrpSpPr>
-          <p:cNvPr id="14" name="Groupe 13">
-            <a:extLst>
-              <a:ext uri="{FF2B5EF4-FFF2-40B4-BE49-F238E27FC236}">
-                <a16:creationId xmlns:a16="http://schemas.microsoft.com/office/drawing/2014/main" id="{01CD2FC3-B72C-406A-A028-AF99F36A7492}"/>
-              </a:ext>
-            </a:extLst>
-          </p:cNvPr>
-          <p:cNvGrpSpPr/>
-          <p:nvPr/>
-        </p:nvGrpSpPr>
-        <p:grpSpPr>
-          <a:xfrm>
-            <a:off x="3771901" y="398389"/>
-            <a:ext cx="2582333" cy="1257529"/>
-            <a:chOff x="270934" y="368071"/>
-            <a:chExt cx="2582333" cy="1257529"/>
-          </a:xfrm>
-        </p:grpSpPr>
-        <p:sp>
-          <p:nvSpPr>
-            <p:cNvPr id="15" name="Rectangle 14">
-              <a:extLst>
-                <a:ext uri="{FF2B5EF4-FFF2-40B4-BE49-F238E27FC236}">
-                  <a16:creationId xmlns:a16="http://schemas.microsoft.com/office/drawing/2014/main" id="{1A0C2064-6A4C-4691-9C1F-4AF6ECF3E904}"/>
-                </a:ext>
-              </a:extLst>
-            </p:cNvPr>
-            <p:cNvSpPr/>
-            <p:nvPr/>
-          </p:nvSpPr>
-          <p:spPr>
-            <a:xfrm>
-              <a:off x="1193800" y="745067"/>
-              <a:ext cx="1659466" cy="880533"/>
-            </a:xfrm>
-            <a:prstGeom prst="rect">
-              <a:avLst/>
-            </a:prstGeom>
-            <a:solidFill>
-              <a:schemeClr val="accent1">
-                <a:lumMod val="40000"/>
-                <a:lumOff val="60000"/>
-              </a:schemeClr>
-            </a:solidFill>
-            <a:ln>
-              <a:solidFill>
-                <a:schemeClr val="accent1">
-                  <a:lumMod val="75000"/>
-                </a:schemeClr>
-              </a:solidFill>
-            </a:ln>
-          </p:spPr>
-          <p:style>
-            <a:lnRef idx="2">
-              <a:schemeClr val="accent5">
-                <a:shade val="50000"/>
-              </a:schemeClr>
-            </a:lnRef>
-            <a:fillRef idx="1">
-              <a:schemeClr val="accent5"/>
-            </a:fillRef>
-            <a:effectRef idx="0">
-              <a:schemeClr val="accent5"/>
-            </a:effectRef>
-            <a:fontRef idx="minor">
-              <a:schemeClr val="lt1"/>
-            </a:fontRef>
-          </p:style>
-          <p:txBody>
-            <a:bodyPr rtlCol="0" anchor="ctr"/>
-            <a:lstStyle/>
-            <a:p>
-              <a:pPr algn="ctr"/>
-              <a:r>
-                <a:rPr lang="fr-FR" dirty="0"/>
-                <a:t>Animaux</a:t>
-              </a:r>
-            </a:p>
-          </p:txBody>
-        </p:sp>
-        <p:cxnSp>
-          <p:nvCxnSpPr>
-            <p:cNvPr id="16" name="Connecteur droit avec flèche 15">
-              <a:extLst>
-                <a:ext uri="{FF2B5EF4-FFF2-40B4-BE49-F238E27FC236}">
-                  <a16:creationId xmlns:a16="http://schemas.microsoft.com/office/drawing/2014/main" id="{8DCCD066-A17B-4729-B96B-9B814A7F2EEE}"/>
-                </a:ext>
-              </a:extLst>
-            </p:cNvPr>
-            <p:cNvCxnSpPr/>
-            <p:nvPr/>
-          </p:nvCxnSpPr>
-          <p:spPr>
-            <a:xfrm>
-              <a:off x="1016000" y="745067"/>
-              <a:ext cx="0" cy="821266"/>
-            </a:xfrm>
-            <a:prstGeom prst="straightConnector1">
-              <a:avLst/>
-            </a:prstGeom>
-            <a:ln>
-              <a:headEnd type="triangle"/>
-              <a:tailEnd type="triangle"/>
-            </a:ln>
-          </p:spPr>
-          <p:style>
-            <a:lnRef idx="1">
-              <a:schemeClr val="accent1"/>
-            </a:lnRef>
-            <a:fillRef idx="0">
-              <a:schemeClr val="accent1"/>
-            </a:fillRef>
-            <a:effectRef idx="0">
-              <a:schemeClr val="accent1"/>
-            </a:effectRef>
-            <a:fontRef idx="minor">
-              <a:schemeClr val="tx1"/>
-            </a:fontRef>
-          </p:style>
-        </p:cxnSp>
-        <p:sp>
-          <p:nvSpPr>
-            <p:cNvPr id="17" name="ZoneTexte 16">
-              <a:extLst>
-                <a:ext uri="{FF2B5EF4-FFF2-40B4-BE49-F238E27FC236}">
-                  <a16:creationId xmlns:a16="http://schemas.microsoft.com/office/drawing/2014/main" id="{DF24B1BC-32B2-4473-8BDF-0E2AC86AA40D}"/>
-                </a:ext>
-              </a:extLst>
-            </p:cNvPr>
-            <p:cNvSpPr txBox="1"/>
-            <p:nvPr/>
-          </p:nvSpPr>
-          <p:spPr>
-            <a:xfrm>
-              <a:off x="270934" y="1069917"/>
-              <a:ext cx="745066" cy="230832"/>
-            </a:xfrm>
-            <a:prstGeom prst="rect">
-              <a:avLst/>
-            </a:prstGeom>
-            <a:noFill/>
-          </p:spPr>
-          <p:txBody>
-            <a:bodyPr wrap="square" rtlCol="0">
-              <a:spAutoFit/>
-            </a:bodyPr>
-            <a:lstStyle/>
-            <a:p>
-              <a:r>
-                <a:rPr lang="fr-FR" sz="900" dirty="0">
-                  <a:latin typeface="Arial" panose="020B0604020202020204" pitchFamily="34" charset="0"/>
-                  <a:cs typeface="Arial" panose="020B0604020202020204" pitchFamily="34" charset="0"/>
-                </a:rPr>
-                <a:t>12 régions</a:t>
-              </a:r>
-            </a:p>
-          </p:txBody>
-        </p:sp>
-        <p:cxnSp>
-          <p:nvCxnSpPr>
-            <p:cNvPr id="18" name="Connecteur droit avec flèche 17">
-              <a:extLst>
-                <a:ext uri="{FF2B5EF4-FFF2-40B4-BE49-F238E27FC236}">
-                  <a16:creationId xmlns:a16="http://schemas.microsoft.com/office/drawing/2014/main" id="{A9A21EDF-20DA-443C-B3BB-94EE1CBD5D7F}"/>
+                  <a16:creationId xmlns:a16="http://schemas.microsoft.com/office/drawing/2014/main" id="{35B23C92-DD05-4CA3-8F12-C7B6EDDB167A}"/>
                 </a:ext>
               </a:extLst>
             </p:cNvPr>
@@ -3757,237 +8191,151 @@
           </p:nvCxnSpPr>
           <p:spPr>
             <a:xfrm>
-              <a:off x="1193800" y="592667"/>
-              <a:ext cx="1659467" cy="0"/>
+              <a:off x="1028700" y="5547817"/>
+              <a:ext cx="331219" cy="0"/>
             </a:xfrm>
             <a:prstGeom prst="straightConnector1">
               <a:avLst/>
             </a:prstGeom>
             <a:ln>
-              <a:headEnd type="triangle"/>
+              <a:prstDash val="sysDash"/>
               <a:tailEnd type="triangle"/>
             </a:ln>
           </p:spPr>
           <p:style>
             <a:lnRef idx="1">
-              <a:schemeClr val="accent1"/>
+              <a:schemeClr val="dk1"/>
             </a:lnRef>
             <a:fillRef idx="0">
-              <a:schemeClr val="accent1"/>
+              <a:schemeClr val="dk1"/>
             </a:fillRef>
             <a:effectRef idx="0">
-              <a:schemeClr val="accent1"/>
+              <a:schemeClr val="dk1"/>
             </a:effectRef>
             <a:fontRef idx="minor">
               <a:schemeClr val="tx1"/>
             </a:fontRef>
           </p:style>
         </p:cxnSp>
-        <p:sp>
-          <p:nvSpPr>
-            <p:cNvPr id="19" name="ZoneTexte 18">
+        <mc:AlternateContent xmlns:mc="http://schemas.openxmlformats.org/markup-compatibility/2006">
+          <mc:Choice xmlns:a14="http://schemas.microsoft.com/office/drawing/2010/main" Requires="a14">
+            <p:sp>
+              <p:nvSpPr>
+                <p:cNvPr id="79" name="ZoneTexte 78">
+                  <a:extLst>
+                    <a:ext uri="{FF2B5EF4-FFF2-40B4-BE49-F238E27FC236}">
+                      <a16:creationId xmlns:a16="http://schemas.microsoft.com/office/drawing/2014/main" id="{88CBC489-3E89-4963-B0E9-64437D82B1C2}"/>
+                    </a:ext>
+                  </a:extLst>
+                </p:cNvPr>
+                <p:cNvSpPr txBox="1"/>
+                <p:nvPr/>
+              </p:nvSpPr>
+              <p:spPr>
+                <a:xfrm>
+                  <a:off x="1407008" y="5363151"/>
+                  <a:ext cx="1324507" cy="369332"/>
+                </a:xfrm>
+                <a:prstGeom prst="rect">
+                  <a:avLst/>
+                </a:prstGeom>
+                <a:noFill/>
+              </p:spPr>
+              <p:txBody>
+                <a:bodyPr wrap="square" rtlCol="0">
+                  <a:spAutoFit/>
+                </a:bodyPr>
+                <a:lstStyle/>
+                <a:p>
+                  <a:r>
+                    <a:rPr lang="fr-FR" dirty="0"/>
+                    <a:t>Loadings </a:t>
+                  </a:r>
+                  <a14:m>
+                    <m:oMath xmlns:m="http://schemas.openxmlformats.org/officeDocument/2006/math">
+                      <m:sSub>
+                        <m:sSubPr>
+                          <m:ctrlPr>
+                            <a:rPr lang="fr-FR" i="1" smtClean="0">
+                              <a:latin typeface="Cambria Math" panose="02040503050406030204" pitchFamily="18" charset="0"/>
+                            </a:rPr>
+                          </m:ctrlPr>
+                        </m:sSubPr>
+                        <m:e>
+                          <m:r>
+                            <a:rPr lang="fr-FR" b="0" i="1" smtClean="0">
+                              <a:latin typeface="Cambria Math" panose="02040503050406030204" pitchFamily="18" charset="0"/>
+                            </a:rPr>
+                            <m:t>𝑐</m:t>
+                          </m:r>
+                        </m:e>
+                        <m:sub>
+                          <m:r>
+                            <a:rPr lang="fr-FR" b="0" i="1" smtClean="0">
+                              <a:latin typeface="Cambria Math" panose="02040503050406030204" pitchFamily="18" charset="0"/>
+                            </a:rPr>
+                            <m:t>𝑘</m:t>
+                          </m:r>
+                        </m:sub>
+                      </m:sSub>
+                    </m:oMath>
+                  </a14:m>
+                  <a:endParaRPr lang="fr-FR" dirty="0"/>
+                </a:p>
+              </p:txBody>
+            </p:sp>
+          </mc:Choice>
+          <mc:Fallback>
+            <p:sp>
+              <p:nvSpPr>
+                <p:cNvPr id="79" name="ZoneTexte 78">
+                  <a:extLst>
+                    <a:ext uri="{FF2B5EF4-FFF2-40B4-BE49-F238E27FC236}">
+                      <a16:creationId xmlns:a16="http://schemas.microsoft.com/office/drawing/2014/main" id="{88CBC489-3E89-4963-B0E9-64437D82B1C2}"/>
+                    </a:ext>
+                  </a:extLst>
+                </p:cNvPr>
+                <p:cNvSpPr txBox="1">
+                  <a:spLocks noRot="1" noChangeAspect="1" noMove="1" noResize="1" noEditPoints="1" noAdjustHandles="1" noChangeArrowheads="1" noChangeShapeType="1" noTextEdit="1"/>
+                </p:cNvSpPr>
+                <p:nvPr/>
+              </p:nvSpPr>
+              <p:spPr>
+                <a:xfrm>
+                  <a:off x="1407008" y="5363151"/>
+                  <a:ext cx="1324507" cy="369332"/>
+                </a:xfrm>
+                <a:prstGeom prst="rect">
+                  <a:avLst/>
+                </a:prstGeom>
+                <a:blipFill>
+                  <a:blip r:embed="rId2"/>
+                  <a:stretch>
+                    <a:fillRect l="-4147" t="-10000" b="-26667"/>
+                  </a:stretch>
+                </a:blipFill>
+              </p:spPr>
+              <p:txBody>
+                <a:bodyPr/>
+                <a:lstStyle/>
+                <a:p>
+                  <a:r>
+                    <a:rPr lang="fr-FR">
+                      <a:noFill/>
+                    </a:rPr>
+                    <a:t> </a:t>
+                  </a:r>
+                </a:p>
+              </p:txBody>
+            </p:sp>
+          </mc:Fallback>
+        </mc:AlternateContent>
+        <p:cxnSp>
+          <p:nvCxnSpPr>
+            <p:cNvPr id="99" name="Connecteur droit avec flèche 98">
               <a:extLst>
                 <a:ext uri="{FF2B5EF4-FFF2-40B4-BE49-F238E27FC236}">
-                  <a16:creationId xmlns:a16="http://schemas.microsoft.com/office/drawing/2014/main" id="{24F942E7-77C6-41D5-80C5-4A51D8C705B2}"/>
-                </a:ext>
-              </a:extLst>
-            </p:cNvPr>
-            <p:cNvSpPr txBox="1"/>
-            <p:nvPr/>
-          </p:nvSpPr>
-          <p:spPr>
-            <a:xfrm>
-              <a:off x="1515532" y="368071"/>
-              <a:ext cx="1143000" cy="230832"/>
-            </a:xfrm>
-            <a:prstGeom prst="rect">
-              <a:avLst/>
-            </a:prstGeom>
-            <a:noFill/>
-          </p:spPr>
-          <p:txBody>
-            <a:bodyPr wrap="square" rtlCol="0">
-              <a:spAutoFit/>
-            </a:bodyPr>
-            <a:lstStyle/>
-            <a:p>
-              <a:r>
-                <a:rPr lang="fr-FR" sz="900" dirty="0">
-                  <a:latin typeface="Arial" panose="020B0604020202020204" pitchFamily="34" charset="0"/>
-                  <a:cs typeface="Arial" panose="020B0604020202020204" pitchFamily="34" charset="0"/>
-                </a:rPr>
-                <a:t> max 4 variables</a:t>
-              </a:r>
-            </a:p>
-          </p:txBody>
-        </p:sp>
-      </p:grpSp>
-      <p:grpSp>
-        <p:nvGrpSpPr>
-          <p:cNvPr id="33" name="Groupe 32">
-            <a:extLst>
-              <a:ext uri="{FF2B5EF4-FFF2-40B4-BE49-F238E27FC236}">
-                <a16:creationId xmlns:a16="http://schemas.microsoft.com/office/drawing/2014/main" id="{B744D23B-2E94-47F7-96A7-4BA7E6FB0089}"/>
-              </a:ext>
-            </a:extLst>
-          </p:cNvPr>
-          <p:cNvGrpSpPr/>
-          <p:nvPr/>
-        </p:nvGrpSpPr>
-        <p:grpSpPr>
-          <a:xfrm>
-            <a:off x="3860801" y="4678490"/>
-            <a:ext cx="2582333" cy="1257529"/>
-            <a:chOff x="270934" y="368071"/>
-            <a:chExt cx="2582333" cy="1257529"/>
-          </a:xfrm>
-        </p:grpSpPr>
-        <p:sp>
-          <p:nvSpPr>
-            <p:cNvPr id="34" name="Rectangle 33">
-              <a:extLst>
-                <a:ext uri="{FF2B5EF4-FFF2-40B4-BE49-F238E27FC236}">
-                  <a16:creationId xmlns:a16="http://schemas.microsoft.com/office/drawing/2014/main" id="{E7ABEB32-5092-4FCF-BF63-D0B007B38D7B}"/>
-                </a:ext>
-              </a:extLst>
-            </p:cNvPr>
-            <p:cNvSpPr/>
-            <p:nvPr/>
-          </p:nvSpPr>
-          <p:spPr>
-            <a:xfrm>
-              <a:off x="1193800" y="745067"/>
-              <a:ext cx="1659467" cy="880533"/>
-            </a:xfrm>
-            <a:prstGeom prst="rect">
-              <a:avLst/>
-            </a:prstGeom>
-            <a:solidFill>
-              <a:schemeClr val="accent1">
-                <a:lumMod val="40000"/>
-                <a:lumOff val="60000"/>
-              </a:schemeClr>
-            </a:solidFill>
-            <a:ln>
-              <a:solidFill>
-                <a:schemeClr val="accent1">
-                  <a:lumMod val="75000"/>
-                </a:schemeClr>
-              </a:solidFill>
-            </a:ln>
-          </p:spPr>
-          <p:style>
-            <a:lnRef idx="2">
-              <a:schemeClr val="accent5">
-                <a:shade val="50000"/>
-              </a:schemeClr>
-            </a:lnRef>
-            <a:fillRef idx="1">
-              <a:schemeClr val="accent5"/>
-            </a:fillRef>
-            <a:effectRef idx="0">
-              <a:schemeClr val="accent5"/>
-            </a:effectRef>
-            <a:fontRef idx="minor">
-              <a:schemeClr val="lt1"/>
-            </a:fontRef>
-          </p:style>
-          <p:txBody>
-            <a:bodyPr rtlCol="0" anchor="ctr"/>
-            <a:lstStyle/>
-            <a:p>
-              <a:pPr algn="ctr"/>
-              <a:r>
-                <a:rPr lang="fr-FR" dirty="0"/>
-                <a:t>Environnement</a:t>
-              </a:r>
-            </a:p>
-          </p:txBody>
-        </p:sp>
-        <p:cxnSp>
-          <p:nvCxnSpPr>
-            <p:cNvPr id="35" name="Connecteur droit avec flèche 34">
-              <a:extLst>
-                <a:ext uri="{FF2B5EF4-FFF2-40B4-BE49-F238E27FC236}">
-                  <a16:creationId xmlns:a16="http://schemas.microsoft.com/office/drawing/2014/main" id="{497DCD8A-A1A8-48BB-8426-10C4F231FD9E}"/>
-                </a:ext>
-              </a:extLst>
-            </p:cNvPr>
-            <p:cNvCxnSpPr/>
-            <p:nvPr/>
-          </p:nvCxnSpPr>
-          <p:spPr>
-            <a:xfrm>
-              <a:off x="1016000" y="745067"/>
-              <a:ext cx="0" cy="821266"/>
-            </a:xfrm>
-            <a:prstGeom prst="straightConnector1">
-              <a:avLst/>
-            </a:prstGeom>
-            <a:ln>
-              <a:headEnd type="triangle"/>
-              <a:tailEnd type="triangle"/>
-            </a:ln>
-          </p:spPr>
-          <p:style>
-            <a:lnRef idx="1">
-              <a:schemeClr val="accent1"/>
-            </a:lnRef>
-            <a:fillRef idx="0">
-              <a:schemeClr val="accent1"/>
-            </a:fillRef>
-            <a:effectRef idx="0">
-              <a:schemeClr val="accent1"/>
-            </a:effectRef>
-            <a:fontRef idx="minor">
-              <a:schemeClr val="tx1"/>
-            </a:fontRef>
-          </p:style>
-        </p:cxnSp>
-        <p:sp>
-          <p:nvSpPr>
-            <p:cNvPr id="36" name="ZoneTexte 35">
-              <a:extLst>
-                <a:ext uri="{FF2B5EF4-FFF2-40B4-BE49-F238E27FC236}">
-                  <a16:creationId xmlns:a16="http://schemas.microsoft.com/office/drawing/2014/main" id="{041529AD-512E-41E1-AC44-DD17CB7DDF2F}"/>
-                </a:ext>
-              </a:extLst>
-            </p:cNvPr>
-            <p:cNvSpPr txBox="1"/>
-            <p:nvPr/>
-          </p:nvSpPr>
-          <p:spPr>
-            <a:xfrm>
-              <a:off x="270934" y="1069917"/>
-              <a:ext cx="745066" cy="230832"/>
-            </a:xfrm>
-            <a:prstGeom prst="rect">
-              <a:avLst/>
-            </a:prstGeom>
-            <a:noFill/>
-          </p:spPr>
-          <p:txBody>
-            <a:bodyPr wrap="square" rtlCol="0">
-              <a:spAutoFit/>
-            </a:bodyPr>
-            <a:lstStyle/>
-            <a:p>
-              <a:r>
-                <a:rPr lang="fr-FR" sz="900" dirty="0">
-                  <a:latin typeface="Arial" panose="020B0604020202020204" pitchFamily="34" charset="0"/>
-                  <a:cs typeface="Arial" panose="020B0604020202020204" pitchFamily="34" charset="0"/>
-                </a:rPr>
-                <a:t>12 régions</a:t>
-              </a:r>
-            </a:p>
-          </p:txBody>
-        </p:sp>
-        <p:cxnSp>
-          <p:nvCxnSpPr>
-            <p:cNvPr id="37" name="Connecteur droit avec flèche 36">
-              <a:extLst>
-                <a:ext uri="{FF2B5EF4-FFF2-40B4-BE49-F238E27FC236}">
-                  <a16:creationId xmlns:a16="http://schemas.microsoft.com/office/drawing/2014/main" id="{ECA53E8D-6A3F-421D-87CA-AAC798F82B86}"/>
+                  <a16:creationId xmlns:a16="http://schemas.microsoft.com/office/drawing/2014/main" id="{2761E1D8-A02B-407C-9FFC-5E5C879C3A57}"/>
                 </a:ext>
               </a:extLst>
             </p:cNvPr>
@@ -3998,237 +8346,151 @@
           </p:nvCxnSpPr>
           <p:spPr>
             <a:xfrm>
-              <a:off x="1193800" y="592667"/>
-              <a:ext cx="1659467" cy="0"/>
+              <a:off x="1028700" y="5890337"/>
+              <a:ext cx="331218" cy="0"/>
             </a:xfrm>
             <a:prstGeom prst="straightConnector1">
               <a:avLst/>
             </a:prstGeom>
             <a:ln>
-              <a:headEnd type="triangle"/>
+              <a:prstDash val="dashDot"/>
               <a:tailEnd type="triangle"/>
             </a:ln>
           </p:spPr>
           <p:style>
             <a:lnRef idx="1">
-              <a:schemeClr val="accent1"/>
+              <a:schemeClr val="dk1"/>
             </a:lnRef>
             <a:fillRef idx="0">
-              <a:schemeClr val="accent1"/>
+              <a:schemeClr val="dk1"/>
             </a:fillRef>
             <a:effectRef idx="0">
-              <a:schemeClr val="accent1"/>
+              <a:schemeClr val="dk1"/>
             </a:effectRef>
             <a:fontRef idx="minor">
               <a:schemeClr val="tx1"/>
             </a:fontRef>
           </p:style>
         </p:cxnSp>
-        <p:sp>
-          <p:nvSpPr>
-            <p:cNvPr id="38" name="ZoneTexte 37">
+        <mc:AlternateContent xmlns:mc="http://schemas.openxmlformats.org/markup-compatibility/2006">
+          <mc:Choice xmlns:a14="http://schemas.microsoft.com/office/drawing/2010/main" Requires="a14">
+            <p:sp>
+              <p:nvSpPr>
+                <p:cNvPr id="102" name="ZoneTexte 101">
+                  <a:extLst>
+                    <a:ext uri="{FF2B5EF4-FFF2-40B4-BE49-F238E27FC236}">
+                      <a16:creationId xmlns:a16="http://schemas.microsoft.com/office/drawing/2014/main" id="{C9F9395C-EB19-4FCC-8548-0AD8673E365B}"/>
+                    </a:ext>
+                  </a:extLst>
+                </p:cNvPr>
+                <p:cNvSpPr txBox="1"/>
+                <p:nvPr/>
+              </p:nvSpPr>
+              <p:spPr>
+                <a:xfrm>
+                  <a:off x="1398541" y="5705671"/>
+                  <a:ext cx="1324507" cy="369332"/>
+                </a:xfrm>
+                <a:prstGeom prst="rect">
+                  <a:avLst/>
+                </a:prstGeom>
+                <a:noFill/>
+              </p:spPr>
+              <p:txBody>
+                <a:bodyPr wrap="square" rtlCol="0">
+                  <a:spAutoFit/>
+                </a:bodyPr>
+                <a:lstStyle/>
+                <a:p>
+                  <a:r>
+                    <a:rPr lang="fr-FR" dirty="0"/>
+                    <a:t>Weight </a:t>
+                  </a:r>
+                  <a14:m>
+                    <m:oMath xmlns:m="http://schemas.openxmlformats.org/officeDocument/2006/math">
+                      <m:sSub>
+                        <m:sSubPr>
+                          <m:ctrlPr>
+                            <a:rPr lang="fr-FR" i="1" smtClean="0">
+                              <a:latin typeface="Cambria Math" panose="02040503050406030204" pitchFamily="18" charset="0"/>
+                            </a:rPr>
+                          </m:ctrlPr>
+                        </m:sSubPr>
+                        <m:e>
+                          <m:r>
+                            <a:rPr lang="fr-FR" b="0" i="1" smtClean="0">
+                              <a:latin typeface="Cambria Math" panose="02040503050406030204" pitchFamily="18" charset="0"/>
+                            </a:rPr>
+                            <m:t>𝑤</m:t>
+                          </m:r>
+                        </m:e>
+                        <m:sub>
+                          <m:r>
+                            <a:rPr lang="fr-FR" b="0" i="1" smtClean="0">
+                              <a:latin typeface="Cambria Math" panose="02040503050406030204" pitchFamily="18" charset="0"/>
+                            </a:rPr>
+                            <m:t>𝑘</m:t>
+                          </m:r>
+                        </m:sub>
+                      </m:sSub>
+                    </m:oMath>
+                  </a14:m>
+                  <a:endParaRPr lang="fr-FR" dirty="0"/>
+                </a:p>
+              </p:txBody>
+            </p:sp>
+          </mc:Choice>
+          <mc:Fallback>
+            <p:sp>
+              <p:nvSpPr>
+                <p:cNvPr id="102" name="ZoneTexte 101">
+                  <a:extLst>
+                    <a:ext uri="{FF2B5EF4-FFF2-40B4-BE49-F238E27FC236}">
+                      <a16:creationId xmlns:a16="http://schemas.microsoft.com/office/drawing/2014/main" id="{C9F9395C-EB19-4FCC-8548-0AD8673E365B}"/>
+                    </a:ext>
+                  </a:extLst>
+                </p:cNvPr>
+                <p:cNvSpPr txBox="1">
+                  <a:spLocks noRot="1" noChangeAspect="1" noMove="1" noResize="1" noEditPoints="1" noAdjustHandles="1" noChangeArrowheads="1" noChangeShapeType="1" noTextEdit="1"/>
+                </p:cNvSpPr>
+                <p:nvPr/>
+              </p:nvSpPr>
+              <p:spPr>
+                <a:xfrm>
+                  <a:off x="1398541" y="5705671"/>
+                  <a:ext cx="1324507" cy="369332"/>
+                </a:xfrm>
+                <a:prstGeom prst="rect">
+                  <a:avLst/>
+                </a:prstGeom>
+                <a:blipFill>
+                  <a:blip r:embed="rId3"/>
+                  <a:stretch>
+                    <a:fillRect l="-3670" t="-9836" b="-24590"/>
+                  </a:stretch>
+                </a:blipFill>
+              </p:spPr>
+              <p:txBody>
+                <a:bodyPr/>
+                <a:lstStyle/>
+                <a:p>
+                  <a:r>
+                    <a:rPr lang="fr-FR">
+                      <a:noFill/>
+                    </a:rPr>
+                    <a:t> </a:t>
+                  </a:r>
+                </a:p>
+              </p:txBody>
+            </p:sp>
+          </mc:Fallback>
+        </mc:AlternateContent>
+        <p:cxnSp>
+          <p:nvCxnSpPr>
+            <p:cNvPr id="103" name="Connecteur droit avec flèche 102">
               <a:extLst>
                 <a:ext uri="{FF2B5EF4-FFF2-40B4-BE49-F238E27FC236}">
-                  <a16:creationId xmlns:a16="http://schemas.microsoft.com/office/drawing/2014/main" id="{9ACF325C-B7E2-4AF5-968E-3C71B3EBB07D}"/>
-                </a:ext>
-              </a:extLst>
-            </p:cNvPr>
-            <p:cNvSpPr txBox="1"/>
-            <p:nvPr/>
-          </p:nvSpPr>
-          <p:spPr>
-            <a:xfrm>
-              <a:off x="1515533" y="368071"/>
-              <a:ext cx="1143000" cy="230832"/>
-            </a:xfrm>
-            <a:prstGeom prst="rect">
-              <a:avLst/>
-            </a:prstGeom>
-            <a:noFill/>
-          </p:spPr>
-          <p:txBody>
-            <a:bodyPr wrap="square" rtlCol="0">
-              <a:spAutoFit/>
-            </a:bodyPr>
-            <a:lstStyle/>
-            <a:p>
-              <a:r>
-                <a:rPr lang="fr-FR" sz="900" dirty="0">
-                  <a:latin typeface="Arial" panose="020B0604020202020204" pitchFamily="34" charset="0"/>
-                  <a:cs typeface="Arial" panose="020B0604020202020204" pitchFamily="34" charset="0"/>
-                </a:rPr>
-                <a:t> max 2 variables</a:t>
-              </a:r>
-            </a:p>
-          </p:txBody>
-        </p:sp>
-      </p:grpSp>
-      <p:grpSp>
-        <p:nvGrpSpPr>
-          <p:cNvPr id="39" name="Groupe 38">
-            <a:extLst>
-              <a:ext uri="{FF2B5EF4-FFF2-40B4-BE49-F238E27FC236}">
-                <a16:creationId xmlns:a16="http://schemas.microsoft.com/office/drawing/2014/main" id="{5FF32897-D699-4EF8-97BB-81B42CDC2DD0}"/>
-              </a:ext>
-            </a:extLst>
-          </p:cNvPr>
-          <p:cNvGrpSpPr/>
-          <p:nvPr/>
-        </p:nvGrpSpPr>
-        <p:grpSpPr>
-          <a:xfrm>
-            <a:off x="105834" y="2586124"/>
-            <a:ext cx="2582333" cy="1258416"/>
-            <a:chOff x="270934" y="368071"/>
-            <a:chExt cx="2582333" cy="1258416"/>
-          </a:xfrm>
-        </p:grpSpPr>
-        <p:sp>
-          <p:nvSpPr>
-            <p:cNvPr id="40" name="Rectangle 39">
-              <a:extLst>
-                <a:ext uri="{FF2B5EF4-FFF2-40B4-BE49-F238E27FC236}">
-                  <a16:creationId xmlns:a16="http://schemas.microsoft.com/office/drawing/2014/main" id="{248E56DC-04D6-4514-8581-639195D6C8E4}"/>
-                </a:ext>
-              </a:extLst>
-            </p:cNvPr>
-            <p:cNvSpPr/>
-            <p:nvPr/>
-          </p:nvSpPr>
-          <p:spPr>
-            <a:xfrm>
-              <a:off x="1193800" y="745954"/>
-              <a:ext cx="1659467" cy="880533"/>
-            </a:xfrm>
-            <a:prstGeom prst="rect">
-              <a:avLst/>
-            </a:prstGeom>
-            <a:solidFill>
-              <a:schemeClr val="accent1">
-                <a:lumMod val="40000"/>
-                <a:lumOff val="60000"/>
-              </a:schemeClr>
-            </a:solidFill>
-            <a:ln>
-              <a:solidFill>
-                <a:schemeClr val="accent1">
-                  <a:lumMod val="75000"/>
-                </a:schemeClr>
-              </a:solidFill>
-            </a:ln>
-          </p:spPr>
-          <p:style>
-            <a:lnRef idx="2">
-              <a:schemeClr val="accent5">
-                <a:shade val="50000"/>
-              </a:schemeClr>
-            </a:lnRef>
-            <a:fillRef idx="1">
-              <a:schemeClr val="accent5"/>
-            </a:fillRef>
-            <a:effectRef idx="0">
-              <a:schemeClr val="accent5"/>
-            </a:effectRef>
-            <a:fontRef idx="minor">
-              <a:schemeClr val="lt1"/>
-            </a:fontRef>
-          </p:style>
-          <p:txBody>
-            <a:bodyPr rtlCol="0" anchor="ctr"/>
-            <a:lstStyle/>
-            <a:p>
-              <a:pPr algn="ctr"/>
-              <a:r>
-                <a:rPr lang="fr-FR" dirty="0"/>
-                <a:t>Humain</a:t>
-              </a:r>
-            </a:p>
-          </p:txBody>
-        </p:sp>
-        <p:cxnSp>
-          <p:nvCxnSpPr>
-            <p:cNvPr id="41" name="Connecteur droit avec flèche 40">
-              <a:extLst>
-                <a:ext uri="{FF2B5EF4-FFF2-40B4-BE49-F238E27FC236}">
-                  <a16:creationId xmlns:a16="http://schemas.microsoft.com/office/drawing/2014/main" id="{084830E6-54A0-4390-B044-961F5B950BC5}"/>
-                </a:ext>
-              </a:extLst>
-            </p:cNvPr>
-            <p:cNvCxnSpPr/>
-            <p:nvPr/>
-          </p:nvCxnSpPr>
-          <p:spPr>
-            <a:xfrm>
-              <a:off x="1016000" y="745067"/>
-              <a:ext cx="0" cy="821266"/>
-            </a:xfrm>
-            <a:prstGeom prst="straightConnector1">
-              <a:avLst/>
-            </a:prstGeom>
-            <a:ln>
-              <a:headEnd type="triangle"/>
-              <a:tailEnd type="triangle"/>
-            </a:ln>
-          </p:spPr>
-          <p:style>
-            <a:lnRef idx="1">
-              <a:schemeClr val="accent1"/>
-            </a:lnRef>
-            <a:fillRef idx="0">
-              <a:schemeClr val="accent1"/>
-            </a:fillRef>
-            <a:effectRef idx="0">
-              <a:schemeClr val="accent1"/>
-            </a:effectRef>
-            <a:fontRef idx="minor">
-              <a:schemeClr val="tx1"/>
-            </a:fontRef>
-          </p:style>
-        </p:cxnSp>
-        <p:sp>
-          <p:nvSpPr>
-            <p:cNvPr id="42" name="ZoneTexte 41">
-              <a:extLst>
-                <a:ext uri="{FF2B5EF4-FFF2-40B4-BE49-F238E27FC236}">
-                  <a16:creationId xmlns:a16="http://schemas.microsoft.com/office/drawing/2014/main" id="{E2D3ACDF-5E51-48DE-8050-87366971D5AA}"/>
-                </a:ext>
-              </a:extLst>
-            </p:cNvPr>
-            <p:cNvSpPr txBox="1"/>
-            <p:nvPr/>
-          </p:nvSpPr>
-          <p:spPr>
-            <a:xfrm>
-              <a:off x="270934" y="1069917"/>
-              <a:ext cx="745066" cy="230832"/>
-            </a:xfrm>
-            <a:prstGeom prst="rect">
-              <a:avLst/>
-            </a:prstGeom>
-            <a:noFill/>
-          </p:spPr>
-          <p:txBody>
-            <a:bodyPr wrap="square" rtlCol="0">
-              <a:spAutoFit/>
-            </a:bodyPr>
-            <a:lstStyle/>
-            <a:p>
-              <a:r>
-                <a:rPr lang="fr-FR" sz="900" dirty="0">
-                  <a:latin typeface="Arial" panose="020B0604020202020204" pitchFamily="34" charset="0"/>
-                  <a:cs typeface="Arial" panose="020B0604020202020204" pitchFamily="34" charset="0"/>
-                </a:rPr>
-                <a:t>12 régions</a:t>
-              </a:r>
-            </a:p>
-          </p:txBody>
-        </p:sp>
-        <p:cxnSp>
-          <p:nvCxnSpPr>
-            <p:cNvPr id="43" name="Connecteur droit avec flèche 42">
-              <a:extLst>
-                <a:ext uri="{FF2B5EF4-FFF2-40B4-BE49-F238E27FC236}">
-                  <a16:creationId xmlns:a16="http://schemas.microsoft.com/office/drawing/2014/main" id="{46455CAF-F801-4643-BB0E-28BC07737614}"/>
+                  <a16:creationId xmlns:a16="http://schemas.microsoft.com/office/drawing/2014/main" id="{BCD3604B-B2FE-45B7-948D-D925E12F63C8}"/>
                 </a:ext>
               </a:extLst>
             </p:cNvPr>
@@ -4238,1241 +8500,150 @@
             <p:nvPr/>
           </p:nvCxnSpPr>
           <p:spPr>
-            <a:xfrm>
-              <a:off x="1193800" y="592667"/>
-              <a:ext cx="1659467" cy="0"/>
+            <a:xfrm flipV="1">
+              <a:off x="1028700" y="6232857"/>
+              <a:ext cx="331218" cy="2"/>
             </a:xfrm>
             <a:prstGeom prst="straightConnector1">
               <a:avLst/>
             </a:prstGeom>
             <a:ln>
-              <a:headEnd type="triangle"/>
               <a:tailEnd type="triangle"/>
             </a:ln>
           </p:spPr>
           <p:style>
             <a:lnRef idx="1">
-              <a:schemeClr val="accent1"/>
+              <a:schemeClr val="dk1"/>
             </a:lnRef>
             <a:fillRef idx="0">
-              <a:schemeClr val="accent1"/>
+              <a:schemeClr val="dk1"/>
             </a:fillRef>
             <a:effectRef idx="0">
-              <a:schemeClr val="accent1"/>
+              <a:schemeClr val="dk1"/>
             </a:effectRef>
             <a:fontRef idx="minor">
               <a:schemeClr val="tx1"/>
             </a:fontRef>
           </p:style>
         </p:cxnSp>
-        <p:sp>
-          <p:nvSpPr>
-            <p:cNvPr id="44" name="ZoneTexte 43">
-              <a:extLst>
-                <a:ext uri="{FF2B5EF4-FFF2-40B4-BE49-F238E27FC236}">
-                  <a16:creationId xmlns:a16="http://schemas.microsoft.com/office/drawing/2014/main" id="{7669819F-8761-4D86-96A1-CF36AFE272B8}"/>
-                </a:ext>
-              </a:extLst>
-            </p:cNvPr>
-            <p:cNvSpPr txBox="1"/>
-            <p:nvPr/>
-          </p:nvSpPr>
-          <p:spPr>
-            <a:xfrm>
-              <a:off x="1515533" y="368071"/>
-              <a:ext cx="1143000" cy="230832"/>
-            </a:xfrm>
-            <a:prstGeom prst="rect">
-              <a:avLst/>
-            </a:prstGeom>
-            <a:noFill/>
-          </p:spPr>
-          <p:txBody>
-            <a:bodyPr wrap="square" rtlCol="0">
-              <a:spAutoFit/>
-            </a:bodyPr>
-            <a:lstStyle/>
-            <a:p>
-              <a:r>
-                <a:rPr lang="fr-FR" sz="900" dirty="0">
-                  <a:latin typeface="Arial" panose="020B0604020202020204" pitchFamily="34" charset="0"/>
-                  <a:cs typeface="Arial" panose="020B0604020202020204" pitchFamily="34" charset="0"/>
-                </a:rPr>
-                <a:t> max 3 variables</a:t>
-              </a:r>
-            </a:p>
-          </p:txBody>
-        </p:sp>
+        <mc:AlternateContent xmlns:mc="http://schemas.openxmlformats.org/markup-compatibility/2006">
+          <mc:Choice xmlns:a14="http://schemas.microsoft.com/office/drawing/2010/main" Requires="a14">
+            <p:sp>
+              <p:nvSpPr>
+                <p:cNvPr id="110" name="ZoneTexte 109">
+                  <a:extLst>
+                    <a:ext uri="{FF2B5EF4-FFF2-40B4-BE49-F238E27FC236}">
+                      <a16:creationId xmlns:a16="http://schemas.microsoft.com/office/drawing/2014/main" id="{1150510F-1416-40E4-8413-11C4D9989D93}"/>
+                    </a:ext>
+                  </a:extLst>
+                </p:cNvPr>
+                <p:cNvSpPr txBox="1"/>
+                <p:nvPr/>
+              </p:nvSpPr>
+              <p:spPr>
+                <a:xfrm>
+                  <a:off x="1407008" y="6032648"/>
+                  <a:ext cx="2113010" cy="369332"/>
+                </a:xfrm>
+                <a:prstGeom prst="rect">
+                  <a:avLst/>
+                </a:prstGeom>
+                <a:noFill/>
+              </p:spPr>
+              <p:txBody>
+                <a:bodyPr wrap="square" rtlCol="0">
+                  <a:spAutoFit/>
+                </a:bodyPr>
+                <a:lstStyle/>
+                <a:p>
+                  <a:r>
+                    <a:rPr lang="fr-FR" dirty="0"/>
+                    <a:t>Path coefficients </a:t>
+                  </a:r>
+                  <a14:m>
+                    <m:oMath xmlns:m="http://schemas.openxmlformats.org/officeDocument/2006/math">
+                      <m:sSub>
+                        <m:sSubPr>
+                          <m:ctrlPr>
+                            <a:rPr lang="fr-FR" i="1" smtClean="0">
+                              <a:latin typeface="Cambria Math" panose="02040503050406030204" pitchFamily="18" charset="0"/>
+                            </a:rPr>
+                          </m:ctrlPr>
+                        </m:sSubPr>
+                        <m:e>
+                          <m:r>
+                            <a:rPr lang="fr-FR" b="0" i="1" smtClean="0">
+                              <a:latin typeface="Cambria Math" panose="02040503050406030204" pitchFamily="18" charset="0"/>
+                            </a:rPr>
+                            <m:t>𝑏</m:t>
+                          </m:r>
+                        </m:e>
+                        <m:sub>
+                          <m:r>
+                            <a:rPr lang="fr-FR" b="0" i="1" smtClean="0">
+                              <a:latin typeface="Cambria Math" panose="02040503050406030204" pitchFamily="18" charset="0"/>
+                            </a:rPr>
+                            <m:t>𝑘</m:t>
+                          </m:r>
+                        </m:sub>
+                      </m:sSub>
+                    </m:oMath>
+                  </a14:m>
+                  <a:endParaRPr lang="fr-FR" dirty="0"/>
+                </a:p>
+              </p:txBody>
+            </p:sp>
+          </mc:Choice>
+          <mc:Fallback>
+            <p:sp>
+              <p:nvSpPr>
+                <p:cNvPr id="110" name="ZoneTexte 109">
+                  <a:extLst>
+                    <a:ext uri="{FF2B5EF4-FFF2-40B4-BE49-F238E27FC236}">
+                      <a16:creationId xmlns:a16="http://schemas.microsoft.com/office/drawing/2014/main" id="{1150510F-1416-40E4-8413-11C4D9989D93}"/>
+                    </a:ext>
+                  </a:extLst>
+                </p:cNvPr>
+                <p:cNvSpPr txBox="1">
+                  <a:spLocks noRot="1" noChangeAspect="1" noMove="1" noResize="1" noEditPoints="1" noAdjustHandles="1" noChangeArrowheads="1" noChangeShapeType="1" noTextEdit="1"/>
+                </p:cNvSpPr>
+                <p:nvPr/>
+              </p:nvSpPr>
+              <p:spPr>
+                <a:xfrm>
+                  <a:off x="1407008" y="6032648"/>
+                  <a:ext cx="2113010" cy="369332"/>
+                </a:xfrm>
+                <a:prstGeom prst="rect">
+                  <a:avLst/>
+                </a:prstGeom>
+                <a:blipFill>
+                  <a:blip r:embed="rId4"/>
+                  <a:stretch>
+                    <a:fillRect l="-2601" t="-10000" b="-26667"/>
+                  </a:stretch>
+                </a:blipFill>
+              </p:spPr>
+              <p:txBody>
+                <a:bodyPr/>
+                <a:lstStyle/>
+                <a:p>
+                  <a:r>
+                    <a:rPr lang="fr-FR">
+                      <a:noFill/>
+                    </a:rPr>
+                    <a:t> </a:t>
+                  </a:r>
+                </a:p>
+              </p:txBody>
+            </p:sp>
+          </mc:Fallback>
+        </mc:AlternateContent>
       </p:grpSp>
-      <p:sp>
-        <p:nvSpPr>
-          <p:cNvPr id="55" name="Ellipse 54">
-            <a:extLst>
-              <a:ext uri="{FF2B5EF4-FFF2-40B4-BE49-F238E27FC236}">
-                <a16:creationId xmlns:a16="http://schemas.microsoft.com/office/drawing/2014/main" id="{74A41B7F-8B14-4868-99CF-8907F89937AE}"/>
-              </a:ext>
-            </a:extLst>
-          </p:cNvPr>
-          <p:cNvSpPr/>
-          <p:nvPr/>
-        </p:nvSpPr>
-        <p:spPr>
-          <a:xfrm>
-            <a:off x="5202767" y="2152553"/>
-            <a:ext cx="643466" cy="558798"/>
-          </a:xfrm>
-          <a:prstGeom prst="ellipse">
-            <a:avLst/>
-          </a:prstGeom>
-          <a:solidFill>
-            <a:schemeClr val="bg2"/>
-          </a:solidFill>
-          <a:ln>
-            <a:solidFill>
-              <a:schemeClr val="tx1"/>
-            </a:solidFill>
-          </a:ln>
-        </p:spPr>
-        <p:style>
-          <a:lnRef idx="2">
-            <a:schemeClr val="accent3">
-              <a:shade val="50000"/>
-            </a:schemeClr>
-          </a:lnRef>
-          <a:fillRef idx="1">
-            <a:schemeClr val="accent3"/>
-          </a:fillRef>
-          <a:effectRef idx="0">
-            <a:schemeClr val="accent3"/>
-          </a:effectRef>
-          <a:fontRef idx="minor">
-            <a:schemeClr val="lt1"/>
-          </a:fontRef>
-        </p:style>
-        <p:txBody>
-          <a:bodyPr rtlCol="0" anchor="ctr"/>
-          <a:lstStyle/>
-          <a:p>
-            <a:pPr algn="ctr"/>
-            <a:r>
-              <a:rPr lang="fr-FR" dirty="0">
-                <a:solidFill>
-                  <a:schemeClr val="tx1"/>
-                </a:solidFill>
-              </a:rPr>
-              <a:t>t</a:t>
-            </a:r>
-            <a:r>
-              <a:rPr lang="fr-FR" baseline="-25000" dirty="0">
-                <a:solidFill>
-                  <a:schemeClr val="tx1"/>
-                </a:solidFill>
-              </a:rPr>
-              <a:t>2</a:t>
-            </a:r>
-          </a:p>
-        </p:txBody>
-      </p:sp>
-      <p:sp>
-        <p:nvSpPr>
-          <p:cNvPr id="56" name="Ellipse 55">
-            <a:extLst>
-              <a:ext uri="{FF2B5EF4-FFF2-40B4-BE49-F238E27FC236}">
-                <a16:creationId xmlns:a16="http://schemas.microsoft.com/office/drawing/2014/main" id="{89B56BEC-32A7-401A-9A46-9877A785C0F8}"/>
-              </a:ext>
-            </a:extLst>
-          </p:cNvPr>
-          <p:cNvSpPr/>
-          <p:nvPr/>
-        </p:nvSpPr>
-        <p:spPr>
-          <a:xfrm>
-            <a:off x="3198285" y="3076302"/>
-            <a:ext cx="643466" cy="558798"/>
-          </a:xfrm>
-          <a:prstGeom prst="ellipse">
-            <a:avLst/>
-          </a:prstGeom>
-          <a:solidFill>
-            <a:schemeClr val="bg2"/>
-          </a:solidFill>
-          <a:ln>
-            <a:solidFill>
-              <a:schemeClr val="tx1"/>
-            </a:solidFill>
-          </a:ln>
-        </p:spPr>
-        <p:style>
-          <a:lnRef idx="2">
-            <a:schemeClr val="accent3">
-              <a:shade val="50000"/>
-            </a:schemeClr>
-          </a:lnRef>
-          <a:fillRef idx="1">
-            <a:schemeClr val="accent3"/>
-          </a:fillRef>
-          <a:effectRef idx="0">
-            <a:schemeClr val="accent3"/>
-          </a:effectRef>
-          <a:fontRef idx="minor">
-            <a:schemeClr val="lt1"/>
-          </a:fontRef>
-        </p:style>
-        <p:txBody>
-          <a:bodyPr rtlCol="0" anchor="ctr"/>
-          <a:lstStyle/>
-          <a:p>
-            <a:pPr algn="ctr"/>
-            <a:r>
-              <a:rPr lang="fr-FR" dirty="0">
-                <a:solidFill>
-                  <a:schemeClr val="tx1"/>
-                </a:solidFill>
-              </a:rPr>
-              <a:t>t</a:t>
-            </a:r>
-            <a:r>
-              <a:rPr lang="fr-FR" baseline="-25000" dirty="0">
-                <a:solidFill>
-                  <a:schemeClr val="tx1"/>
-                </a:solidFill>
-              </a:rPr>
-              <a:t>4</a:t>
-            </a:r>
-          </a:p>
-        </p:txBody>
-      </p:sp>
-      <p:grpSp>
-        <p:nvGrpSpPr>
-          <p:cNvPr id="60" name="Groupe 59">
-            <a:extLst>
-              <a:ext uri="{FF2B5EF4-FFF2-40B4-BE49-F238E27FC236}">
-                <a16:creationId xmlns:a16="http://schemas.microsoft.com/office/drawing/2014/main" id="{FDCA1811-6CFC-4654-8487-35124C8C3764}"/>
-              </a:ext>
-            </a:extLst>
-          </p:cNvPr>
-          <p:cNvGrpSpPr/>
-          <p:nvPr/>
-        </p:nvGrpSpPr>
-        <p:grpSpPr>
-          <a:xfrm>
-            <a:off x="9040281" y="1669621"/>
-            <a:ext cx="1862667" cy="1306770"/>
-            <a:chOff x="270934" y="318830"/>
-            <a:chExt cx="1862667" cy="1306770"/>
-          </a:xfrm>
-        </p:grpSpPr>
-        <p:sp>
-          <p:nvSpPr>
-            <p:cNvPr id="61" name="Rectangle 60">
-              <a:extLst>
-                <a:ext uri="{FF2B5EF4-FFF2-40B4-BE49-F238E27FC236}">
-                  <a16:creationId xmlns:a16="http://schemas.microsoft.com/office/drawing/2014/main" id="{37E09C4B-2FA3-4D73-A1BA-DC779677F558}"/>
-                </a:ext>
-              </a:extLst>
-            </p:cNvPr>
-            <p:cNvSpPr/>
-            <p:nvPr/>
-          </p:nvSpPr>
-          <p:spPr>
-            <a:xfrm>
-              <a:off x="1193800" y="745067"/>
-              <a:ext cx="529167" cy="880533"/>
-            </a:xfrm>
-            <a:prstGeom prst="rect">
-              <a:avLst/>
-            </a:prstGeom>
-            <a:solidFill>
-              <a:schemeClr val="accent2">
-                <a:lumMod val="40000"/>
-                <a:lumOff val="60000"/>
-              </a:schemeClr>
-            </a:solidFill>
-            <a:ln/>
-          </p:spPr>
-          <p:style>
-            <a:lnRef idx="2">
-              <a:schemeClr val="accent2"/>
-            </a:lnRef>
-            <a:fillRef idx="1">
-              <a:schemeClr val="lt1"/>
-            </a:fillRef>
-            <a:effectRef idx="0">
-              <a:schemeClr val="accent2"/>
-            </a:effectRef>
-            <a:fontRef idx="minor">
-              <a:schemeClr val="dk1"/>
-            </a:fontRef>
-          </p:style>
-          <p:txBody>
-            <a:bodyPr rtlCol="0" anchor="ctr"/>
-            <a:lstStyle/>
-            <a:p>
-              <a:pPr algn="ctr"/>
-              <a:r>
-                <a:rPr lang="fr-FR" dirty="0"/>
-                <a:t>Y</a:t>
-              </a:r>
-            </a:p>
-          </p:txBody>
-        </p:sp>
-        <p:cxnSp>
-          <p:nvCxnSpPr>
-            <p:cNvPr id="62" name="Connecteur droit avec flèche 61">
-              <a:extLst>
-                <a:ext uri="{FF2B5EF4-FFF2-40B4-BE49-F238E27FC236}">
-                  <a16:creationId xmlns:a16="http://schemas.microsoft.com/office/drawing/2014/main" id="{E12D763A-03B0-440C-A97F-B619A2E669E6}"/>
-                </a:ext>
-              </a:extLst>
-            </p:cNvPr>
-            <p:cNvCxnSpPr/>
-            <p:nvPr/>
-          </p:nvCxnSpPr>
-          <p:spPr>
-            <a:xfrm>
-              <a:off x="1016000" y="745067"/>
-              <a:ext cx="0" cy="821266"/>
-            </a:xfrm>
-            <a:prstGeom prst="straightConnector1">
-              <a:avLst/>
-            </a:prstGeom>
-            <a:ln>
-              <a:headEnd type="triangle"/>
-              <a:tailEnd type="triangle"/>
-            </a:ln>
-          </p:spPr>
-          <p:style>
-            <a:lnRef idx="1">
-              <a:schemeClr val="accent1"/>
-            </a:lnRef>
-            <a:fillRef idx="0">
-              <a:schemeClr val="accent1"/>
-            </a:fillRef>
-            <a:effectRef idx="0">
-              <a:schemeClr val="accent1"/>
-            </a:effectRef>
-            <a:fontRef idx="minor">
-              <a:schemeClr val="tx1"/>
-            </a:fontRef>
-          </p:style>
-        </p:cxnSp>
-        <p:sp>
-          <p:nvSpPr>
-            <p:cNvPr id="63" name="ZoneTexte 62">
-              <a:extLst>
-                <a:ext uri="{FF2B5EF4-FFF2-40B4-BE49-F238E27FC236}">
-                  <a16:creationId xmlns:a16="http://schemas.microsoft.com/office/drawing/2014/main" id="{967EAD35-89EE-4B20-AD20-08F5793FF116}"/>
-                </a:ext>
-              </a:extLst>
-            </p:cNvPr>
-            <p:cNvSpPr txBox="1"/>
-            <p:nvPr/>
-          </p:nvSpPr>
-          <p:spPr>
-            <a:xfrm>
-              <a:off x="270934" y="1069917"/>
-              <a:ext cx="745066" cy="230832"/>
-            </a:xfrm>
-            <a:prstGeom prst="rect">
-              <a:avLst/>
-            </a:prstGeom>
-            <a:noFill/>
-          </p:spPr>
-          <p:txBody>
-            <a:bodyPr wrap="square" rtlCol="0">
-              <a:spAutoFit/>
-            </a:bodyPr>
-            <a:lstStyle/>
-            <a:p>
-              <a:r>
-                <a:rPr lang="fr-FR" sz="900" dirty="0">
-                  <a:latin typeface="Arial" panose="020B0604020202020204" pitchFamily="34" charset="0"/>
-                  <a:cs typeface="Arial" panose="020B0604020202020204" pitchFamily="34" charset="0"/>
-                </a:rPr>
-                <a:t>12 régions</a:t>
-              </a:r>
-            </a:p>
-          </p:txBody>
-        </p:sp>
-        <p:cxnSp>
-          <p:nvCxnSpPr>
-            <p:cNvPr id="64" name="Connecteur droit avec flèche 63">
-              <a:extLst>
-                <a:ext uri="{FF2B5EF4-FFF2-40B4-BE49-F238E27FC236}">
-                  <a16:creationId xmlns:a16="http://schemas.microsoft.com/office/drawing/2014/main" id="{EE032EF4-A1DC-4DAF-A752-EFFBCF8E5108}"/>
-                </a:ext>
-              </a:extLst>
-            </p:cNvPr>
-            <p:cNvCxnSpPr>
-              <a:cxnSpLocks/>
-            </p:cNvCxnSpPr>
-            <p:nvPr/>
-          </p:nvCxnSpPr>
-          <p:spPr>
-            <a:xfrm>
-              <a:off x="1193800" y="592667"/>
-              <a:ext cx="529167" cy="0"/>
-            </a:xfrm>
-            <a:prstGeom prst="straightConnector1">
-              <a:avLst/>
-            </a:prstGeom>
-            <a:ln>
-              <a:headEnd type="triangle"/>
-              <a:tailEnd type="triangle"/>
-            </a:ln>
-          </p:spPr>
-          <p:style>
-            <a:lnRef idx="1">
-              <a:schemeClr val="accent1"/>
-            </a:lnRef>
-            <a:fillRef idx="0">
-              <a:schemeClr val="accent1"/>
-            </a:fillRef>
-            <a:effectRef idx="0">
-              <a:schemeClr val="accent1"/>
-            </a:effectRef>
-            <a:fontRef idx="minor">
-              <a:schemeClr val="tx1"/>
-            </a:fontRef>
-          </p:style>
-        </p:cxnSp>
-        <p:sp>
-          <p:nvSpPr>
-            <p:cNvPr id="65" name="ZoneTexte 64">
-              <a:extLst>
-                <a:ext uri="{FF2B5EF4-FFF2-40B4-BE49-F238E27FC236}">
-                  <a16:creationId xmlns:a16="http://schemas.microsoft.com/office/drawing/2014/main" id="{489AD634-96B9-4903-B1A4-7391D77279AC}"/>
-                </a:ext>
-              </a:extLst>
-            </p:cNvPr>
-            <p:cNvSpPr txBox="1"/>
-            <p:nvPr/>
-          </p:nvSpPr>
-          <p:spPr>
-            <a:xfrm>
-              <a:off x="990601" y="318830"/>
-              <a:ext cx="1143000" cy="230832"/>
-            </a:xfrm>
-            <a:prstGeom prst="rect">
-              <a:avLst/>
-            </a:prstGeom>
-            <a:noFill/>
-          </p:spPr>
-          <p:txBody>
-            <a:bodyPr wrap="square" rtlCol="0">
-              <a:spAutoFit/>
-            </a:bodyPr>
-            <a:lstStyle/>
-            <a:p>
-              <a:r>
-                <a:rPr lang="fr-FR" sz="900" dirty="0">
-                  <a:latin typeface="Arial" panose="020B0604020202020204" pitchFamily="34" charset="0"/>
-                  <a:cs typeface="Arial" panose="020B0604020202020204" pitchFamily="34" charset="0"/>
-                </a:rPr>
-                <a:t> max 1 variable</a:t>
-              </a:r>
-            </a:p>
-          </p:txBody>
-        </p:sp>
-      </p:grpSp>
-      <p:sp>
-        <p:nvSpPr>
-          <p:cNvPr id="83" name="Ellipse 82">
-            <a:extLst>
-              <a:ext uri="{FF2B5EF4-FFF2-40B4-BE49-F238E27FC236}">
-                <a16:creationId xmlns:a16="http://schemas.microsoft.com/office/drawing/2014/main" id="{C1842BC6-A26B-41CC-9940-91F9885286AD}"/>
-              </a:ext>
-            </a:extLst>
-          </p:cNvPr>
-          <p:cNvSpPr/>
-          <p:nvPr/>
-        </p:nvSpPr>
-        <p:spPr>
-          <a:xfrm>
-            <a:off x="5202767" y="3939906"/>
-            <a:ext cx="643466" cy="558798"/>
-          </a:xfrm>
-          <a:prstGeom prst="ellipse">
-            <a:avLst/>
-          </a:prstGeom>
-          <a:solidFill>
-            <a:schemeClr val="bg2"/>
-          </a:solidFill>
-          <a:ln>
-            <a:solidFill>
-              <a:schemeClr val="tx1"/>
-            </a:solidFill>
-          </a:ln>
-        </p:spPr>
-        <p:style>
-          <a:lnRef idx="2">
-            <a:schemeClr val="accent3">
-              <a:shade val="50000"/>
-            </a:schemeClr>
-          </a:lnRef>
-          <a:fillRef idx="1">
-            <a:schemeClr val="accent3"/>
-          </a:fillRef>
-          <a:effectRef idx="0">
-            <a:schemeClr val="accent3"/>
-          </a:effectRef>
-          <a:fontRef idx="minor">
-            <a:schemeClr val="lt1"/>
-          </a:fontRef>
-        </p:style>
-        <p:txBody>
-          <a:bodyPr rtlCol="0" anchor="ctr"/>
-          <a:lstStyle/>
-          <a:p>
-            <a:pPr algn="ctr"/>
-            <a:r>
-              <a:rPr lang="fr-FR" dirty="0">
-                <a:solidFill>
-                  <a:schemeClr val="tx1"/>
-                </a:solidFill>
-              </a:rPr>
-              <a:t>t</a:t>
-            </a:r>
-            <a:r>
-              <a:rPr lang="fr-FR" baseline="-25000" dirty="0">
-                <a:solidFill>
-                  <a:schemeClr val="tx1"/>
-                </a:solidFill>
-              </a:rPr>
-              <a:t>3</a:t>
-            </a:r>
-          </a:p>
-        </p:txBody>
-      </p:sp>
-      <p:sp>
-        <p:nvSpPr>
-          <p:cNvPr id="86" name="Ellipse 85">
-            <a:extLst>
-              <a:ext uri="{FF2B5EF4-FFF2-40B4-BE49-F238E27FC236}">
-                <a16:creationId xmlns:a16="http://schemas.microsoft.com/office/drawing/2014/main" id="{A614A312-4AE6-4A69-8B72-B20545BF2321}"/>
-              </a:ext>
-            </a:extLst>
-          </p:cNvPr>
-          <p:cNvSpPr/>
-          <p:nvPr/>
-        </p:nvSpPr>
-        <p:spPr>
-          <a:xfrm>
-            <a:off x="8147048" y="3465767"/>
-            <a:ext cx="643466" cy="558798"/>
-          </a:xfrm>
-          <a:prstGeom prst="ellipse">
-            <a:avLst/>
-          </a:prstGeom>
-          <a:solidFill>
-            <a:schemeClr val="bg2"/>
-          </a:solidFill>
-          <a:ln>
-            <a:solidFill>
-              <a:schemeClr val="tx1"/>
-            </a:solidFill>
-          </a:ln>
-        </p:spPr>
-        <p:style>
-          <a:lnRef idx="2">
-            <a:schemeClr val="accent3">
-              <a:shade val="50000"/>
-            </a:schemeClr>
-          </a:lnRef>
-          <a:fillRef idx="1">
-            <a:schemeClr val="accent3"/>
-          </a:fillRef>
-          <a:effectRef idx="0">
-            <a:schemeClr val="accent3"/>
-          </a:effectRef>
-          <a:fontRef idx="minor">
-            <a:schemeClr val="lt1"/>
-          </a:fontRef>
-        </p:style>
-        <p:txBody>
-          <a:bodyPr rtlCol="0" anchor="ctr"/>
-          <a:lstStyle/>
-          <a:p>
-            <a:pPr algn="ctr"/>
-            <a:r>
-              <a:rPr lang="fr-FR" dirty="0">
-                <a:solidFill>
-                  <a:schemeClr val="tx1"/>
-                </a:solidFill>
-              </a:rPr>
-              <a:t>t</a:t>
-            </a:r>
-            <a:r>
-              <a:rPr lang="fr-FR" baseline="-25000" dirty="0">
-                <a:solidFill>
-                  <a:schemeClr val="tx1"/>
-                </a:solidFill>
-              </a:rPr>
-              <a:t>1</a:t>
-            </a:r>
-          </a:p>
-        </p:txBody>
-      </p:sp>
-      <p:cxnSp>
-        <p:nvCxnSpPr>
-          <p:cNvPr id="9" name="Connecteur droit 8">
-            <a:extLst>
-              <a:ext uri="{FF2B5EF4-FFF2-40B4-BE49-F238E27FC236}">
-                <a16:creationId xmlns:a16="http://schemas.microsoft.com/office/drawing/2014/main" id="{87E5FD23-E975-439D-B0AA-32809D704A39}"/>
-              </a:ext>
-            </a:extLst>
-          </p:cNvPr>
-          <p:cNvCxnSpPr>
-            <a:stCxn id="40" idx="3"/>
-            <a:endCxn id="56" idx="2"/>
-          </p:cNvCxnSpPr>
-          <p:nvPr/>
-        </p:nvCxnSpPr>
-        <p:spPr>
-          <a:xfrm flipV="1">
-            <a:off x="2688167" y="3355701"/>
-            <a:ext cx="510118" cy="48573"/>
-          </a:xfrm>
-          <a:prstGeom prst="line">
-            <a:avLst/>
-          </a:prstGeom>
-        </p:spPr>
-        <p:style>
-          <a:lnRef idx="1">
-            <a:schemeClr val="accent1"/>
-          </a:lnRef>
-          <a:fillRef idx="0">
-            <a:schemeClr val="accent1"/>
-          </a:fillRef>
-          <a:effectRef idx="0">
-            <a:schemeClr val="accent1"/>
-          </a:effectRef>
-          <a:fontRef idx="minor">
-            <a:schemeClr val="tx1"/>
-          </a:fontRef>
-        </p:style>
-      </p:cxnSp>
-      <p:cxnSp>
-        <p:nvCxnSpPr>
-          <p:cNvPr id="87" name="Connecteur droit 86">
-            <a:extLst>
-              <a:ext uri="{FF2B5EF4-FFF2-40B4-BE49-F238E27FC236}">
-                <a16:creationId xmlns:a16="http://schemas.microsoft.com/office/drawing/2014/main" id="{90BCFD3A-51F0-41F8-9779-74B91B4BB72A}"/>
-              </a:ext>
-            </a:extLst>
-          </p:cNvPr>
-          <p:cNvCxnSpPr>
-            <a:cxnSpLocks/>
-            <a:stCxn id="55" idx="0"/>
-          </p:cNvCxnSpPr>
-          <p:nvPr/>
-        </p:nvCxnSpPr>
-        <p:spPr>
-          <a:xfrm flipV="1">
-            <a:off x="5524500" y="1669621"/>
-            <a:ext cx="152400" cy="482932"/>
-          </a:xfrm>
-          <a:prstGeom prst="line">
-            <a:avLst/>
-          </a:prstGeom>
-        </p:spPr>
-        <p:style>
-          <a:lnRef idx="1">
-            <a:schemeClr val="accent1"/>
-          </a:lnRef>
-          <a:fillRef idx="0">
-            <a:schemeClr val="accent1"/>
-          </a:fillRef>
-          <a:effectRef idx="0">
-            <a:schemeClr val="accent1"/>
-          </a:effectRef>
-          <a:fontRef idx="minor">
-            <a:schemeClr val="tx1"/>
-          </a:fontRef>
-        </p:style>
-      </p:cxnSp>
-      <p:cxnSp>
-        <p:nvCxnSpPr>
-          <p:cNvPr id="89" name="Connecteur droit 88">
-            <a:extLst>
-              <a:ext uri="{FF2B5EF4-FFF2-40B4-BE49-F238E27FC236}">
-                <a16:creationId xmlns:a16="http://schemas.microsoft.com/office/drawing/2014/main" id="{19305432-3DBB-4E6F-AB21-C0863F67B497}"/>
-              </a:ext>
-            </a:extLst>
-          </p:cNvPr>
-          <p:cNvCxnSpPr>
-            <a:cxnSpLocks/>
-            <a:endCxn id="83" idx="4"/>
-          </p:cNvCxnSpPr>
-          <p:nvPr/>
-        </p:nvCxnSpPr>
-        <p:spPr>
-          <a:xfrm flipH="1" flipV="1">
-            <a:off x="5524500" y="4498704"/>
-            <a:ext cx="63500" cy="562464"/>
-          </a:xfrm>
-          <a:prstGeom prst="line">
-            <a:avLst/>
-          </a:prstGeom>
-        </p:spPr>
-        <p:style>
-          <a:lnRef idx="1">
-            <a:schemeClr val="accent1"/>
-          </a:lnRef>
-          <a:fillRef idx="0">
-            <a:schemeClr val="accent1"/>
-          </a:fillRef>
-          <a:effectRef idx="0">
-            <a:schemeClr val="accent1"/>
-          </a:effectRef>
-          <a:fontRef idx="minor">
-            <a:schemeClr val="tx1"/>
-          </a:fontRef>
-        </p:style>
-      </p:cxnSp>
-      <p:cxnSp>
-        <p:nvCxnSpPr>
-          <p:cNvPr id="91" name="Connecteur droit 90">
-            <a:extLst>
-              <a:ext uri="{FF2B5EF4-FFF2-40B4-BE49-F238E27FC236}">
-                <a16:creationId xmlns:a16="http://schemas.microsoft.com/office/drawing/2014/main" id="{F0BAA152-E957-4290-879D-BA430D576440}"/>
-              </a:ext>
-            </a:extLst>
-          </p:cNvPr>
-          <p:cNvCxnSpPr>
-            <a:cxnSpLocks/>
-            <a:stCxn id="4" idx="0"/>
-            <a:endCxn id="86" idx="4"/>
-          </p:cNvCxnSpPr>
-          <p:nvPr/>
-        </p:nvCxnSpPr>
-        <p:spPr>
-          <a:xfrm flipH="1" flipV="1">
-            <a:off x="8468781" y="4024565"/>
-            <a:ext cx="508001" cy="706070"/>
-          </a:xfrm>
-          <a:prstGeom prst="line">
-            <a:avLst/>
-          </a:prstGeom>
-        </p:spPr>
-        <p:style>
-          <a:lnRef idx="1">
-            <a:schemeClr val="accent1"/>
-          </a:lnRef>
-          <a:fillRef idx="0">
-            <a:schemeClr val="accent1"/>
-          </a:fillRef>
-          <a:effectRef idx="0">
-            <a:schemeClr val="accent1"/>
-          </a:effectRef>
-          <a:fontRef idx="minor">
-            <a:schemeClr val="tx1"/>
-          </a:fontRef>
-        </p:style>
-      </p:cxnSp>
-      <p:cxnSp>
-        <p:nvCxnSpPr>
-          <p:cNvPr id="71" name="Connecteur droit avec flèche 70">
-            <a:extLst>
-              <a:ext uri="{FF2B5EF4-FFF2-40B4-BE49-F238E27FC236}">
-                <a16:creationId xmlns:a16="http://schemas.microsoft.com/office/drawing/2014/main" id="{EB4C53B0-33A0-4C3E-90F5-F0DCA6E2DC82}"/>
-              </a:ext>
-            </a:extLst>
-          </p:cNvPr>
-          <p:cNvCxnSpPr>
-            <a:stCxn id="56" idx="7"/>
-            <a:endCxn id="55" idx="2"/>
-          </p:cNvCxnSpPr>
-          <p:nvPr/>
-        </p:nvCxnSpPr>
-        <p:spPr>
-          <a:xfrm flipV="1">
-            <a:off x="3747518" y="2431952"/>
-            <a:ext cx="1455249" cy="726184"/>
-          </a:xfrm>
-          <a:prstGeom prst="straightConnector1">
-            <a:avLst/>
-          </a:prstGeom>
-          <a:ln>
-            <a:headEnd type="triangle"/>
-            <a:tailEnd type="triangle"/>
-          </a:ln>
-        </p:spPr>
-        <p:style>
-          <a:lnRef idx="1">
-            <a:schemeClr val="accent6"/>
-          </a:lnRef>
-          <a:fillRef idx="0">
-            <a:schemeClr val="accent6"/>
-          </a:fillRef>
-          <a:effectRef idx="0">
-            <a:schemeClr val="accent6"/>
-          </a:effectRef>
-          <a:fontRef idx="minor">
-            <a:schemeClr val="tx1"/>
-          </a:fontRef>
-        </p:style>
-      </p:cxnSp>
-      <p:cxnSp>
-        <p:nvCxnSpPr>
-          <p:cNvPr id="77" name="Connecteur droit avec flèche 76">
-            <a:extLst>
-              <a:ext uri="{FF2B5EF4-FFF2-40B4-BE49-F238E27FC236}">
-                <a16:creationId xmlns:a16="http://schemas.microsoft.com/office/drawing/2014/main" id="{F7A96C17-B3D7-4203-A4D0-86AAB47C13EE}"/>
-              </a:ext>
-            </a:extLst>
-          </p:cNvPr>
-          <p:cNvCxnSpPr>
-            <a:stCxn id="56" idx="5"/>
-            <a:endCxn id="83" idx="1"/>
-          </p:cNvCxnSpPr>
-          <p:nvPr/>
-        </p:nvCxnSpPr>
-        <p:spPr>
-          <a:xfrm>
-            <a:off x="3747518" y="3553266"/>
-            <a:ext cx="1549482" cy="468474"/>
-          </a:xfrm>
-          <a:prstGeom prst="straightConnector1">
-            <a:avLst/>
-          </a:prstGeom>
-          <a:ln>
-            <a:headEnd type="triangle"/>
-            <a:tailEnd type="triangle"/>
-          </a:ln>
-        </p:spPr>
-        <p:style>
-          <a:lnRef idx="1">
-            <a:schemeClr val="accent6"/>
-          </a:lnRef>
-          <a:fillRef idx="0">
-            <a:schemeClr val="accent6"/>
-          </a:fillRef>
-          <a:effectRef idx="0">
-            <a:schemeClr val="accent6"/>
-          </a:effectRef>
-          <a:fontRef idx="minor">
-            <a:schemeClr val="tx1"/>
-          </a:fontRef>
-        </p:style>
-      </p:cxnSp>
-      <p:cxnSp>
-        <p:nvCxnSpPr>
-          <p:cNvPr id="97" name="Connecteur droit avec flèche 96">
-            <a:extLst>
-              <a:ext uri="{FF2B5EF4-FFF2-40B4-BE49-F238E27FC236}">
-                <a16:creationId xmlns:a16="http://schemas.microsoft.com/office/drawing/2014/main" id="{244CE777-55BB-43E1-A3F2-7E4552216145}"/>
-              </a:ext>
-            </a:extLst>
-          </p:cNvPr>
-          <p:cNvCxnSpPr>
-            <a:cxnSpLocks/>
-            <a:endCxn id="83" idx="0"/>
-          </p:cNvCxnSpPr>
-          <p:nvPr/>
-        </p:nvCxnSpPr>
-        <p:spPr>
-          <a:xfrm>
-            <a:off x="5496310" y="2706669"/>
-            <a:ext cx="28190" cy="1233237"/>
-          </a:xfrm>
-          <a:prstGeom prst="straightConnector1">
-            <a:avLst/>
-          </a:prstGeom>
-          <a:ln>
-            <a:headEnd type="triangle"/>
-            <a:tailEnd type="triangle"/>
-          </a:ln>
-        </p:spPr>
-        <p:style>
-          <a:lnRef idx="1">
-            <a:schemeClr val="accent6"/>
-          </a:lnRef>
-          <a:fillRef idx="0">
-            <a:schemeClr val="accent6"/>
-          </a:fillRef>
-          <a:effectRef idx="0">
-            <a:schemeClr val="accent6"/>
-          </a:effectRef>
-          <a:fontRef idx="minor">
-            <a:schemeClr val="tx1"/>
-          </a:fontRef>
-        </p:style>
-      </p:cxnSp>
-      <p:cxnSp>
-        <p:nvCxnSpPr>
-          <p:cNvPr id="101" name="Connecteur droit avec flèche 100">
-            <a:extLst>
-              <a:ext uri="{FF2B5EF4-FFF2-40B4-BE49-F238E27FC236}">
-                <a16:creationId xmlns:a16="http://schemas.microsoft.com/office/drawing/2014/main" id="{6D6723AA-2943-4961-9FD5-220254AAEDD0}"/>
-              </a:ext>
-            </a:extLst>
-          </p:cNvPr>
-          <p:cNvCxnSpPr>
-            <a:cxnSpLocks/>
-            <a:stCxn id="56" idx="6"/>
-            <a:endCxn id="86" idx="2"/>
-          </p:cNvCxnSpPr>
-          <p:nvPr/>
-        </p:nvCxnSpPr>
-        <p:spPr>
-          <a:xfrm>
-            <a:off x="3841751" y="3355701"/>
-            <a:ext cx="4305297" cy="389465"/>
-          </a:xfrm>
-          <a:prstGeom prst="straightConnector1">
-            <a:avLst/>
-          </a:prstGeom>
-          <a:ln>
-            <a:tailEnd type="triangle"/>
-          </a:ln>
-        </p:spPr>
-        <p:style>
-          <a:lnRef idx="1">
-            <a:schemeClr val="dk1"/>
-          </a:lnRef>
-          <a:fillRef idx="0">
-            <a:schemeClr val="dk1"/>
-          </a:fillRef>
-          <a:effectRef idx="0">
-            <a:schemeClr val="dk1"/>
-          </a:effectRef>
-          <a:fontRef idx="minor">
-            <a:schemeClr val="tx1"/>
-          </a:fontRef>
-        </p:style>
-      </p:cxnSp>
-      <p:cxnSp>
-        <p:nvCxnSpPr>
-          <p:cNvPr id="104" name="Connecteur droit avec flèche 103">
-            <a:extLst>
-              <a:ext uri="{FF2B5EF4-FFF2-40B4-BE49-F238E27FC236}">
-                <a16:creationId xmlns:a16="http://schemas.microsoft.com/office/drawing/2014/main" id="{4F173E60-0876-487C-A09D-58F4FD00B860}"/>
-              </a:ext>
-            </a:extLst>
-          </p:cNvPr>
-          <p:cNvCxnSpPr>
-            <a:cxnSpLocks/>
-            <a:stCxn id="83" idx="6"/>
-            <a:endCxn id="86" idx="3"/>
-          </p:cNvCxnSpPr>
-          <p:nvPr/>
-        </p:nvCxnSpPr>
-        <p:spPr>
-          <a:xfrm flipV="1">
-            <a:off x="5846233" y="3942731"/>
-            <a:ext cx="2395048" cy="276574"/>
-          </a:xfrm>
-          <a:prstGeom prst="straightConnector1">
-            <a:avLst/>
-          </a:prstGeom>
-          <a:ln>
-            <a:tailEnd type="triangle"/>
-          </a:ln>
-        </p:spPr>
-        <p:style>
-          <a:lnRef idx="1">
-            <a:schemeClr val="dk1"/>
-          </a:lnRef>
-          <a:fillRef idx="0">
-            <a:schemeClr val="dk1"/>
-          </a:fillRef>
-          <a:effectRef idx="0">
-            <a:schemeClr val="dk1"/>
-          </a:effectRef>
-          <a:fontRef idx="minor">
-            <a:schemeClr val="tx1"/>
-          </a:fontRef>
-        </p:style>
-      </p:cxnSp>
-      <p:cxnSp>
-        <p:nvCxnSpPr>
-          <p:cNvPr id="105" name="Connecteur droit avec flèche 104">
-            <a:extLst>
-              <a:ext uri="{FF2B5EF4-FFF2-40B4-BE49-F238E27FC236}">
-                <a16:creationId xmlns:a16="http://schemas.microsoft.com/office/drawing/2014/main" id="{535EA614-6159-464F-AC2B-AFB341605941}"/>
-              </a:ext>
-            </a:extLst>
-          </p:cNvPr>
-          <p:cNvCxnSpPr>
-            <a:cxnSpLocks/>
-            <a:stCxn id="86" idx="0"/>
-            <a:endCxn id="112" idx="4"/>
-          </p:cNvCxnSpPr>
-          <p:nvPr/>
-        </p:nvCxnSpPr>
-        <p:spPr>
-          <a:xfrm flipV="1">
-            <a:off x="8468781" y="2777001"/>
-            <a:ext cx="249766" cy="688766"/>
-          </a:xfrm>
-          <a:prstGeom prst="straightConnector1">
-            <a:avLst/>
-          </a:prstGeom>
-          <a:ln>
-            <a:tailEnd type="triangle"/>
-          </a:ln>
-        </p:spPr>
-        <p:style>
-          <a:lnRef idx="1">
-            <a:schemeClr val="accent2"/>
-          </a:lnRef>
-          <a:fillRef idx="0">
-            <a:schemeClr val="accent2"/>
-          </a:fillRef>
-          <a:effectRef idx="0">
-            <a:schemeClr val="accent2"/>
-          </a:effectRef>
-          <a:fontRef idx="minor">
-            <a:schemeClr val="tx1"/>
-          </a:fontRef>
-        </p:style>
-      </p:cxnSp>
-      <p:sp>
-        <p:nvSpPr>
-          <p:cNvPr id="112" name="Ellipse 111">
-            <a:extLst>
-              <a:ext uri="{FF2B5EF4-FFF2-40B4-BE49-F238E27FC236}">
-                <a16:creationId xmlns:a16="http://schemas.microsoft.com/office/drawing/2014/main" id="{493842CD-0665-4A27-9432-1B5D4CD35AA8}"/>
-              </a:ext>
-            </a:extLst>
-          </p:cNvPr>
-          <p:cNvSpPr/>
-          <p:nvPr/>
-        </p:nvSpPr>
-        <p:spPr>
-          <a:xfrm>
-            <a:off x="8396814" y="2218203"/>
-            <a:ext cx="643466" cy="558798"/>
-          </a:xfrm>
-          <a:prstGeom prst="ellipse">
-            <a:avLst/>
-          </a:prstGeom>
-          <a:solidFill>
-            <a:schemeClr val="bg2"/>
-          </a:solidFill>
-          <a:ln>
-            <a:solidFill>
-              <a:schemeClr val="tx1"/>
-            </a:solidFill>
-          </a:ln>
-        </p:spPr>
-        <p:style>
-          <a:lnRef idx="2">
-            <a:schemeClr val="accent3">
-              <a:shade val="50000"/>
-            </a:schemeClr>
-          </a:lnRef>
-          <a:fillRef idx="1">
-            <a:schemeClr val="accent3"/>
-          </a:fillRef>
-          <a:effectRef idx="0">
-            <a:schemeClr val="accent3"/>
-          </a:effectRef>
-          <a:fontRef idx="minor">
-            <a:schemeClr val="lt1"/>
-          </a:fontRef>
-        </p:style>
-        <p:txBody>
-          <a:bodyPr rtlCol="0" anchor="ctr"/>
-          <a:lstStyle/>
-          <a:p>
-            <a:pPr algn="ctr"/>
-            <a:r>
-              <a:rPr lang="fr-FR" dirty="0" err="1">
-                <a:solidFill>
-                  <a:schemeClr val="tx1"/>
-                </a:solidFill>
-              </a:rPr>
-              <a:t>t</a:t>
-            </a:r>
-            <a:r>
-              <a:rPr lang="fr-FR" baseline="-25000" dirty="0" err="1">
-                <a:solidFill>
-                  <a:schemeClr val="tx1"/>
-                </a:solidFill>
-              </a:rPr>
-              <a:t>y</a:t>
-            </a:r>
-            <a:endParaRPr lang="fr-FR" baseline="-25000" dirty="0">
-              <a:solidFill>
-                <a:schemeClr val="tx1"/>
-              </a:solidFill>
-            </a:endParaRPr>
-          </a:p>
-        </p:txBody>
-      </p:sp>
-      <p:cxnSp>
-        <p:nvCxnSpPr>
-          <p:cNvPr id="115" name="Connecteur droit avec flèche 114">
-            <a:extLst>
-              <a:ext uri="{FF2B5EF4-FFF2-40B4-BE49-F238E27FC236}">
-                <a16:creationId xmlns:a16="http://schemas.microsoft.com/office/drawing/2014/main" id="{C55FE631-DE36-4001-953D-547F103476B8}"/>
-              </a:ext>
-            </a:extLst>
-          </p:cNvPr>
-          <p:cNvCxnSpPr>
-            <a:cxnSpLocks/>
-            <a:stCxn id="55" idx="7"/>
-            <a:endCxn id="112" idx="2"/>
-          </p:cNvCxnSpPr>
-          <p:nvPr/>
-        </p:nvCxnSpPr>
-        <p:spPr>
-          <a:xfrm>
-            <a:off x="5752000" y="2234387"/>
-            <a:ext cx="2644814" cy="263215"/>
-          </a:xfrm>
-          <a:prstGeom prst="straightConnector1">
-            <a:avLst/>
-          </a:prstGeom>
-          <a:ln>
-            <a:tailEnd type="triangle"/>
-          </a:ln>
-        </p:spPr>
-        <p:style>
-          <a:lnRef idx="1">
-            <a:schemeClr val="accent2"/>
-          </a:lnRef>
-          <a:fillRef idx="0">
-            <a:schemeClr val="accent2"/>
-          </a:fillRef>
-          <a:effectRef idx="0">
-            <a:schemeClr val="accent2"/>
-          </a:effectRef>
-          <a:fontRef idx="minor">
-            <a:schemeClr val="tx1"/>
-          </a:fontRef>
-        </p:style>
-      </p:cxnSp>
-      <p:cxnSp>
-        <p:nvCxnSpPr>
-          <p:cNvPr id="119" name="Connecteur droit avec flèche 118">
-            <a:extLst>
-              <a:ext uri="{FF2B5EF4-FFF2-40B4-BE49-F238E27FC236}">
-                <a16:creationId xmlns:a16="http://schemas.microsoft.com/office/drawing/2014/main" id="{22B5DE84-1C10-45BC-BAEB-F2A2D97E6B8A}"/>
-              </a:ext>
-            </a:extLst>
-          </p:cNvPr>
-          <p:cNvCxnSpPr>
-            <a:cxnSpLocks/>
-            <a:stCxn id="56" idx="6"/>
-          </p:cNvCxnSpPr>
-          <p:nvPr/>
-        </p:nvCxnSpPr>
-        <p:spPr>
-          <a:xfrm flipV="1">
-            <a:off x="3841751" y="2692227"/>
-            <a:ext cx="4654546" cy="663474"/>
-          </a:xfrm>
-          <a:prstGeom prst="straightConnector1">
-            <a:avLst/>
-          </a:prstGeom>
-          <a:ln>
-            <a:tailEnd type="triangle"/>
-          </a:ln>
-        </p:spPr>
-        <p:style>
-          <a:lnRef idx="1">
-            <a:schemeClr val="accent2"/>
-          </a:lnRef>
-          <a:fillRef idx="0">
-            <a:schemeClr val="accent2"/>
-          </a:fillRef>
-          <a:effectRef idx="0">
-            <a:schemeClr val="accent2"/>
-          </a:effectRef>
-          <a:fontRef idx="minor">
-            <a:schemeClr val="tx1"/>
-          </a:fontRef>
-        </p:style>
-      </p:cxnSp>
-      <p:cxnSp>
-        <p:nvCxnSpPr>
-          <p:cNvPr id="122" name="Connecteur droit avec flèche 121">
-            <a:extLst>
-              <a:ext uri="{FF2B5EF4-FFF2-40B4-BE49-F238E27FC236}">
-                <a16:creationId xmlns:a16="http://schemas.microsoft.com/office/drawing/2014/main" id="{6A96B123-4EE6-4AEA-9FBE-4ACC354255C2}"/>
-              </a:ext>
-            </a:extLst>
-          </p:cNvPr>
-          <p:cNvCxnSpPr>
-            <a:cxnSpLocks/>
-            <a:stCxn id="83" idx="7"/>
-            <a:endCxn id="112" idx="3"/>
-          </p:cNvCxnSpPr>
-          <p:nvPr/>
-        </p:nvCxnSpPr>
-        <p:spPr>
-          <a:xfrm flipV="1">
-            <a:off x="5752000" y="2695167"/>
-            <a:ext cx="2739047" cy="1326573"/>
-          </a:xfrm>
-          <a:prstGeom prst="straightConnector1">
-            <a:avLst/>
-          </a:prstGeom>
-          <a:ln>
-            <a:tailEnd type="triangle"/>
-          </a:ln>
-        </p:spPr>
-        <p:style>
-          <a:lnRef idx="1">
-            <a:schemeClr val="accent2"/>
-          </a:lnRef>
-          <a:fillRef idx="0">
-            <a:schemeClr val="accent2"/>
-          </a:fillRef>
-          <a:effectRef idx="0">
-            <a:schemeClr val="accent2"/>
-          </a:effectRef>
-          <a:fontRef idx="minor">
-            <a:schemeClr val="tx1"/>
-          </a:fontRef>
-        </p:style>
-      </p:cxnSp>
-      <p:cxnSp>
-        <p:nvCxnSpPr>
-          <p:cNvPr id="125" name="Connecteur droit 124">
-            <a:extLst>
-              <a:ext uri="{FF2B5EF4-FFF2-40B4-BE49-F238E27FC236}">
-                <a16:creationId xmlns:a16="http://schemas.microsoft.com/office/drawing/2014/main" id="{EA4C95C5-5B3C-4AB3-9E7C-3B45FEF5B3B1}"/>
-              </a:ext>
-            </a:extLst>
-          </p:cNvPr>
-          <p:cNvCxnSpPr>
-            <a:cxnSpLocks/>
-            <a:stCxn id="61" idx="1"/>
-          </p:cNvCxnSpPr>
-          <p:nvPr/>
-        </p:nvCxnSpPr>
-        <p:spPr>
-          <a:xfrm flipH="1" flipV="1">
-            <a:off x="9040281" y="2457685"/>
-            <a:ext cx="922866" cy="78440"/>
-          </a:xfrm>
-          <a:prstGeom prst="line">
-            <a:avLst/>
-          </a:prstGeom>
-        </p:spPr>
-        <p:style>
-          <a:lnRef idx="1">
-            <a:schemeClr val="accent1"/>
-          </a:lnRef>
-          <a:fillRef idx="0">
-            <a:schemeClr val="accent1"/>
-          </a:fillRef>
-          <a:effectRef idx="0">
-            <a:schemeClr val="accent1"/>
-          </a:effectRef>
-          <a:fontRef idx="minor">
-            <a:schemeClr val="tx1"/>
-          </a:fontRef>
-        </p:style>
-      </p:cxnSp>
     </p:spTree>
     <p:extLst>
       <p:ext uri="{BB962C8B-B14F-4D97-AF65-F5344CB8AC3E}">
-        <p14:creationId xmlns:p14="http://schemas.microsoft.com/office/powerpoint/2010/main" val="632821837"/>
+        <p14:creationId xmlns:p14="http://schemas.microsoft.com/office/powerpoint/2010/main" val="3679624687"/>
       </p:ext>
     </p:extLst>
   </p:cSld>
